--- a/09/00__DATA515_09_Packages.pptx
+++ b/09/00__DATA515_09_Packages.pptx
@@ -1,31 +1,31 @@
 
 <file path=ppt/presentation.xml><?xml version="1.0" encoding="utf-8"?>
-<p:presentation xmlns:a="http://schemas.openxmlformats.org/drawingml/2006/main" xmlns:r="http://schemas.openxmlformats.org/officeDocument/2006/relationships" xmlns:mc="http://schemas.openxmlformats.org/markup-compatibility/2006" xmlns:mv="urn:schemas-microsoft-com:mac:vml" xmlns:p="http://schemas.openxmlformats.org/presentationml/2006/main" xmlns:c="http://schemas.openxmlformats.org/drawingml/2006/chart" xmlns:dgm="http://schemas.openxmlformats.org/drawingml/2006/diagram" xmlns:o="urn:schemas-microsoft-com:office:office" xmlns:v="urn:schemas-microsoft-com:vml" xmlns:pvml="urn:schemas-microsoft-com:office:powerpoint" xmlns:com="http://schemas.openxmlformats.org/drawingml/2006/compatibility" xmlns:p14="http://schemas.microsoft.com/office/powerpoint/2010/main" xmlns:p15="http://schemas.microsoft.com/office/powerpoint/2012/main" xmlns:ahyp="http://schemas.microsoft.com/office/drawing/2018/hyperlinkcolor" autoCompressPictures="0" strictFirstAndLastChars="0" saveSubsetFonts="1">
+<p:presentation xmlns:a="http://schemas.openxmlformats.org/drawingml/2006/main" xmlns:r="http://schemas.openxmlformats.org/officeDocument/2006/relationships" xmlns:p="http://schemas.openxmlformats.org/presentationml/2006/main" strictFirstAndLastChars="0" saveSubsetFonts="1" autoCompressPictures="0">
   <p:sldMasterIdLst>
-    <p:sldMasterId id="2147483659" r:id="rId4"/>
+    <p:sldMasterId id="2147483659" r:id="rId1"/>
   </p:sldMasterIdLst>
   <p:notesMasterIdLst>
-    <p:notesMasterId r:id="rId5"/>
+    <p:notesMasterId r:id="rId15"/>
   </p:notesMasterIdLst>
   <p:sldIdLst>
-    <p:sldId id="256" r:id="rId6"/>
-    <p:sldId id="257" r:id="rId7"/>
-    <p:sldId id="258" r:id="rId8"/>
-    <p:sldId id="259" r:id="rId9"/>
-    <p:sldId id="260" r:id="rId10"/>
-    <p:sldId id="261" r:id="rId11"/>
-    <p:sldId id="262" r:id="rId12"/>
-    <p:sldId id="263" r:id="rId13"/>
-    <p:sldId id="264" r:id="rId14"/>
-    <p:sldId id="265" r:id="rId15"/>
-    <p:sldId id="266" r:id="rId16"/>
-    <p:sldId id="267" r:id="rId17"/>
-    <p:sldId id="268" r:id="rId18"/>
+    <p:sldId id="256" r:id="rId2"/>
+    <p:sldId id="257" r:id="rId3"/>
+    <p:sldId id="258" r:id="rId4"/>
+    <p:sldId id="259" r:id="rId5"/>
+    <p:sldId id="260" r:id="rId6"/>
+    <p:sldId id="261" r:id="rId7"/>
+    <p:sldId id="262" r:id="rId8"/>
+    <p:sldId id="263" r:id="rId9"/>
+    <p:sldId id="264" r:id="rId10"/>
+    <p:sldId id="265" r:id="rId11"/>
+    <p:sldId id="266" r:id="rId12"/>
+    <p:sldId id="267" r:id="rId13"/>
+    <p:sldId id="268" r:id="rId14"/>
   </p:sldIdLst>
-  <p:sldSz cy="5143500" cx="9144000"/>
+  <p:sldSz cx="9144000" cy="5143500" type="screen16x9"/>
   <p:notesSz cx="6858000" cy="9144000"/>
   <p:defaultTextStyle>
-    <a:defPPr lvl="0" marR="0" rtl="0" algn="l">
+    <a:defPPr marR="0" lvl="0" algn="l" rtl="0">
       <a:lnSpc>
         <a:spcPct val="100000"/>
       </a:lnSpc>
@@ -36,7 +36,7 @@
         <a:spcPts val="0"/>
       </a:spcAft>
     </a:defPPr>
-    <a:lvl1pPr lvl="0" marR="0" rtl="0" algn="l">
+    <a:lvl1pPr marR="0" lvl="0" algn="l" rtl="0">
       <a:lnSpc>
         <a:spcPct val="100000"/>
       </a:lnSpc>
@@ -50,7 +50,7 @@
         <a:srgbClr val="000000"/>
       </a:buClr>
       <a:buFont typeface="Arial"/>
-      <a:defRPr b="0" i="0" sz="1400" u="none" cap="none" strike="noStrike">
+      <a:defRPr sz="1400" b="0" i="0" u="none" strike="noStrike" cap="none">
         <a:solidFill>
           <a:srgbClr val="000000"/>
         </a:solidFill>
@@ -60,7 +60,7 @@
         <a:sym typeface="Arial"/>
       </a:defRPr>
     </a:lvl1pPr>
-    <a:lvl2pPr lvl="1" marR="0" rtl="0" algn="l">
+    <a:lvl2pPr marR="0" lvl="1" algn="l" rtl="0">
       <a:lnSpc>
         <a:spcPct val="100000"/>
       </a:lnSpc>
@@ -74,7 +74,7 @@
         <a:srgbClr val="000000"/>
       </a:buClr>
       <a:buFont typeface="Arial"/>
-      <a:defRPr b="0" i="0" sz="1400" u="none" cap="none" strike="noStrike">
+      <a:defRPr sz="1400" b="0" i="0" u="none" strike="noStrike" cap="none">
         <a:solidFill>
           <a:srgbClr val="000000"/>
         </a:solidFill>
@@ -84,7 +84,7 @@
         <a:sym typeface="Arial"/>
       </a:defRPr>
     </a:lvl2pPr>
-    <a:lvl3pPr lvl="2" marR="0" rtl="0" algn="l">
+    <a:lvl3pPr marR="0" lvl="2" algn="l" rtl="0">
       <a:lnSpc>
         <a:spcPct val="100000"/>
       </a:lnSpc>
@@ -98,7 +98,7 @@
         <a:srgbClr val="000000"/>
       </a:buClr>
       <a:buFont typeface="Arial"/>
-      <a:defRPr b="0" i="0" sz="1400" u="none" cap="none" strike="noStrike">
+      <a:defRPr sz="1400" b="0" i="0" u="none" strike="noStrike" cap="none">
         <a:solidFill>
           <a:srgbClr val="000000"/>
         </a:solidFill>
@@ -108,7 +108,7 @@
         <a:sym typeface="Arial"/>
       </a:defRPr>
     </a:lvl3pPr>
-    <a:lvl4pPr lvl="3" marR="0" rtl="0" algn="l">
+    <a:lvl4pPr marR="0" lvl="3" algn="l" rtl="0">
       <a:lnSpc>
         <a:spcPct val="100000"/>
       </a:lnSpc>
@@ -122,7 +122,7 @@
         <a:srgbClr val="000000"/>
       </a:buClr>
       <a:buFont typeface="Arial"/>
-      <a:defRPr b="0" i="0" sz="1400" u="none" cap="none" strike="noStrike">
+      <a:defRPr sz="1400" b="0" i="0" u="none" strike="noStrike" cap="none">
         <a:solidFill>
           <a:srgbClr val="000000"/>
         </a:solidFill>
@@ -132,7 +132,7 @@
         <a:sym typeface="Arial"/>
       </a:defRPr>
     </a:lvl4pPr>
-    <a:lvl5pPr lvl="4" marR="0" rtl="0" algn="l">
+    <a:lvl5pPr marR="0" lvl="4" algn="l" rtl="0">
       <a:lnSpc>
         <a:spcPct val="100000"/>
       </a:lnSpc>
@@ -146,7 +146,7 @@
         <a:srgbClr val="000000"/>
       </a:buClr>
       <a:buFont typeface="Arial"/>
-      <a:defRPr b="0" i="0" sz="1400" u="none" cap="none" strike="noStrike">
+      <a:defRPr sz="1400" b="0" i="0" u="none" strike="noStrike" cap="none">
         <a:solidFill>
           <a:srgbClr val="000000"/>
         </a:solidFill>
@@ -156,7 +156,7 @@
         <a:sym typeface="Arial"/>
       </a:defRPr>
     </a:lvl5pPr>
-    <a:lvl6pPr lvl="5" marR="0" rtl="0" algn="l">
+    <a:lvl6pPr marR="0" lvl="5" algn="l" rtl="0">
       <a:lnSpc>
         <a:spcPct val="100000"/>
       </a:lnSpc>
@@ -170,7 +170,7 @@
         <a:srgbClr val="000000"/>
       </a:buClr>
       <a:buFont typeface="Arial"/>
-      <a:defRPr b="0" i="0" sz="1400" u="none" cap="none" strike="noStrike">
+      <a:defRPr sz="1400" b="0" i="0" u="none" strike="noStrike" cap="none">
         <a:solidFill>
           <a:srgbClr val="000000"/>
         </a:solidFill>
@@ -180,7 +180,7 @@
         <a:sym typeface="Arial"/>
       </a:defRPr>
     </a:lvl6pPr>
-    <a:lvl7pPr lvl="6" marR="0" rtl="0" algn="l">
+    <a:lvl7pPr marR="0" lvl="6" algn="l" rtl="0">
       <a:lnSpc>
         <a:spcPct val="100000"/>
       </a:lnSpc>
@@ -194,7 +194,7 @@
         <a:srgbClr val="000000"/>
       </a:buClr>
       <a:buFont typeface="Arial"/>
-      <a:defRPr b="0" i="0" sz="1400" u="none" cap="none" strike="noStrike">
+      <a:defRPr sz="1400" b="0" i="0" u="none" strike="noStrike" cap="none">
         <a:solidFill>
           <a:srgbClr val="000000"/>
         </a:solidFill>
@@ -204,7 +204,7 @@
         <a:sym typeface="Arial"/>
       </a:defRPr>
     </a:lvl7pPr>
-    <a:lvl8pPr lvl="7" marR="0" rtl="0" algn="l">
+    <a:lvl8pPr marR="0" lvl="7" algn="l" rtl="0">
       <a:lnSpc>
         <a:spcPct val="100000"/>
       </a:lnSpc>
@@ -218,7 +218,7 @@
         <a:srgbClr val="000000"/>
       </a:buClr>
       <a:buFont typeface="Arial"/>
-      <a:defRPr b="0" i="0" sz="1400" u="none" cap="none" strike="noStrike">
+      <a:defRPr sz="1400" b="0" i="0" u="none" strike="noStrike" cap="none">
         <a:solidFill>
           <a:srgbClr val="000000"/>
         </a:solidFill>
@@ -228,7 +228,7 @@
         <a:sym typeface="Arial"/>
       </a:defRPr>
     </a:lvl8pPr>
-    <a:lvl9pPr lvl="8" marR="0" rtl="0" algn="l">
+    <a:lvl9pPr marR="0" lvl="8" algn="l" rtl="0">
       <a:lnSpc>
         <a:spcPct val="100000"/>
       </a:lnSpc>
@@ -242,7 +242,7 @@
         <a:srgbClr val="000000"/>
       </a:buClr>
       <a:buFont typeface="Arial"/>
-      <a:defRPr b="0" i="0" sz="1400" u="none" cap="none" strike="noStrike">
+      <a:defRPr sz="1400" b="0" i="0" u="none" strike="noStrike" cap="none">
         <a:solidFill>
           <a:srgbClr val="000000"/>
         </a:solidFill>
@@ -255,7 +255,7 @@
   </p:defaultTextStyle>
   <p:extLst>
     <p:ext uri="{EFAFB233-063F-42B5-8137-9DF3F51BA10A}">
-      <p15:sldGuideLst>
+      <p15:sldGuideLst xmlns:p15="http://schemas.microsoft.com/office/powerpoint/2012/main">
         <p15:guide id="1" orient="horz" pos="1620">
           <p15:clr>
             <a:srgbClr val="A4A3A4"/>
@@ -273,11 +273,16 @@
 </file>
 
 <file path=ppt/notesMasters/notesMaster1.xml><?xml version="1.0" encoding="utf-8"?>
-<p:notesMaster xmlns:a="http://schemas.openxmlformats.org/drawingml/2006/main" xmlns:r="http://schemas.openxmlformats.org/officeDocument/2006/relationships" xmlns:mc="http://schemas.openxmlformats.org/markup-compatibility/2006" xmlns:mv="urn:schemas-microsoft-com:mac:vml" xmlns:p="http://schemas.openxmlformats.org/presentationml/2006/main" xmlns:c="http://schemas.openxmlformats.org/drawingml/2006/chart" xmlns:dgm="http://schemas.openxmlformats.org/drawingml/2006/diagram" xmlns:o="urn:schemas-microsoft-com:office:office" xmlns:v="urn:schemas-microsoft-com:vml" xmlns:pvml="urn:schemas-microsoft-com:office:powerpoint" xmlns:com="http://schemas.openxmlformats.org/drawingml/2006/compatibility" xmlns:p14="http://schemas.microsoft.com/office/powerpoint/2010/main" xmlns:p15="http://schemas.microsoft.com/office/powerpoint/2012/main" xmlns:ahyp="http://schemas.microsoft.com/office/drawing/2018/hyperlinkcolor">
+<p:notesMaster xmlns:a="http://schemas.openxmlformats.org/drawingml/2006/main" xmlns:r="http://schemas.openxmlformats.org/officeDocument/2006/relationships" xmlns:p="http://schemas.openxmlformats.org/presentationml/2006/main">
   <p:cSld>
+    <p:bg>
+      <p:bgRef idx="1001">
+        <a:schemeClr val="bg1"/>
+      </p:bgRef>
+    </p:bg>
     <p:spTree>
       <p:nvGrpSpPr>
-        <p:cNvPr id="2" name="Shape 2"/>
+        <p:cNvPr id="1" name="Shape 2"/>
         <p:cNvGrpSpPr/>
         <p:nvPr/>
       </p:nvGrpSpPr>
@@ -292,9 +297,11 @@
       <p:sp>
         <p:nvSpPr>
           <p:cNvPr id="3" name="Google Shape;3;n"/>
-          <p:cNvSpPr/>
+          <p:cNvSpPr>
+            <a:spLocks noGrp="1" noRot="1" noChangeAspect="1"/>
+          </p:cNvSpPr>
           <p:nvPr>
-            <p:ph idx="2" type="sldImg"/>
+            <p:ph type="sldImg" idx="2"/>
           </p:nvPr>
         </p:nvSpPr>
         <p:spPr>
@@ -303,9 +310,13 @@
             <a:ext cx="6096075" cy="3429000"/>
           </a:xfrm>
           <a:custGeom>
-            <a:rect b="b" l="l" r="r" t="t"/>
+            <a:avLst/>
+            <a:gdLst/>
+            <a:ahLst/>
+            <a:cxnLst/>
+            <a:rect l="l" t="t" r="r" b="b"/>
             <a:pathLst>
-              <a:path extrusionOk="0" h="120000" w="120000">
+              <a:path w="120000" h="120000" extrusionOk="0">
                 <a:moveTo>
                   <a:pt x="0" y="0"/>
                 </a:moveTo>
@@ -323,23 +334,25 @@
             </a:pathLst>
           </a:custGeom>
           <a:noFill/>
-          <a:ln cap="flat" cmpd="sng" w="9525">
+          <a:ln w="9525" cap="flat" cmpd="sng">
             <a:solidFill>
               <a:srgbClr val="000000"/>
             </a:solidFill>
             <a:prstDash val="solid"/>
             <a:round/>
-            <a:headEnd len="sm" w="sm" type="none"/>
-            <a:tailEnd len="sm" w="sm" type="none"/>
+            <a:headEnd type="none" w="sm" len="sm"/>
+            <a:tailEnd type="none" w="sm" len="sm"/>
           </a:ln>
         </p:spPr>
       </p:sp>
       <p:sp>
         <p:nvSpPr>
           <p:cNvPr id="4" name="Google Shape;4;n"/>
-          <p:cNvSpPr txBox="1"/>
+          <p:cNvSpPr txBox="1">
+            <a:spLocks noGrp="1"/>
+          </p:cNvSpPr>
           <p:nvPr>
-            <p:ph idx="1" type="body"/>
+            <p:ph type="body" idx="1"/>
           </p:nvPr>
         </p:nvSpPr>
         <p:spPr>
@@ -356,11 +369,11 @@
           </a:ln>
         </p:spPr>
         <p:txBody>
-          <a:bodyPr anchorCtr="0" anchor="t" bIns="91425" lIns="91425" spcFirstLastPara="1" rIns="91425" wrap="square" tIns="91425">
+          <a:bodyPr spcFirstLastPara="1" wrap="square" lIns="91425" tIns="91425" rIns="91425" bIns="91425" anchor="t" anchorCtr="0">
             <a:noAutofit/>
           </a:bodyPr>
           <a:lstStyle>
-            <a:lvl1pPr indent="-298450" lvl="0" marL="457200">
+            <a:lvl1pPr marL="457200" lvl="0" indent="-298450">
               <a:spcBef>
                 <a:spcPts val="0"/>
               </a:spcBef>
@@ -371,7 +384,7 @@
               <a:buChar char="●"/>
               <a:defRPr sz="1100"/>
             </a:lvl1pPr>
-            <a:lvl2pPr indent="-298450" lvl="1" marL="914400">
+            <a:lvl2pPr marL="914400" lvl="1" indent="-298450">
               <a:spcBef>
                 <a:spcPts val="0"/>
               </a:spcBef>
@@ -382,7 +395,7 @@
               <a:buChar char="○"/>
               <a:defRPr sz="1100"/>
             </a:lvl2pPr>
-            <a:lvl3pPr indent="-298450" lvl="2" marL="1371600">
+            <a:lvl3pPr marL="1371600" lvl="2" indent="-298450">
               <a:spcBef>
                 <a:spcPts val="0"/>
               </a:spcBef>
@@ -393,7 +406,7 @@
               <a:buChar char="■"/>
               <a:defRPr sz="1100"/>
             </a:lvl3pPr>
-            <a:lvl4pPr indent="-298450" lvl="3" marL="1828800">
+            <a:lvl4pPr marL="1828800" lvl="3" indent="-298450">
               <a:spcBef>
                 <a:spcPts val="0"/>
               </a:spcBef>
@@ -404,7 +417,7 @@
               <a:buChar char="●"/>
               <a:defRPr sz="1100"/>
             </a:lvl4pPr>
-            <a:lvl5pPr indent="-298450" lvl="4" marL="2286000">
+            <a:lvl5pPr marL="2286000" lvl="4" indent="-298450">
               <a:spcBef>
                 <a:spcPts val="0"/>
               </a:spcBef>
@@ -415,7 +428,7 @@
               <a:buChar char="○"/>
               <a:defRPr sz="1100"/>
             </a:lvl5pPr>
-            <a:lvl6pPr indent="-298450" lvl="5" marL="2743200">
+            <a:lvl6pPr marL="2743200" lvl="5" indent="-298450">
               <a:spcBef>
                 <a:spcPts val="0"/>
               </a:spcBef>
@@ -426,7 +439,7 @@
               <a:buChar char="■"/>
               <a:defRPr sz="1100"/>
             </a:lvl6pPr>
-            <a:lvl7pPr indent="-298450" lvl="6" marL="3200400">
+            <a:lvl7pPr marL="3200400" lvl="6" indent="-298450">
               <a:spcBef>
                 <a:spcPts val="0"/>
               </a:spcBef>
@@ -437,7 +450,7 @@
               <a:buChar char="●"/>
               <a:defRPr sz="1100"/>
             </a:lvl7pPr>
-            <a:lvl8pPr indent="-298450" lvl="7" marL="3657600">
+            <a:lvl8pPr marL="3657600" lvl="7" indent="-298450">
               <a:spcBef>
                 <a:spcPts val="0"/>
               </a:spcBef>
@@ -448,7 +461,7 @@
               <a:buChar char="○"/>
               <a:defRPr sz="1100"/>
             </a:lvl8pPr>
-            <a:lvl9pPr indent="-298450" lvl="8" marL="4114800">
+            <a:lvl9pPr marL="4114800" lvl="8" indent="-298450">
               <a:spcBef>
                 <a:spcPts val="0"/>
               </a:spcBef>
@@ -460,14 +473,16 @@
               <a:defRPr sz="1100"/>
             </a:lvl9pPr>
           </a:lstStyle>
-          <a:p/>
+          <a:p>
+            <a:endParaRPr/>
+          </a:p>
         </p:txBody>
       </p:sp>
     </p:spTree>
   </p:cSld>
-  <p:clrMap accent1="accent1" accent2="accent2" accent3="accent3" accent4="accent4" accent5="accent5" accent6="accent6" bg1="lt1" bg2="dk2" tx1="dk1" tx2="lt2" folHlink="folHlink" hlink="hlink"/>
+  <p:clrMap bg1="lt1" tx1="dk1" bg2="dk2" tx2="lt2" accent1="accent1" accent2="accent2" accent3="accent3" accent4="accent4" accent5="accent5" accent6="accent6" hlink="hlink" folHlink="folHlink"/>
   <p:notesStyle>
-    <a:defPPr lvl="0" marR="0" rtl="0" algn="l">
+    <a:defPPr marR="0" lvl="0" algn="l" rtl="0">
       <a:lnSpc>
         <a:spcPct val="100000"/>
       </a:lnSpc>
@@ -478,7 +493,7 @@
         <a:spcPts val="0"/>
       </a:spcAft>
     </a:defPPr>
-    <a:lvl1pPr lvl="0" marR="0" rtl="0" algn="l">
+    <a:lvl1pPr marR="0" lvl="0" algn="l" rtl="0">
       <a:lnSpc>
         <a:spcPct val="100000"/>
       </a:lnSpc>
@@ -492,7 +507,7 @@
         <a:srgbClr val="000000"/>
       </a:buClr>
       <a:buFont typeface="Arial"/>
-      <a:defRPr b="0" i="0" sz="1400" u="none" cap="none" strike="noStrike">
+      <a:defRPr sz="1400" b="0" i="0" u="none" strike="noStrike" cap="none">
         <a:solidFill>
           <a:srgbClr val="000000"/>
         </a:solidFill>
@@ -502,7 +517,7 @@
         <a:sym typeface="Arial"/>
       </a:defRPr>
     </a:lvl1pPr>
-    <a:lvl2pPr lvl="1" marR="0" rtl="0" algn="l">
+    <a:lvl2pPr marR="0" lvl="1" algn="l" rtl="0">
       <a:lnSpc>
         <a:spcPct val="100000"/>
       </a:lnSpc>
@@ -516,7 +531,7 @@
         <a:srgbClr val="000000"/>
       </a:buClr>
       <a:buFont typeface="Arial"/>
-      <a:defRPr b="0" i="0" sz="1400" u="none" cap="none" strike="noStrike">
+      <a:defRPr sz="1400" b="0" i="0" u="none" strike="noStrike" cap="none">
         <a:solidFill>
           <a:srgbClr val="000000"/>
         </a:solidFill>
@@ -526,7 +541,7 @@
         <a:sym typeface="Arial"/>
       </a:defRPr>
     </a:lvl2pPr>
-    <a:lvl3pPr lvl="2" marR="0" rtl="0" algn="l">
+    <a:lvl3pPr marR="0" lvl="2" algn="l" rtl="0">
       <a:lnSpc>
         <a:spcPct val="100000"/>
       </a:lnSpc>
@@ -540,7 +555,7 @@
         <a:srgbClr val="000000"/>
       </a:buClr>
       <a:buFont typeface="Arial"/>
-      <a:defRPr b="0" i="0" sz="1400" u="none" cap="none" strike="noStrike">
+      <a:defRPr sz="1400" b="0" i="0" u="none" strike="noStrike" cap="none">
         <a:solidFill>
           <a:srgbClr val="000000"/>
         </a:solidFill>
@@ -550,7 +565,7 @@
         <a:sym typeface="Arial"/>
       </a:defRPr>
     </a:lvl3pPr>
-    <a:lvl4pPr lvl="3" marR="0" rtl="0" algn="l">
+    <a:lvl4pPr marR="0" lvl="3" algn="l" rtl="0">
       <a:lnSpc>
         <a:spcPct val="100000"/>
       </a:lnSpc>
@@ -564,7 +579,7 @@
         <a:srgbClr val="000000"/>
       </a:buClr>
       <a:buFont typeface="Arial"/>
-      <a:defRPr b="0" i="0" sz="1400" u="none" cap="none" strike="noStrike">
+      <a:defRPr sz="1400" b="0" i="0" u="none" strike="noStrike" cap="none">
         <a:solidFill>
           <a:srgbClr val="000000"/>
         </a:solidFill>
@@ -574,7 +589,7 @@
         <a:sym typeface="Arial"/>
       </a:defRPr>
     </a:lvl4pPr>
-    <a:lvl5pPr lvl="4" marR="0" rtl="0" algn="l">
+    <a:lvl5pPr marR="0" lvl="4" algn="l" rtl="0">
       <a:lnSpc>
         <a:spcPct val="100000"/>
       </a:lnSpc>
@@ -588,7 +603,7 @@
         <a:srgbClr val="000000"/>
       </a:buClr>
       <a:buFont typeface="Arial"/>
-      <a:defRPr b="0" i="0" sz="1400" u="none" cap="none" strike="noStrike">
+      <a:defRPr sz="1400" b="0" i="0" u="none" strike="noStrike" cap="none">
         <a:solidFill>
           <a:srgbClr val="000000"/>
         </a:solidFill>
@@ -598,7 +613,7 @@
         <a:sym typeface="Arial"/>
       </a:defRPr>
     </a:lvl5pPr>
-    <a:lvl6pPr lvl="5" marR="0" rtl="0" algn="l">
+    <a:lvl6pPr marR="0" lvl="5" algn="l" rtl="0">
       <a:lnSpc>
         <a:spcPct val="100000"/>
       </a:lnSpc>
@@ -612,7 +627,7 @@
         <a:srgbClr val="000000"/>
       </a:buClr>
       <a:buFont typeface="Arial"/>
-      <a:defRPr b="0" i="0" sz="1400" u="none" cap="none" strike="noStrike">
+      <a:defRPr sz="1400" b="0" i="0" u="none" strike="noStrike" cap="none">
         <a:solidFill>
           <a:srgbClr val="000000"/>
         </a:solidFill>
@@ -622,7 +637,7 @@
         <a:sym typeface="Arial"/>
       </a:defRPr>
     </a:lvl6pPr>
-    <a:lvl7pPr lvl="6" marR="0" rtl="0" algn="l">
+    <a:lvl7pPr marR="0" lvl="6" algn="l" rtl="0">
       <a:lnSpc>
         <a:spcPct val="100000"/>
       </a:lnSpc>
@@ -636,7 +651,7 @@
         <a:srgbClr val="000000"/>
       </a:buClr>
       <a:buFont typeface="Arial"/>
-      <a:defRPr b="0" i="0" sz="1400" u="none" cap="none" strike="noStrike">
+      <a:defRPr sz="1400" b="0" i="0" u="none" strike="noStrike" cap="none">
         <a:solidFill>
           <a:srgbClr val="000000"/>
         </a:solidFill>
@@ -646,7 +661,7 @@
         <a:sym typeface="Arial"/>
       </a:defRPr>
     </a:lvl7pPr>
-    <a:lvl8pPr lvl="7" marR="0" rtl="0" algn="l">
+    <a:lvl8pPr marR="0" lvl="7" algn="l" rtl="0">
       <a:lnSpc>
         <a:spcPct val="100000"/>
       </a:lnSpc>
@@ -660,7 +675,7 @@
         <a:srgbClr val="000000"/>
       </a:buClr>
       <a:buFont typeface="Arial"/>
-      <a:defRPr b="0" i="0" sz="1400" u="none" cap="none" strike="noStrike">
+      <a:defRPr sz="1400" b="0" i="0" u="none" strike="noStrike" cap="none">
         <a:solidFill>
           <a:srgbClr val="000000"/>
         </a:solidFill>
@@ -670,7 +685,7 @@
         <a:sym typeface="Arial"/>
       </a:defRPr>
     </a:lvl8pPr>
-    <a:lvl9pPr lvl="8" marR="0" rtl="0" algn="l">
+    <a:lvl9pPr marR="0" lvl="8" algn="l" rtl="0">
       <a:lnSpc>
         <a:spcPct val="100000"/>
       </a:lnSpc>
@@ -684,7 +699,7 @@
         <a:srgbClr val="000000"/>
       </a:buClr>
       <a:buFont typeface="Arial"/>
-      <a:defRPr b="0" i="0" sz="1400" u="none" cap="none" strike="noStrike">
+      <a:defRPr sz="1400" b="0" i="0" u="none" strike="noStrike" cap="none">
         <a:solidFill>
           <a:srgbClr val="000000"/>
         </a:solidFill>
@@ -699,11 +714,11 @@
 </file>
 
 <file path=ppt/notesSlides/notesSlide1.xml><?xml version="1.0" encoding="utf-8"?>
-<p:notes xmlns:a="http://schemas.openxmlformats.org/drawingml/2006/main" xmlns:r="http://schemas.openxmlformats.org/officeDocument/2006/relationships" xmlns:mc="http://schemas.openxmlformats.org/markup-compatibility/2006" xmlns:mv="urn:schemas-microsoft-com:mac:vml" xmlns:p="http://schemas.openxmlformats.org/presentationml/2006/main" xmlns:c="http://schemas.openxmlformats.org/drawingml/2006/chart" xmlns:dgm="http://schemas.openxmlformats.org/drawingml/2006/diagram" xmlns:o="urn:schemas-microsoft-com:office:office" xmlns:v="urn:schemas-microsoft-com:vml" xmlns:pvml="urn:schemas-microsoft-com:office:powerpoint" xmlns:com="http://schemas.openxmlformats.org/drawingml/2006/compatibility" xmlns:p14="http://schemas.microsoft.com/office/powerpoint/2010/main" xmlns:p15="http://schemas.microsoft.com/office/powerpoint/2012/main" xmlns:ahyp="http://schemas.microsoft.com/office/drawing/2018/hyperlinkcolor" showMasterPhAnim="0" showMasterSp="0">
+<p:notes xmlns:a="http://schemas.openxmlformats.org/drawingml/2006/main" xmlns:r="http://schemas.openxmlformats.org/officeDocument/2006/relationships" xmlns:p="http://schemas.openxmlformats.org/presentationml/2006/main" showMasterSp="0" showMasterPhAnim="0">
   <p:cSld>
     <p:spTree>
       <p:nvGrpSpPr>
-        <p:cNvPr id="58" name="Shape 58"/>
+        <p:cNvPr id="1" name="Shape 58"/>
         <p:cNvGrpSpPr/>
         <p:nvPr/>
       </p:nvGrpSpPr>
@@ -718,20 +733,26 @@
       <p:sp>
         <p:nvSpPr>
           <p:cNvPr id="59" name="Google Shape;59;p:notes"/>
-          <p:cNvSpPr/>
+          <p:cNvSpPr>
+            <a:spLocks noGrp="1" noRot="1" noChangeAspect="1"/>
+          </p:cNvSpPr>
           <p:nvPr>
-            <p:ph idx="2" type="sldImg"/>
+            <p:ph type="sldImg" idx="2"/>
           </p:nvPr>
         </p:nvSpPr>
         <p:spPr>
           <a:xfrm>
-            <a:off x="381300" y="685800"/>
-            <a:ext cx="6096075" cy="3429000"/>
+            <a:off x="381000" y="685800"/>
+            <a:ext cx="6096000" cy="3429000"/>
           </a:xfrm>
           <a:custGeom>
-            <a:rect b="b" l="l" r="r" t="t"/>
+            <a:avLst/>
+            <a:gdLst/>
+            <a:ahLst/>
+            <a:cxnLst/>
+            <a:rect l="l" t="t" r="r" b="b"/>
             <a:pathLst>
-              <a:path extrusionOk="0" h="120000" w="120000">
+              <a:path w="120000" h="120000" extrusionOk="0">
                 <a:moveTo>
                   <a:pt x="0" y="0"/>
                 </a:moveTo>
@@ -753,9 +774,11 @@
       <p:sp>
         <p:nvSpPr>
           <p:cNvPr id="60" name="Google Shape;60;p:notes"/>
-          <p:cNvSpPr txBox="1"/>
+          <p:cNvSpPr txBox="1">
+            <a:spLocks noGrp="1"/>
+          </p:cNvSpPr>
           <p:nvPr>
-            <p:ph idx="1" type="body"/>
+            <p:ph type="body" idx="1"/>
           </p:nvPr>
         </p:nvSpPr>
         <p:spPr>
@@ -768,23 +791,20 @@
           </a:prstGeom>
         </p:spPr>
         <p:txBody>
-          <a:bodyPr anchorCtr="0" anchor="t" bIns="91425" lIns="91425" spcFirstLastPara="1" rIns="91425" wrap="square" tIns="91425">
+          <a:bodyPr spcFirstLastPara="1" wrap="square" lIns="91425" tIns="91425" rIns="91425" bIns="91425" anchor="t" anchorCtr="0">
             <a:noAutofit/>
           </a:bodyPr>
           <a:lstStyle/>
           <a:p>
-            <a:pPr indent="0" lvl="0" marL="0" rtl="0" algn="l">
-              <a:spcBef>
-                <a:spcPts val="0"/>
-              </a:spcBef>
-              <a:spcAft>
-                <a:spcPts val="0"/>
-              </a:spcAft>
-              <a:buNone/>
-            </a:pPr>
-            <a:r>
-              <a:t/>
-            </a:r>
+            <a:pPr marL="0" lvl="0" indent="0" algn="l" rtl="0">
+              <a:spcBef>
+                <a:spcPts val="0"/>
+              </a:spcBef>
+              <a:spcAft>
+                <a:spcPts val="0"/>
+              </a:spcAft>
+              <a:buNone/>
+            </a:pPr>
             <a:endParaRPr/>
           </a:p>
         </p:txBody>
@@ -798,11 +818,11 @@
 </file>
 
 <file path=ppt/notesSlides/notesSlide10.xml><?xml version="1.0" encoding="utf-8"?>
-<p:notes xmlns:a="http://schemas.openxmlformats.org/drawingml/2006/main" xmlns:r="http://schemas.openxmlformats.org/officeDocument/2006/relationships" xmlns:mc="http://schemas.openxmlformats.org/markup-compatibility/2006" xmlns:mv="urn:schemas-microsoft-com:mac:vml" xmlns:p="http://schemas.openxmlformats.org/presentationml/2006/main" xmlns:c="http://schemas.openxmlformats.org/drawingml/2006/chart" xmlns:dgm="http://schemas.openxmlformats.org/drawingml/2006/diagram" xmlns:o="urn:schemas-microsoft-com:office:office" xmlns:v="urn:schemas-microsoft-com:vml" xmlns:pvml="urn:schemas-microsoft-com:office:powerpoint" xmlns:com="http://schemas.openxmlformats.org/drawingml/2006/compatibility" xmlns:p14="http://schemas.microsoft.com/office/powerpoint/2010/main" xmlns:p15="http://schemas.microsoft.com/office/powerpoint/2012/main" xmlns:ahyp="http://schemas.microsoft.com/office/drawing/2018/hyperlinkcolor" showMasterPhAnim="0" showMasterSp="0">
+<p:notes xmlns:a="http://schemas.openxmlformats.org/drawingml/2006/main" xmlns:r="http://schemas.openxmlformats.org/officeDocument/2006/relationships" xmlns:p="http://schemas.openxmlformats.org/presentationml/2006/main" showMasterSp="0" showMasterPhAnim="0">
   <p:cSld>
     <p:spTree>
       <p:nvGrpSpPr>
-        <p:cNvPr id="125" name="Shape 125"/>
+        <p:cNvPr id="1" name="Shape 125"/>
         <p:cNvGrpSpPr/>
         <p:nvPr/>
       </p:nvGrpSpPr>
@@ -817,9 +837,11 @@
       <p:sp>
         <p:nvSpPr>
           <p:cNvPr id="126" name="Google Shape;126;g26a08891e45_0_18:notes"/>
-          <p:cNvSpPr/>
+          <p:cNvSpPr>
+            <a:spLocks noGrp="1" noRot="1" noChangeAspect="1"/>
+          </p:cNvSpPr>
           <p:nvPr>
-            <p:ph idx="2" type="sldImg"/>
+            <p:ph type="sldImg" idx="2"/>
           </p:nvPr>
         </p:nvSpPr>
         <p:spPr>
@@ -828,9 +850,13 @@
             <a:ext cx="6096000" cy="3429000"/>
           </a:xfrm>
           <a:custGeom>
-            <a:rect b="b" l="l" r="r" t="t"/>
+            <a:avLst/>
+            <a:gdLst/>
+            <a:ahLst/>
+            <a:cxnLst/>
+            <a:rect l="l" t="t" r="r" b="b"/>
             <a:pathLst>
-              <a:path extrusionOk="0" h="120000" w="120000">
+              <a:path w="120000" h="120000" extrusionOk="0">
                 <a:moveTo>
                   <a:pt x="0" y="0"/>
                 </a:moveTo>
@@ -852,9 +878,11 @@
       <p:sp>
         <p:nvSpPr>
           <p:cNvPr id="127" name="Google Shape;127;g26a08891e45_0_18:notes"/>
-          <p:cNvSpPr txBox="1"/>
+          <p:cNvSpPr txBox="1">
+            <a:spLocks noGrp="1"/>
+          </p:cNvSpPr>
           <p:nvPr>
-            <p:ph idx="1" type="body"/>
+            <p:ph type="body" idx="1"/>
           </p:nvPr>
         </p:nvSpPr>
         <p:spPr>
@@ -867,23 +895,20 @@
           </a:prstGeom>
         </p:spPr>
         <p:txBody>
-          <a:bodyPr anchorCtr="0" anchor="t" bIns="91425" lIns="91425" spcFirstLastPara="1" rIns="91425" wrap="square" tIns="91425">
+          <a:bodyPr spcFirstLastPara="1" wrap="square" lIns="91425" tIns="91425" rIns="91425" bIns="91425" anchor="t" anchorCtr="0">
             <a:noAutofit/>
           </a:bodyPr>
           <a:lstStyle/>
           <a:p>
-            <a:pPr indent="0" lvl="0" marL="0" rtl="0" algn="l">
-              <a:spcBef>
-                <a:spcPts val="0"/>
-              </a:spcBef>
-              <a:spcAft>
-                <a:spcPts val="0"/>
-              </a:spcAft>
-              <a:buNone/>
-            </a:pPr>
-            <a:r>
-              <a:t/>
-            </a:r>
+            <a:pPr marL="0" lvl="0" indent="0" algn="l" rtl="0">
+              <a:spcBef>
+                <a:spcPts val="0"/>
+              </a:spcBef>
+              <a:spcAft>
+                <a:spcPts val="0"/>
+              </a:spcAft>
+              <a:buNone/>
+            </a:pPr>
             <a:endParaRPr/>
           </a:p>
         </p:txBody>
@@ -897,11 +922,11 @@
 </file>
 
 <file path=ppt/notesSlides/notesSlide11.xml><?xml version="1.0" encoding="utf-8"?>
-<p:notes xmlns:a="http://schemas.openxmlformats.org/drawingml/2006/main" xmlns:r="http://schemas.openxmlformats.org/officeDocument/2006/relationships" xmlns:mc="http://schemas.openxmlformats.org/markup-compatibility/2006" xmlns:mv="urn:schemas-microsoft-com:mac:vml" xmlns:p="http://schemas.openxmlformats.org/presentationml/2006/main" xmlns:c="http://schemas.openxmlformats.org/drawingml/2006/chart" xmlns:dgm="http://schemas.openxmlformats.org/drawingml/2006/diagram" xmlns:o="urn:schemas-microsoft-com:office:office" xmlns:v="urn:schemas-microsoft-com:vml" xmlns:pvml="urn:schemas-microsoft-com:office:powerpoint" xmlns:com="http://schemas.openxmlformats.org/drawingml/2006/compatibility" xmlns:p14="http://schemas.microsoft.com/office/powerpoint/2010/main" xmlns:p15="http://schemas.microsoft.com/office/powerpoint/2012/main" xmlns:ahyp="http://schemas.microsoft.com/office/drawing/2018/hyperlinkcolor" showMasterPhAnim="0" showMasterSp="0">
+<p:notes xmlns:a="http://schemas.openxmlformats.org/drawingml/2006/main" xmlns:r="http://schemas.openxmlformats.org/officeDocument/2006/relationships" xmlns:p="http://schemas.openxmlformats.org/presentationml/2006/main" showMasterSp="0" showMasterPhAnim="0">
   <p:cSld>
     <p:spTree>
       <p:nvGrpSpPr>
-        <p:cNvPr id="131" name="Shape 131"/>
+        <p:cNvPr id="1" name="Shape 131"/>
         <p:cNvGrpSpPr/>
         <p:nvPr/>
       </p:nvGrpSpPr>
@@ -916,20 +941,26 @@
       <p:sp>
         <p:nvSpPr>
           <p:cNvPr id="132" name="Google Shape;132;g1ee0c99e000_0_248:notes"/>
-          <p:cNvSpPr/>
+          <p:cNvSpPr>
+            <a:spLocks noGrp="1" noRot="1" noChangeAspect="1"/>
+          </p:cNvSpPr>
           <p:nvPr>
-            <p:ph idx="2" type="sldImg"/>
+            <p:ph type="sldImg" idx="2"/>
           </p:nvPr>
         </p:nvSpPr>
         <p:spPr>
           <a:xfrm>
-            <a:off x="381300" y="685800"/>
+            <a:off x="381000" y="685800"/>
             <a:ext cx="6096000" cy="3429000"/>
           </a:xfrm>
           <a:custGeom>
-            <a:rect b="b" l="l" r="r" t="t"/>
+            <a:avLst/>
+            <a:gdLst/>
+            <a:ahLst/>
+            <a:cxnLst/>
+            <a:rect l="l" t="t" r="r" b="b"/>
             <a:pathLst>
-              <a:path extrusionOk="0" h="120000" w="120000">
+              <a:path w="120000" h="120000" extrusionOk="0">
                 <a:moveTo>
                   <a:pt x="0" y="0"/>
                 </a:moveTo>
@@ -951,9 +982,11 @@
       <p:sp>
         <p:nvSpPr>
           <p:cNvPr id="133" name="Google Shape;133;g1ee0c99e000_0_248:notes"/>
-          <p:cNvSpPr txBox="1"/>
+          <p:cNvSpPr txBox="1">
+            <a:spLocks noGrp="1"/>
+          </p:cNvSpPr>
           <p:nvPr>
-            <p:ph idx="1" type="body"/>
+            <p:ph type="body" idx="1"/>
           </p:nvPr>
         </p:nvSpPr>
         <p:spPr>
@@ -966,23 +999,20 @@
           </a:prstGeom>
         </p:spPr>
         <p:txBody>
-          <a:bodyPr anchorCtr="0" anchor="t" bIns="91425" lIns="91425" spcFirstLastPara="1" rIns="91425" wrap="square" tIns="91425">
+          <a:bodyPr spcFirstLastPara="1" wrap="square" lIns="91425" tIns="91425" rIns="91425" bIns="91425" anchor="t" anchorCtr="0">
             <a:noAutofit/>
           </a:bodyPr>
           <a:lstStyle/>
           <a:p>
-            <a:pPr indent="0" lvl="0" marL="0" rtl="0" algn="l">
-              <a:spcBef>
-                <a:spcPts val="0"/>
-              </a:spcBef>
-              <a:spcAft>
-                <a:spcPts val="0"/>
-              </a:spcAft>
-              <a:buNone/>
-            </a:pPr>
-            <a:r>
-              <a:t/>
-            </a:r>
+            <a:pPr marL="0" lvl="0" indent="0" algn="l" rtl="0">
+              <a:spcBef>
+                <a:spcPts val="0"/>
+              </a:spcBef>
+              <a:spcAft>
+                <a:spcPts val="0"/>
+              </a:spcAft>
+              <a:buNone/>
+            </a:pPr>
             <a:endParaRPr/>
           </a:p>
         </p:txBody>
@@ -996,11 +1026,11 @@
 </file>
 
 <file path=ppt/notesSlides/notesSlide12.xml><?xml version="1.0" encoding="utf-8"?>
-<p:notes xmlns:a="http://schemas.openxmlformats.org/drawingml/2006/main" xmlns:r="http://schemas.openxmlformats.org/officeDocument/2006/relationships" xmlns:mc="http://schemas.openxmlformats.org/markup-compatibility/2006" xmlns:mv="urn:schemas-microsoft-com:mac:vml" xmlns:p="http://schemas.openxmlformats.org/presentationml/2006/main" xmlns:c="http://schemas.openxmlformats.org/drawingml/2006/chart" xmlns:dgm="http://schemas.openxmlformats.org/drawingml/2006/diagram" xmlns:o="urn:schemas-microsoft-com:office:office" xmlns:v="urn:schemas-microsoft-com:vml" xmlns:pvml="urn:schemas-microsoft-com:office:powerpoint" xmlns:com="http://schemas.openxmlformats.org/drawingml/2006/compatibility" xmlns:p14="http://schemas.microsoft.com/office/powerpoint/2010/main" xmlns:p15="http://schemas.microsoft.com/office/powerpoint/2012/main" xmlns:ahyp="http://schemas.microsoft.com/office/drawing/2018/hyperlinkcolor" showMasterPhAnim="0" showMasterSp="0">
+<p:notes xmlns:a="http://schemas.openxmlformats.org/drawingml/2006/main" xmlns:r="http://schemas.openxmlformats.org/officeDocument/2006/relationships" xmlns:p="http://schemas.openxmlformats.org/presentationml/2006/main" showMasterSp="0" showMasterPhAnim="0">
   <p:cSld>
     <p:spTree>
       <p:nvGrpSpPr>
-        <p:cNvPr id="137" name="Shape 137"/>
+        <p:cNvPr id="1" name="Shape 137"/>
         <p:cNvGrpSpPr/>
         <p:nvPr/>
       </p:nvGrpSpPr>
@@ -1015,20 +1045,26 @@
       <p:sp>
         <p:nvSpPr>
           <p:cNvPr id="138" name="Google Shape;138;g1ee0c99e000_0_210:notes"/>
-          <p:cNvSpPr/>
+          <p:cNvSpPr>
+            <a:spLocks noGrp="1" noRot="1" noChangeAspect="1"/>
+          </p:cNvSpPr>
           <p:nvPr>
-            <p:ph idx="2" type="sldImg"/>
+            <p:ph type="sldImg" idx="2"/>
           </p:nvPr>
         </p:nvSpPr>
         <p:spPr>
           <a:xfrm>
-            <a:off x="381300" y="685800"/>
+            <a:off x="381000" y="685800"/>
             <a:ext cx="6096000" cy="3429000"/>
           </a:xfrm>
           <a:custGeom>
-            <a:rect b="b" l="l" r="r" t="t"/>
+            <a:avLst/>
+            <a:gdLst/>
+            <a:ahLst/>
+            <a:cxnLst/>
+            <a:rect l="l" t="t" r="r" b="b"/>
             <a:pathLst>
-              <a:path extrusionOk="0" h="120000" w="120000">
+              <a:path w="120000" h="120000" extrusionOk="0">
                 <a:moveTo>
                   <a:pt x="0" y="0"/>
                 </a:moveTo>
@@ -1050,9 +1086,11 @@
       <p:sp>
         <p:nvSpPr>
           <p:cNvPr id="139" name="Google Shape;139;g1ee0c99e000_0_210:notes"/>
-          <p:cNvSpPr txBox="1"/>
+          <p:cNvSpPr txBox="1">
+            <a:spLocks noGrp="1"/>
+          </p:cNvSpPr>
           <p:nvPr>
-            <p:ph idx="1" type="body"/>
+            <p:ph type="body" idx="1"/>
           </p:nvPr>
         </p:nvSpPr>
         <p:spPr>
@@ -1065,23 +1103,20 @@
           </a:prstGeom>
         </p:spPr>
         <p:txBody>
-          <a:bodyPr anchorCtr="0" anchor="t" bIns="91425" lIns="91425" spcFirstLastPara="1" rIns="91425" wrap="square" tIns="91425">
+          <a:bodyPr spcFirstLastPara="1" wrap="square" lIns="91425" tIns="91425" rIns="91425" bIns="91425" anchor="t" anchorCtr="0">
             <a:noAutofit/>
           </a:bodyPr>
           <a:lstStyle/>
           <a:p>
-            <a:pPr indent="0" lvl="0" marL="0" rtl="0" algn="l">
-              <a:spcBef>
-                <a:spcPts val="0"/>
-              </a:spcBef>
-              <a:spcAft>
-                <a:spcPts val="0"/>
-              </a:spcAft>
-              <a:buNone/>
-            </a:pPr>
-            <a:r>
-              <a:t/>
-            </a:r>
+            <a:pPr marL="0" lvl="0" indent="0" algn="l" rtl="0">
+              <a:spcBef>
+                <a:spcPts val="0"/>
+              </a:spcBef>
+              <a:spcAft>
+                <a:spcPts val="0"/>
+              </a:spcAft>
+              <a:buNone/>
+            </a:pPr>
             <a:endParaRPr/>
           </a:p>
         </p:txBody>
@@ -1095,11 +1130,11 @@
 </file>
 
 <file path=ppt/notesSlides/notesSlide13.xml><?xml version="1.0" encoding="utf-8"?>
-<p:notes xmlns:a="http://schemas.openxmlformats.org/drawingml/2006/main" xmlns:r="http://schemas.openxmlformats.org/officeDocument/2006/relationships" xmlns:mc="http://schemas.openxmlformats.org/markup-compatibility/2006" xmlns:mv="urn:schemas-microsoft-com:mac:vml" xmlns:p="http://schemas.openxmlformats.org/presentationml/2006/main" xmlns:c="http://schemas.openxmlformats.org/drawingml/2006/chart" xmlns:dgm="http://schemas.openxmlformats.org/drawingml/2006/diagram" xmlns:o="urn:schemas-microsoft-com:office:office" xmlns:v="urn:schemas-microsoft-com:vml" xmlns:pvml="urn:schemas-microsoft-com:office:powerpoint" xmlns:com="http://schemas.openxmlformats.org/drawingml/2006/compatibility" xmlns:p14="http://schemas.microsoft.com/office/powerpoint/2010/main" xmlns:p15="http://schemas.microsoft.com/office/powerpoint/2012/main" xmlns:ahyp="http://schemas.microsoft.com/office/drawing/2018/hyperlinkcolor" showMasterPhAnim="0" showMasterSp="0">
+<p:notes xmlns:a="http://schemas.openxmlformats.org/drawingml/2006/main" xmlns:r="http://schemas.openxmlformats.org/officeDocument/2006/relationships" xmlns:p="http://schemas.openxmlformats.org/presentationml/2006/main" showMasterSp="0" showMasterPhAnim="0">
   <p:cSld>
     <p:spTree>
       <p:nvGrpSpPr>
-        <p:cNvPr id="144" name="Shape 144"/>
+        <p:cNvPr id="1" name="Shape 144"/>
         <p:cNvGrpSpPr/>
         <p:nvPr/>
       </p:nvGrpSpPr>
@@ -1114,9 +1149,11 @@
       <p:sp>
         <p:nvSpPr>
           <p:cNvPr id="145" name="Google Shape;145;g26a08891e45_0_29:notes"/>
-          <p:cNvSpPr/>
+          <p:cNvSpPr>
+            <a:spLocks noGrp="1" noRot="1" noChangeAspect="1"/>
+          </p:cNvSpPr>
           <p:nvPr>
-            <p:ph idx="2" type="sldImg"/>
+            <p:ph type="sldImg" idx="2"/>
           </p:nvPr>
         </p:nvSpPr>
         <p:spPr>
@@ -1125,9 +1162,13 @@
             <a:ext cx="6096000" cy="3429000"/>
           </a:xfrm>
           <a:custGeom>
-            <a:rect b="b" l="l" r="r" t="t"/>
+            <a:avLst/>
+            <a:gdLst/>
+            <a:ahLst/>
+            <a:cxnLst/>
+            <a:rect l="l" t="t" r="r" b="b"/>
             <a:pathLst>
-              <a:path extrusionOk="0" h="120000" w="120000">
+              <a:path w="120000" h="120000" extrusionOk="0">
                 <a:moveTo>
                   <a:pt x="0" y="0"/>
                 </a:moveTo>
@@ -1149,9 +1190,11 @@
       <p:sp>
         <p:nvSpPr>
           <p:cNvPr id="146" name="Google Shape;146;g26a08891e45_0_29:notes"/>
-          <p:cNvSpPr txBox="1"/>
+          <p:cNvSpPr txBox="1">
+            <a:spLocks noGrp="1"/>
+          </p:cNvSpPr>
           <p:nvPr>
-            <p:ph idx="1" type="body"/>
+            <p:ph type="body" idx="1"/>
           </p:nvPr>
         </p:nvSpPr>
         <p:spPr>
@@ -1164,23 +1207,20 @@
           </a:prstGeom>
         </p:spPr>
         <p:txBody>
-          <a:bodyPr anchorCtr="0" anchor="t" bIns="91425" lIns="91425" spcFirstLastPara="1" rIns="91425" wrap="square" tIns="91425">
+          <a:bodyPr spcFirstLastPara="1" wrap="square" lIns="91425" tIns="91425" rIns="91425" bIns="91425" anchor="t" anchorCtr="0">
             <a:noAutofit/>
           </a:bodyPr>
           <a:lstStyle/>
           <a:p>
-            <a:pPr indent="0" lvl="0" marL="0" rtl="0" algn="l">
-              <a:spcBef>
-                <a:spcPts val="0"/>
-              </a:spcBef>
-              <a:spcAft>
-                <a:spcPts val="0"/>
-              </a:spcAft>
-              <a:buNone/>
-            </a:pPr>
-            <a:r>
-              <a:t/>
-            </a:r>
+            <a:pPr marL="0" lvl="0" indent="0" algn="l" rtl="0">
+              <a:spcBef>
+                <a:spcPts val="0"/>
+              </a:spcBef>
+              <a:spcAft>
+                <a:spcPts val="0"/>
+              </a:spcAft>
+              <a:buNone/>
+            </a:pPr>
             <a:endParaRPr/>
           </a:p>
         </p:txBody>
@@ -1194,11 +1234,11 @@
 </file>
 
 <file path=ppt/notesSlides/notesSlide2.xml><?xml version="1.0" encoding="utf-8"?>
-<p:notes xmlns:a="http://schemas.openxmlformats.org/drawingml/2006/main" xmlns:r="http://schemas.openxmlformats.org/officeDocument/2006/relationships" xmlns:mc="http://schemas.openxmlformats.org/markup-compatibility/2006" xmlns:mv="urn:schemas-microsoft-com:mac:vml" xmlns:p="http://schemas.openxmlformats.org/presentationml/2006/main" xmlns:c="http://schemas.openxmlformats.org/drawingml/2006/chart" xmlns:dgm="http://schemas.openxmlformats.org/drawingml/2006/diagram" xmlns:o="urn:schemas-microsoft-com:office:office" xmlns:v="urn:schemas-microsoft-com:vml" xmlns:pvml="urn:schemas-microsoft-com:office:powerpoint" xmlns:com="http://schemas.openxmlformats.org/drawingml/2006/compatibility" xmlns:p14="http://schemas.microsoft.com/office/powerpoint/2010/main" xmlns:p15="http://schemas.microsoft.com/office/powerpoint/2012/main" xmlns:ahyp="http://schemas.microsoft.com/office/drawing/2018/hyperlinkcolor" showMasterPhAnim="0" showMasterSp="0">
+<p:notes xmlns:a="http://schemas.openxmlformats.org/drawingml/2006/main" xmlns:r="http://schemas.openxmlformats.org/officeDocument/2006/relationships" xmlns:p="http://schemas.openxmlformats.org/presentationml/2006/main" showMasterSp="0" showMasterPhAnim="0">
   <p:cSld>
     <p:spTree>
       <p:nvGrpSpPr>
-        <p:cNvPr id="65" name="Shape 65"/>
+        <p:cNvPr id="1" name="Shape 65"/>
         <p:cNvGrpSpPr/>
         <p:nvPr/>
       </p:nvGrpSpPr>
@@ -1213,20 +1253,26 @@
       <p:sp>
         <p:nvSpPr>
           <p:cNvPr id="66" name="Google Shape;66;g3324613b615_0_0:notes"/>
-          <p:cNvSpPr/>
+          <p:cNvSpPr>
+            <a:spLocks noGrp="1" noRot="1" noChangeAspect="1"/>
+          </p:cNvSpPr>
           <p:nvPr>
-            <p:ph idx="2" type="sldImg"/>
+            <p:ph type="sldImg" idx="2"/>
           </p:nvPr>
         </p:nvSpPr>
         <p:spPr>
           <a:xfrm>
-            <a:off x="381300" y="685800"/>
+            <a:off x="381000" y="685800"/>
             <a:ext cx="6096000" cy="3429000"/>
           </a:xfrm>
           <a:custGeom>
-            <a:rect b="b" l="l" r="r" t="t"/>
+            <a:avLst/>
+            <a:gdLst/>
+            <a:ahLst/>
+            <a:cxnLst/>
+            <a:rect l="l" t="t" r="r" b="b"/>
             <a:pathLst>
-              <a:path extrusionOk="0" h="120000" w="120000">
+              <a:path w="120000" h="120000" extrusionOk="0">
                 <a:moveTo>
                   <a:pt x="0" y="0"/>
                 </a:moveTo>
@@ -1248,9 +1294,11 @@
       <p:sp>
         <p:nvSpPr>
           <p:cNvPr id="67" name="Google Shape;67;g3324613b615_0_0:notes"/>
-          <p:cNvSpPr txBox="1"/>
+          <p:cNvSpPr txBox="1">
+            <a:spLocks noGrp="1"/>
+          </p:cNvSpPr>
           <p:nvPr>
-            <p:ph idx="1" type="body"/>
+            <p:ph type="body" idx="1"/>
           </p:nvPr>
         </p:nvSpPr>
         <p:spPr>
@@ -1263,23 +1311,20 @@
           </a:prstGeom>
         </p:spPr>
         <p:txBody>
-          <a:bodyPr anchorCtr="0" anchor="t" bIns="91425" lIns="91425" spcFirstLastPara="1" rIns="91425" wrap="square" tIns="91425">
+          <a:bodyPr spcFirstLastPara="1" wrap="square" lIns="91425" tIns="91425" rIns="91425" bIns="91425" anchor="t" anchorCtr="0">
             <a:noAutofit/>
           </a:bodyPr>
           <a:lstStyle/>
           <a:p>
-            <a:pPr indent="0" lvl="0" marL="0" rtl="0" algn="l">
-              <a:spcBef>
-                <a:spcPts val="0"/>
-              </a:spcBef>
-              <a:spcAft>
-                <a:spcPts val="0"/>
-              </a:spcAft>
-              <a:buNone/>
-            </a:pPr>
-            <a:r>
-              <a:t/>
-            </a:r>
+            <a:pPr marL="0" lvl="0" indent="0" algn="l" rtl="0">
+              <a:spcBef>
+                <a:spcPts val="0"/>
+              </a:spcBef>
+              <a:spcAft>
+                <a:spcPts val="0"/>
+              </a:spcAft>
+              <a:buNone/>
+            </a:pPr>
             <a:endParaRPr/>
           </a:p>
         </p:txBody>
@@ -1293,11 +1338,11 @@
 </file>
 
 <file path=ppt/notesSlides/notesSlide3.xml><?xml version="1.0" encoding="utf-8"?>
-<p:notes xmlns:a="http://schemas.openxmlformats.org/drawingml/2006/main" xmlns:r="http://schemas.openxmlformats.org/officeDocument/2006/relationships" xmlns:mc="http://schemas.openxmlformats.org/markup-compatibility/2006" xmlns:mv="urn:schemas-microsoft-com:mac:vml" xmlns:p="http://schemas.openxmlformats.org/presentationml/2006/main" xmlns:c="http://schemas.openxmlformats.org/drawingml/2006/chart" xmlns:dgm="http://schemas.openxmlformats.org/drawingml/2006/diagram" xmlns:o="urn:schemas-microsoft-com:office:office" xmlns:v="urn:schemas-microsoft-com:vml" xmlns:pvml="urn:schemas-microsoft-com:office:powerpoint" xmlns:com="http://schemas.openxmlformats.org/drawingml/2006/compatibility" xmlns:p14="http://schemas.microsoft.com/office/powerpoint/2010/main" xmlns:p15="http://schemas.microsoft.com/office/powerpoint/2012/main" xmlns:ahyp="http://schemas.microsoft.com/office/drawing/2018/hyperlinkcolor" showMasterPhAnim="0" showMasterSp="0">
+<p:notes xmlns:a="http://schemas.openxmlformats.org/drawingml/2006/main" xmlns:r="http://schemas.openxmlformats.org/officeDocument/2006/relationships" xmlns:p="http://schemas.openxmlformats.org/presentationml/2006/main" showMasterSp="0" showMasterPhAnim="0">
   <p:cSld>
     <p:spTree>
       <p:nvGrpSpPr>
-        <p:cNvPr id="71" name="Shape 71"/>
+        <p:cNvPr id="1" name="Shape 71"/>
         <p:cNvGrpSpPr/>
         <p:nvPr/>
       </p:nvGrpSpPr>
@@ -1312,20 +1357,26 @@
       <p:sp>
         <p:nvSpPr>
           <p:cNvPr id="72" name="Google Shape;72;g3324613b615_0_5:notes"/>
-          <p:cNvSpPr/>
+          <p:cNvSpPr>
+            <a:spLocks noGrp="1" noRot="1" noChangeAspect="1"/>
+          </p:cNvSpPr>
           <p:nvPr>
-            <p:ph idx="2" type="sldImg"/>
+            <p:ph type="sldImg" idx="2"/>
           </p:nvPr>
         </p:nvSpPr>
         <p:spPr>
           <a:xfrm>
-            <a:off x="381300" y="685800"/>
+            <a:off x="381000" y="685800"/>
             <a:ext cx="6096000" cy="3429000"/>
           </a:xfrm>
           <a:custGeom>
-            <a:rect b="b" l="l" r="r" t="t"/>
+            <a:avLst/>
+            <a:gdLst/>
+            <a:ahLst/>
+            <a:cxnLst/>
+            <a:rect l="l" t="t" r="r" b="b"/>
             <a:pathLst>
-              <a:path extrusionOk="0" h="120000" w="120000">
+              <a:path w="120000" h="120000" extrusionOk="0">
                 <a:moveTo>
                   <a:pt x="0" y="0"/>
                 </a:moveTo>
@@ -1347,9 +1398,11 @@
       <p:sp>
         <p:nvSpPr>
           <p:cNvPr id="73" name="Google Shape;73;g3324613b615_0_5:notes"/>
-          <p:cNvSpPr txBox="1"/>
+          <p:cNvSpPr txBox="1">
+            <a:spLocks noGrp="1"/>
+          </p:cNvSpPr>
           <p:nvPr>
-            <p:ph idx="1" type="body"/>
+            <p:ph type="body" idx="1"/>
           </p:nvPr>
         </p:nvSpPr>
         <p:spPr>
@@ -1362,23 +1415,20 @@
           </a:prstGeom>
         </p:spPr>
         <p:txBody>
-          <a:bodyPr anchorCtr="0" anchor="t" bIns="91425" lIns="91425" spcFirstLastPara="1" rIns="91425" wrap="square" tIns="91425">
+          <a:bodyPr spcFirstLastPara="1" wrap="square" lIns="91425" tIns="91425" rIns="91425" bIns="91425" anchor="t" anchorCtr="0">
             <a:noAutofit/>
           </a:bodyPr>
           <a:lstStyle/>
           <a:p>
-            <a:pPr indent="0" lvl="0" marL="0" rtl="0" algn="l">
-              <a:spcBef>
-                <a:spcPts val="0"/>
-              </a:spcBef>
-              <a:spcAft>
-                <a:spcPts val="0"/>
-              </a:spcAft>
-              <a:buNone/>
-            </a:pPr>
-            <a:r>
-              <a:t/>
-            </a:r>
+            <a:pPr marL="0" lvl="0" indent="0" algn="l" rtl="0">
+              <a:spcBef>
+                <a:spcPts val="0"/>
+              </a:spcBef>
+              <a:spcAft>
+                <a:spcPts val="0"/>
+              </a:spcAft>
+              <a:buNone/>
+            </a:pPr>
             <a:endParaRPr/>
           </a:p>
         </p:txBody>
@@ -1392,11 +1442,11 @@
 </file>
 
 <file path=ppt/notesSlides/notesSlide4.xml><?xml version="1.0" encoding="utf-8"?>
-<p:notes xmlns:a="http://schemas.openxmlformats.org/drawingml/2006/main" xmlns:r="http://schemas.openxmlformats.org/officeDocument/2006/relationships" xmlns:mc="http://schemas.openxmlformats.org/markup-compatibility/2006" xmlns:mv="urn:schemas-microsoft-com:mac:vml" xmlns:p="http://schemas.openxmlformats.org/presentationml/2006/main" xmlns:c="http://schemas.openxmlformats.org/drawingml/2006/chart" xmlns:dgm="http://schemas.openxmlformats.org/drawingml/2006/diagram" xmlns:o="urn:schemas-microsoft-com:office:office" xmlns:v="urn:schemas-microsoft-com:vml" xmlns:pvml="urn:schemas-microsoft-com:office:powerpoint" xmlns:com="http://schemas.openxmlformats.org/drawingml/2006/compatibility" xmlns:p14="http://schemas.microsoft.com/office/powerpoint/2010/main" xmlns:p15="http://schemas.microsoft.com/office/powerpoint/2012/main" xmlns:ahyp="http://schemas.microsoft.com/office/drawing/2018/hyperlinkcolor" showMasterPhAnim="0" showMasterSp="0">
+<p:notes xmlns:a="http://schemas.openxmlformats.org/drawingml/2006/main" xmlns:r="http://schemas.openxmlformats.org/officeDocument/2006/relationships" xmlns:p="http://schemas.openxmlformats.org/presentationml/2006/main" showMasterSp="0" showMasterPhAnim="0">
   <p:cSld>
     <p:spTree>
       <p:nvGrpSpPr>
-        <p:cNvPr id="78" name="Shape 78"/>
+        <p:cNvPr id="1" name="Shape 78"/>
         <p:cNvGrpSpPr/>
         <p:nvPr/>
       </p:nvGrpSpPr>
@@ -1411,20 +1461,26 @@
       <p:sp>
         <p:nvSpPr>
           <p:cNvPr id="79" name="Google Shape;79;g1ee0c99e000_0_193:notes"/>
-          <p:cNvSpPr/>
+          <p:cNvSpPr>
+            <a:spLocks noGrp="1" noRot="1" noChangeAspect="1"/>
+          </p:cNvSpPr>
           <p:nvPr>
-            <p:ph idx="2" type="sldImg"/>
+            <p:ph type="sldImg" idx="2"/>
           </p:nvPr>
         </p:nvSpPr>
         <p:spPr>
           <a:xfrm>
-            <a:off x="381300" y="685800"/>
+            <a:off x="381000" y="685800"/>
             <a:ext cx="6096000" cy="3429000"/>
           </a:xfrm>
           <a:custGeom>
-            <a:rect b="b" l="l" r="r" t="t"/>
+            <a:avLst/>
+            <a:gdLst/>
+            <a:ahLst/>
+            <a:cxnLst/>
+            <a:rect l="l" t="t" r="r" b="b"/>
             <a:pathLst>
-              <a:path extrusionOk="0" h="120000" w="120000">
+              <a:path w="120000" h="120000" extrusionOk="0">
                 <a:moveTo>
                   <a:pt x="0" y="0"/>
                 </a:moveTo>
@@ -1446,9 +1502,11 @@
       <p:sp>
         <p:nvSpPr>
           <p:cNvPr id="80" name="Google Shape;80;g1ee0c99e000_0_193:notes"/>
-          <p:cNvSpPr txBox="1"/>
+          <p:cNvSpPr txBox="1">
+            <a:spLocks noGrp="1"/>
+          </p:cNvSpPr>
           <p:nvPr>
-            <p:ph idx="1" type="body"/>
+            <p:ph type="body" idx="1"/>
           </p:nvPr>
         </p:nvSpPr>
         <p:spPr>
@@ -1461,23 +1519,20 @@
           </a:prstGeom>
         </p:spPr>
         <p:txBody>
-          <a:bodyPr anchorCtr="0" anchor="t" bIns="91425" lIns="91425" spcFirstLastPara="1" rIns="91425" wrap="square" tIns="91425">
+          <a:bodyPr spcFirstLastPara="1" wrap="square" lIns="91425" tIns="91425" rIns="91425" bIns="91425" anchor="t" anchorCtr="0">
             <a:noAutofit/>
           </a:bodyPr>
           <a:lstStyle/>
           <a:p>
-            <a:pPr indent="0" lvl="0" marL="0" rtl="0" algn="l">
-              <a:spcBef>
-                <a:spcPts val="0"/>
-              </a:spcBef>
-              <a:spcAft>
-                <a:spcPts val="0"/>
-              </a:spcAft>
-              <a:buNone/>
-            </a:pPr>
-            <a:r>
-              <a:t/>
-            </a:r>
+            <a:pPr marL="0" lvl="0" indent="0" algn="l" rtl="0">
+              <a:spcBef>
+                <a:spcPts val="0"/>
+              </a:spcBef>
+              <a:spcAft>
+                <a:spcPts val="0"/>
+              </a:spcAft>
+              <a:buNone/>
+            </a:pPr>
             <a:endParaRPr/>
           </a:p>
         </p:txBody>
@@ -1491,11 +1546,11 @@
 </file>
 
 <file path=ppt/notesSlides/notesSlide5.xml><?xml version="1.0" encoding="utf-8"?>
-<p:notes xmlns:a="http://schemas.openxmlformats.org/drawingml/2006/main" xmlns:r="http://schemas.openxmlformats.org/officeDocument/2006/relationships" xmlns:mc="http://schemas.openxmlformats.org/markup-compatibility/2006" xmlns:mv="urn:schemas-microsoft-com:mac:vml" xmlns:p="http://schemas.openxmlformats.org/presentationml/2006/main" xmlns:c="http://schemas.openxmlformats.org/drawingml/2006/chart" xmlns:dgm="http://schemas.openxmlformats.org/drawingml/2006/diagram" xmlns:o="urn:schemas-microsoft-com:office:office" xmlns:v="urn:schemas-microsoft-com:vml" xmlns:pvml="urn:schemas-microsoft-com:office:powerpoint" xmlns:com="http://schemas.openxmlformats.org/drawingml/2006/compatibility" xmlns:p14="http://schemas.microsoft.com/office/powerpoint/2010/main" xmlns:p15="http://schemas.microsoft.com/office/powerpoint/2012/main" xmlns:ahyp="http://schemas.microsoft.com/office/drawing/2018/hyperlinkcolor" showMasterPhAnim="0" showMasterSp="0">
+<p:notes xmlns:a="http://schemas.openxmlformats.org/drawingml/2006/main" xmlns:r="http://schemas.openxmlformats.org/officeDocument/2006/relationships" xmlns:p="http://schemas.openxmlformats.org/presentationml/2006/main" showMasterSp="0" showMasterPhAnim="0">
   <p:cSld>
     <p:spTree>
       <p:nvGrpSpPr>
-        <p:cNvPr id="83" name="Shape 83"/>
+        <p:cNvPr id="1" name="Shape 83"/>
         <p:cNvGrpSpPr/>
         <p:nvPr/>
       </p:nvGrpSpPr>
@@ -1510,9 +1565,11 @@
       <p:sp>
         <p:nvSpPr>
           <p:cNvPr id="84" name="Google Shape;84;g1ee0c99e000_0_197:notes"/>
-          <p:cNvSpPr/>
+          <p:cNvSpPr>
+            <a:spLocks noGrp="1" noRot="1" noChangeAspect="1"/>
+          </p:cNvSpPr>
           <p:nvPr>
-            <p:ph idx="2" type="sldImg"/>
+            <p:ph type="sldImg" idx="2"/>
           </p:nvPr>
         </p:nvSpPr>
         <p:spPr>
@@ -1521,9 +1578,13 @@
             <a:ext cx="6096000" cy="3429000"/>
           </a:xfrm>
           <a:custGeom>
-            <a:rect b="b" l="l" r="r" t="t"/>
+            <a:avLst/>
+            <a:gdLst/>
+            <a:ahLst/>
+            <a:cxnLst/>
+            <a:rect l="l" t="t" r="r" b="b"/>
             <a:pathLst>
-              <a:path extrusionOk="0" h="120000" w="120000">
+              <a:path w="120000" h="120000" extrusionOk="0">
                 <a:moveTo>
                   <a:pt x="0" y="0"/>
                 </a:moveTo>
@@ -1545,9 +1606,11 @@
       <p:sp>
         <p:nvSpPr>
           <p:cNvPr id="85" name="Google Shape;85;g1ee0c99e000_0_197:notes"/>
-          <p:cNvSpPr txBox="1"/>
+          <p:cNvSpPr txBox="1">
+            <a:spLocks noGrp="1"/>
+          </p:cNvSpPr>
           <p:nvPr>
-            <p:ph idx="1" type="body"/>
+            <p:ph type="body" idx="1"/>
           </p:nvPr>
         </p:nvSpPr>
         <p:spPr>
@@ -1560,23 +1623,20 @@
           </a:prstGeom>
         </p:spPr>
         <p:txBody>
-          <a:bodyPr anchorCtr="0" anchor="t" bIns="91425" lIns="91425" spcFirstLastPara="1" rIns="91425" wrap="square" tIns="91425">
+          <a:bodyPr spcFirstLastPara="1" wrap="square" lIns="91425" tIns="91425" rIns="91425" bIns="91425" anchor="t" anchorCtr="0">
             <a:noAutofit/>
           </a:bodyPr>
           <a:lstStyle/>
           <a:p>
-            <a:pPr indent="0" lvl="0" marL="0" rtl="0" algn="l">
-              <a:spcBef>
-                <a:spcPts val="0"/>
-              </a:spcBef>
-              <a:spcAft>
-                <a:spcPts val="0"/>
-              </a:spcAft>
-              <a:buNone/>
-            </a:pPr>
-            <a:r>
-              <a:t/>
-            </a:r>
+            <a:pPr marL="0" lvl="0" indent="0" algn="l" rtl="0">
+              <a:spcBef>
+                <a:spcPts val="0"/>
+              </a:spcBef>
+              <a:spcAft>
+                <a:spcPts val="0"/>
+              </a:spcAft>
+              <a:buNone/>
+            </a:pPr>
             <a:endParaRPr/>
           </a:p>
         </p:txBody>
@@ -1590,11 +1650,11 @@
 </file>
 
 <file path=ppt/notesSlides/notesSlide6.xml><?xml version="1.0" encoding="utf-8"?>
-<p:notes xmlns:a="http://schemas.openxmlformats.org/drawingml/2006/main" xmlns:r="http://schemas.openxmlformats.org/officeDocument/2006/relationships" xmlns:mc="http://schemas.openxmlformats.org/markup-compatibility/2006" xmlns:mv="urn:schemas-microsoft-com:mac:vml" xmlns:p="http://schemas.openxmlformats.org/presentationml/2006/main" xmlns:c="http://schemas.openxmlformats.org/drawingml/2006/chart" xmlns:dgm="http://schemas.openxmlformats.org/drawingml/2006/diagram" xmlns:o="urn:schemas-microsoft-com:office:office" xmlns:v="urn:schemas-microsoft-com:vml" xmlns:pvml="urn:schemas-microsoft-com:office:powerpoint" xmlns:com="http://schemas.openxmlformats.org/drawingml/2006/compatibility" xmlns:p14="http://schemas.microsoft.com/office/powerpoint/2010/main" xmlns:p15="http://schemas.microsoft.com/office/powerpoint/2012/main" xmlns:ahyp="http://schemas.microsoft.com/office/drawing/2018/hyperlinkcolor" showMasterPhAnim="0" showMasterSp="0">
+<p:notes xmlns:a="http://schemas.openxmlformats.org/drawingml/2006/main" xmlns:r="http://schemas.openxmlformats.org/officeDocument/2006/relationships" xmlns:p="http://schemas.openxmlformats.org/presentationml/2006/main" showMasterSp="0" showMasterPhAnim="0">
   <p:cSld>
     <p:spTree>
       <p:nvGrpSpPr>
-        <p:cNvPr id="90" name="Shape 90"/>
+        <p:cNvPr id="1" name="Shape 90"/>
         <p:cNvGrpSpPr/>
         <p:nvPr/>
       </p:nvGrpSpPr>
@@ -1609,9 +1669,11 @@
       <p:sp>
         <p:nvSpPr>
           <p:cNvPr id="91" name="Google Shape;91;g1ee0c99e000_0_204:notes"/>
-          <p:cNvSpPr/>
+          <p:cNvSpPr>
+            <a:spLocks noGrp="1" noRot="1" noChangeAspect="1"/>
+          </p:cNvSpPr>
           <p:nvPr>
-            <p:ph idx="2" type="sldImg"/>
+            <p:ph type="sldImg" idx="2"/>
           </p:nvPr>
         </p:nvSpPr>
         <p:spPr>
@@ -1620,9 +1682,13 @@
             <a:ext cx="6096000" cy="3429000"/>
           </a:xfrm>
           <a:custGeom>
-            <a:rect b="b" l="l" r="r" t="t"/>
+            <a:avLst/>
+            <a:gdLst/>
+            <a:ahLst/>
+            <a:cxnLst/>
+            <a:rect l="l" t="t" r="r" b="b"/>
             <a:pathLst>
-              <a:path extrusionOk="0" h="120000" w="120000">
+              <a:path w="120000" h="120000" extrusionOk="0">
                 <a:moveTo>
                   <a:pt x="0" y="0"/>
                 </a:moveTo>
@@ -1644,9 +1710,11 @@
       <p:sp>
         <p:nvSpPr>
           <p:cNvPr id="92" name="Google Shape;92;g1ee0c99e000_0_204:notes"/>
-          <p:cNvSpPr txBox="1"/>
+          <p:cNvSpPr txBox="1">
+            <a:spLocks noGrp="1"/>
+          </p:cNvSpPr>
           <p:nvPr>
-            <p:ph idx="1" type="body"/>
+            <p:ph type="body" idx="1"/>
           </p:nvPr>
         </p:nvSpPr>
         <p:spPr>
@@ -1659,23 +1727,20 @@
           </a:prstGeom>
         </p:spPr>
         <p:txBody>
-          <a:bodyPr anchorCtr="0" anchor="t" bIns="91425" lIns="91425" spcFirstLastPara="1" rIns="91425" wrap="square" tIns="91425">
+          <a:bodyPr spcFirstLastPara="1" wrap="square" lIns="91425" tIns="91425" rIns="91425" bIns="91425" anchor="t" anchorCtr="0">
             <a:noAutofit/>
           </a:bodyPr>
           <a:lstStyle/>
           <a:p>
-            <a:pPr indent="0" lvl="0" marL="0" rtl="0" algn="l">
-              <a:spcBef>
-                <a:spcPts val="0"/>
-              </a:spcBef>
-              <a:spcAft>
-                <a:spcPts val="0"/>
-              </a:spcAft>
-              <a:buNone/>
-            </a:pPr>
-            <a:r>
-              <a:t/>
-            </a:r>
+            <a:pPr marL="0" lvl="0" indent="0" algn="l" rtl="0">
+              <a:spcBef>
+                <a:spcPts val="0"/>
+              </a:spcBef>
+              <a:spcAft>
+                <a:spcPts val="0"/>
+              </a:spcAft>
+              <a:buNone/>
+            </a:pPr>
             <a:endParaRPr/>
           </a:p>
         </p:txBody>
@@ -1689,11 +1754,11 @@
 </file>
 
 <file path=ppt/notesSlides/notesSlide7.xml><?xml version="1.0" encoding="utf-8"?>
-<p:notes xmlns:a="http://schemas.openxmlformats.org/drawingml/2006/main" xmlns:r="http://schemas.openxmlformats.org/officeDocument/2006/relationships" xmlns:mc="http://schemas.openxmlformats.org/markup-compatibility/2006" xmlns:mv="urn:schemas-microsoft-com:mac:vml" xmlns:p="http://schemas.openxmlformats.org/presentationml/2006/main" xmlns:c="http://schemas.openxmlformats.org/drawingml/2006/chart" xmlns:dgm="http://schemas.openxmlformats.org/drawingml/2006/diagram" xmlns:o="urn:schemas-microsoft-com:office:office" xmlns:v="urn:schemas-microsoft-com:vml" xmlns:pvml="urn:schemas-microsoft-com:office:powerpoint" xmlns:com="http://schemas.openxmlformats.org/drawingml/2006/compatibility" xmlns:p14="http://schemas.microsoft.com/office/powerpoint/2010/main" xmlns:p15="http://schemas.microsoft.com/office/powerpoint/2012/main" xmlns:ahyp="http://schemas.microsoft.com/office/drawing/2018/hyperlinkcolor" showMasterPhAnim="0" showMasterSp="0">
+<p:notes xmlns:a="http://schemas.openxmlformats.org/drawingml/2006/main" xmlns:r="http://schemas.openxmlformats.org/officeDocument/2006/relationships" xmlns:p="http://schemas.openxmlformats.org/presentationml/2006/main" showMasterSp="0" showMasterPhAnim="0">
   <p:cSld>
     <p:spTree>
       <p:nvGrpSpPr>
-        <p:cNvPr id="97" name="Shape 97"/>
+        <p:cNvPr id="1" name="Shape 97"/>
         <p:cNvGrpSpPr/>
         <p:nvPr/>
       </p:nvGrpSpPr>
@@ -1708,9 +1773,11 @@
       <p:sp>
         <p:nvSpPr>
           <p:cNvPr id="98" name="Google Shape;98;g1ee0c99e000_0_215:notes"/>
-          <p:cNvSpPr/>
+          <p:cNvSpPr>
+            <a:spLocks noGrp="1" noRot="1" noChangeAspect="1"/>
+          </p:cNvSpPr>
           <p:nvPr>
-            <p:ph idx="2" type="sldImg"/>
+            <p:ph type="sldImg" idx="2"/>
           </p:nvPr>
         </p:nvSpPr>
         <p:spPr>
@@ -1719,9 +1786,13 @@
             <a:ext cx="6096000" cy="3429000"/>
           </a:xfrm>
           <a:custGeom>
-            <a:rect b="b" l="l" r="r" t="t"/>
+            <a:avLst/>
+            <a:gdLst/>
+            <a:ahLst/>
+            <a:cxnLst/>
+            <a:rect l="l" t="t" r="r" b="b"/>
             <a:pathLst>
-              <a:path extrusionOk="0" h="120000" w="120000">
+              <a:path w="120000" h="120000" extrusionOk="0">
                 <a:moveTo>
                   <a:pt x="0" y="0"/>
                 </a:moveTo>
@@ -1743,9 +1814,11 @@
       <p:sp>
         <p:nvSpPr>
           <p:cNvPr id="99" name="Google Shape;99;g1ee0c99e000_0_215:notes"/>
-          <p:cNvSpPr txBox="1"/>
+          <p:cNvSpPr txBox="1">
+            <a:spLocks noGrp="1"/>
+          </p:cNvSpPr>
           <p:nvPr>
-            <p:ph idx="1" type="body"/>
+            <p:ph type="body" idx="1"/>
           </p:nvPr>
         </p:nvSpPr>
         <p:spPr>
@@ -1758,23 +1831,20 @@
           </a:prstGeom>
         </p:spPr>
         <p:txBody>
-          <a:bodyPr anchorCtr="0" anchor="t" bIns="91425" lIns="91425" spcFirstLastPara="1" rIns="91425" wrap="square" tIns="91425">
+          <a:bodyPr spcFirstLastPara="1" wrap="square" lIns="91425" tIns="91425" rIns="91425" bIns="91425" anchor="t" anchorCtr="0">
             <a:noAutofit/>
           </a:bodyPr>
           <a:lstStyle/>
           <a:p>
-            <a:pPr indent="0" lvl="0" marL="0" rtl="0" algn="l">
-              <a:spcBef>
-                <a:spcPts val="0"/>
-              </a:spcBef>
-              <a:spcAft>
-                <a:spcPts val="0"/>
-              </a:spcAft>
-              <a:buNone/>
-            </a:pPr>
-            <a:r>
-              <a:t/>
-            </a:r>
+            <a:pPr marL="0" lvl="0" indent="0" algn="l" rtl="0">
+              <a:spcBef>
+                <a:spcPts val="0"/>
+              </a:spcBef>
+              <a:spcAft>
+                <a:spcPts val="0"/>
+              </a:spcAft>
+              <a:buNone/>
+            </a:pPr>
             <a:endParaRPr/>
           </a:p>
         </p:txBody>
@@ -1788,11 +1858,11 @@
 </file>
 
 <file path=ppt/notesSlides/notesSlide8.xml><?xml version="1.0" encoding="utf-8"?>
-<p:notes xmlns:a="http://schemas.openxmlformats.org/drawingml/2006/main" xmlns:r="http://schemas.openxmlformats.org/officeDocument/2006/relationships" xmlns:mc="http://schemas.openxmlformats.org/markup-compatibility/2006" xmlns:mv="urn:schemas-microsoft-com:mac:vml" xmlns:p="http://schemas.openxmlformats.org/presentationml/2006/main" xmlns:c="http://schemas.openxmlformats.org/drawingml/2006/chart" xmlns:dgm="http://schemas.openxmlformats.org/drawingml/2006/diagram" xmlns:o="urn:schemas-microsoft-com:office:office" xmlns:v="urn:schemas-microsoft-com:vml" xmlns:pvml="urn:schemas-microsoft-com:office:powerpoint" xmlns:com="http://schemas.openxmlformats.org/drawingml/2006/compatibility" xmlns:p14="http://schemas.microsoft.com/office/powerpoint/2010/main" xmlns:p15="http://schemas.microsoft.com/office/powerpoint/2012/main" xmlns:ahyp="http://schemas.microsoft.com/office/drawing/2018/hyperlinkcolor" showMasterPhAnim="0" showMasterSp="0">
+<p:notes xmlns:a="http://schemas.openxmlformats.org/drawingml/2006/main" xmlns:r="http://schemas.openxmlformats.org/officeDocument/2006/relationships" xmlns:p="http://schemas.openxmlformats.org/presentationml/2006/main" showMasterSp="0" showMasterPhAnim="0">
   <p:cSld>
     <p:spTree>
       <p:nvGrpSpPr>
-        <p:cNvPr id="107" name="Shape 107"/>
+        <p:cNvPr id="1" name="Shape 107"/>
         <p:cNvGrpSpPr/>
         <p:nvPr/>
       </p:nvGrpSpPr>
@@ -1807,9 +1877,11 @@
       <p:sp>
         <p:nvSpPr>
           <p:cNvPr id="108" name="Google Shape;108;g1ee0c99e000_0_223:notes"/>
-          <p:cNvSpPr/>
+          <p:cNvSpPr>
+            <a:spLocks noGrp="1" noRot="1" noChangeAspect="1"/>
+          </p:cNvSpPr>
           <p:nvPr>
-            <p:ph idx="2" type="sldImg"/>
+            <p:ph type="sldImg" idx="2"/>
           </p:nvPr>
         </p:nvSpPr>
         <p:spPr>
@@ -1818,9 +1890,13 @@
             <a:ext cx="6096000" cy="3429000"/>
           </a:xfrm>
           <a:custGeom>
-            <a:rect b="b" l="l" r="r" t="t"/>
+            <a:avLst/>
+            <a:gdLst/>
+            <a:ahLst/>
+            <a:cxnLst/>
+            <a:rect l="l" t="t" r="r" b="b"/>
             <a:pathLst>
-              <a:path extrusionOk="0" h="120000" w="120000">
+              <a:path w="120000" h="120000" extrusionOk="0">
                 <a:moveTo>
                   <a:pt x="0" y="0"/>
                 </a:moveTo>
@@ -1842,9 +1918,11 @@
       <p:sp>
         <p:nvSpPr>
           <p:cNvPr id="109" name="Google Shape;109;g1ee0c99e000_0_223:notes"/>
-          <p:cNvSpPr txBox="1"/>
+          <p:cNvSpPr txBox="1">
+            <a:spLocks noGrp="1"/>
+          </p:cNvSpPr>
           <p:nvPr>
-            <p:ph idx="1" type="body"/>
+            <p:ph type="body" idx="1"/>
           </p:nvPr>
         </p:nvSpPr>
         <p:spPr>
@@ -1857,23 +1935,20 @@
           </a:prstGeom>
         </p:spPr>
         <p:txBody>
-          <a:bodyPr anchorCtr="0" anchor="t" bIns="91425" lIns="91425" spcFirstLastPara="1" rIns="91425" wrap="square" tIns="91425">
+          <a:bodyPr spcFirstLastPara="1" wrap="square" lIns="91425" tIns="91425" rIns="91425" bIns="91425" anchor="t" anchorCtr="0">
             <a:noAutofit/>
           </a:bodyPr>
           <a:lstStyle/>
           <a:p>
-            <a:pPr indent="0" lvl="0" marL="0" rtl="0" algn="l">
-              <a:spcBef>
-                <a:spcPts val="0"/>
-              </a:spcBef>
-              <a:spcAft>
-                <a:spcPts val="0"/>
-              </a:spcAft>
-              <a:buNone/>
-            </a:pPr>
-            <a:r>
-              <a:t/>
-            </a:r>
+            <a:pPr marL="0" lvl="0" indent="0" algn="l" rtl="0">
+              <a:spcBef>
+                <a:spcPts val="0"/>
+              </a:spcBef>
+              <a:spcAft>
+                <a:spcPts val="0"/>
+              </a:spcAft>
+              <a:buNone/>
+            </a:pPr>
             <a:endParaRPr/>
           </a:p>
         </p:txBody>
@@ -1887,11 +1962,11 @@
 </file>
 
 <file path=ppt/notesSlides/notesSlide9.xml><?xml version="1.0" encoding="utf-8"?>
-<p:notes xmlns:a="http://schemas.openxmlformats.org/drawingml/2006/main" xmlns:r="http://schemas.openxmlformats.org/officeDocument/2006/relationships" xmlns:mc="http://schemas.openxmlformats.org/markup-compatibility/2006" xmlns:mv="urn:schemas-microsoft-com:mac:vml" xmlns:p="http://schemas.openxmlformats.org/presentationml/2006/main" xmlns:c="http://schemas.openxmlformats.org/drawingml/2006/chart" xmlns:dgm="http://schemas.openxmlformats.org/drawingml/2006/diagram" xmlns:o="urn:schemas-microsoft-com:office:office" xmlns:v="urn:schemas-microsoft-com:vml" xmlns:pvml="urn:schemas-microsoft-com:office:powerpoint" xmlns:com="http://schemas.openxmlformats.org/drawingml/2006/compatibility" xmlns:p14="http://schemas.microsoft.com/office/powerpoint/2010/main" xmlns:p15="http://schemas.microsoft.com/office/powerpoint/2012/main" xmlns:ahyp="http://schemas.microsoft.com/office/drawing/2018/hyperlinkcolor" showMasterPhAnim="0" showMasterSp="0">
+<p:notes xmlns:a="http://schemas.openxmlformats.org/drawingml/2006/main" xmlns:r="http://schemas.openxmlformats.org/officeDocument/2006/relationships" xmlns:p="http://schemas.openxmlformats.org/presentationml/2006/main" showMasterSp="0" showMasterPhAnim="0">
   <p:cSld>
     <p:spTree>
       <p:nvGrpSpPr>
-        <p:cNvPr id="116" name="Shape 116"/>
+        <p:cNvPr id="1" name="Shape 116"/>
         <p:cNvGrpSpPr/>
         <p:nvPr/>
       </p:nvGrpSpPr>
@@ -1906,9 +1981,11 @@
       <p:sp>
         <p:nvSpPr>
           <p:cNvPr id="117" name="Google Shape;117;g1ee0c99e000_0_232:notes"/>
-          <p:cNvSpPr/>
+          <p:cNvSpPr>
+            <a:spLocks noGrp="1" noRot="1" noChangeAspect="1"/>
+          </p:cNvSpPr>
           <p:nvPr>
-            <p:ph idx="2" type="sldImg"/>
+            <p:ph type="sldImg" idx="2"/>
           </p:nvPr>
         </p:nvSpPr>
         <p:spPr>
@@ -1917,9 +1994,13 @@
             <a:ext cx="6096000" cy="3429000"/>
           </a:xfrm>
           <a:custGeom>
-            <a:rect b="b" l="l" r="r" t="t"/>
+            <a:avLst/>
+            <a:gdLst/>
+            <a:ahLst/>
+            <a:cxnLst/>
+            <a:rect l="l" t="t" r="r" b="b"/>
             <a:pathLst>
-              <a:path extrusionOk="0" h="120000" w="120000">
+              <a:path w="120000" h="120000" extrusionOk="0">
                 <a:moveTo>
                   <a:pt x="0" y="0"/>
                 </a:moveTo>
@@ -1941,9 +2022,11 @@
       <p:sp>
         <p:nvSpPr>
           <p:cNvPr id="118" name="Google Shape;118;g1ee0c99e000_0_232:notes"/>
-          <p:cNvSpPr txBox="1"/>
+          <p:cNvSpPr txBox="1">
+            <a:spLocks noGrp="1"/>
+          </p:cNvSpPr>
           <p:nvPr>
-            <p:ph idx="1" type="body"/>
+            <p:ph type="body" idx="1"/>
           </p:nvPr>
         </p:nvSpPr>
         <p:spPr>
@@ -1956,23 +2039,20 @@
           </a:prstGeom>
         </p:spPr>
         <p:txBody>
-          <a:bodyPr anchorCtr="0" anchor="t" bIns="91425" lIns="91425" spcFirstLastPara="1" rIns="91425" wrap="square" tIns="91425">
+          <a:bodyPr spcFirstLastPara="1" wrap="square" lIns="91425" tIns="91425" rIns="91425" bIns="91425" anchor="t" anchorCtr="0">
             <a:noAutofit/>
           </a:bodyPr>
           <a:lstStyle/>
           <a:p>
-            <a:pPr indent="0" lvl="0" marL="0" rtl="0" algn="l">
-              <a:spcBef>
-                <a:spcPts val="0"/>
-              </a:spcBef>
-              <a:spcAft>
-                <a:spcPts val="0"/>
-              </a:spcAft>
-              <a:buNone/>
-            </a:pPr>
-            <a:r>
-              <a:t/>
-            </a:r>
+            <a:pPr marL="0" lvl="0" indent="0" algn="l" rtl="0">
+              <a:spcBef>
+                <a:spcPts val="0"/>
+              </a:spcBef>
+              <a:spcAft>
+                <a:spcPts val="0"/>
+              </a:spcAft>
+              <a:buNone/>
+            </a:pPr>
             <a:endParaRPr/>
           </a:p>
         </p:txBody>
@@ -1986,11 +2066,11 @@
 </file>
 
 <file path=ppt/slideLayouts/slideLayout1.xml><?xml version="1.0" encoding="utf-8"?>
-<p:sldLayout xmlns:a="http://schemas.openxmlformats.org/drawingml/2006/main" xmlns:r="http://schemas.openxmlformats.org/officeDocument/2006/relationships" xmlns:mc="http://schemas.openxmlformats.org/markup-compatibility/2006" xmlns:mv="urn:schemas-microsoft-com:mac:vml" xmlns:p="http://schemas.openxmlformats.org/presentationml/2006/main" xmlns:c="http://schemas.openxmlformats.org/drawingml/2006/chart" xmlns:dgm="http://schemas.openxmlformats.org/drawingml/2006/diagram" xmlns:o="urn:schemas-microsoft-com:office:office" xmlns:v="urn:schemas-microsoft-com:vml" xmlns:pvml="urn:schemas-microsoft-com:office:powerpoint" xmlns:com="http://schemas.openxmlformats.org/drawingml/2006/compatibility" xmlns:p14="http://schemas.microsoft.com/office/powerpoint/2010/main" xmlns:p15="http://schemas.microsoft.com/office/powerpoint/2012/main" xmlns:ahyp="http://schemas.microsoft.com/office/drawing/2018/hyperlinkcolor" matchingName="Title slide" type="title">
+<p:sldLayout xmlns:a="http://schemas.openxmlformats.org/drawingml/2006/main" xmlns:r="http://schemas.openxmlformats.org/officeDocument/2006/relationships" xmlns:p="http://schemas.openxmlformats.org/presentationml/2006/main" matchingName="Title slide" type="title">
   <p:cSld name="TITLE">
     <p:spTree>
       <p:nvGrpSpPr>
-        <p:cNvPr id="10" name="Shape 10"/>
+        <p:cNvPr id="1" name="Shape 10"/>
         <p:cNvGrpSpPr/>
         <p:nvPr/>
       </p:nvGrpSpPr>
@@ -2012,7 +2092,7 @@
           <a:blip r:embed="rId2">
             <a:alphaModFix/>
           </a:blip>
-          <a:srcRect b="22311" l="0" r="0" t="0"/>
+          <a:srcRect b="22311"/>
           <a:stretch/>
         </p:blipFill>
         <p:spPr>
@@ -2032,7 +2112,9 @@
       <p:sp>
         <p:nvSpPr>
           <p:cNvPr id="12" name="Google Shape;12;p2"/>
-          <p:cNvSpPr txBox="1"/>
+          <p:cNvSpPr txBox="1">
+            <a:spLocks noGrp="1"/>
+          </p:cNvSpPr>
           <p:nvPr>
             <p:ph type="ctrTitle"/>
           </p:nvPr>
@@ -2047,7 +2129,7 @@
           </a:prstGeom>
         </p:spPr>
         <p:txBody>
-          <a:bodyPr anchorCtr="0" anchor="b" bIns="91425" lIns="91425" spcFirstLastPara="1" rIns="91425" wrap="square" tIns="91425">
+          <a:bodyPr spcFirstLastPara="1" wrap="square" lIns="91425" tIns="91425" rIns="91425" bIns="91425" anchor="b" anchorCtr="0">
             <a:normAutofit/>
           </a:bodyPr>
           <a:lstStyle>
@@ -2214,15 +2296,19 @@
               </a:defRPr>
             </a:lvl9pPr>
           </a:lstStyle>
-          <a:p/>
+          <a:p>
+            <a:endParaRPr/>
+          </a:p>
         </p:txBody>
       </p:sp>
       <p:sp>
         <p:nvSpPr>
           <p:cNvPr id="13" name="Google Shape;13;p2"/>
-          <p:cNvSpPr txBox="1"/>
+          <p:cNvSpPr txBox="1">
+            <a:spLocks noGrp="1"/>
+          </p:cNvSpPr>
           <p:nvPr>
-            <p:ph idx="1" type="subTitle"/>
+            <p:ph type="subTitle" idx="1"/>
           </p:nvPr>
         </p:nvSpPr>
         <p:spPr>
@@ -2235,7 +2321,7 @@
           </a:prstGeom>
         </p:spPr>
         <p:txBody>
-          <a:bodyPr anchorCtr="0" anchor="t" bIns="91425" lIns="91425" spcFirstLastPara="1" rIns="91425" wrap="square" tIns="91425">
+          <a:bodyPr spcFirstLastPara="1" wrap="square" lIns="91425" tIns="91425" rIns="91425" bIns="91425" anchor="t" anchorCtr="0">
             <a:normAutofit/>
           </a:bodyPr>
           <a:lstStyle>
@@ -2373,15 +2459,19 @@
               <a:defRPr sz="2800"/>
             </a:lvl9pPr>
           </a:lstStyle>
-          <a:p/>
+          <a:p>
+            <a:endParaRPr/>
+          </a:p>
         </p:txBody>
       </p:sp>
       <p:sp>
         <p:nvSpPr>
           <p:cNvPr id="14" name="Google Shape;14;p2"/>
-          <p:cNvSpPr txBox="1"/>
+          <p:cNvSpPr txBox="1">
+            <a:spLocks noGrp="1"/>
+          </p:cNvSpPr>
           <p:nvPr>
-            <p:ph idx="12" type="sldNum"/>
+            <p:ph type="sldNum" idx="12"/>
           </p:nvPr>
         </p:nvSpPr>
         <p:spPr>
@@ -2394,7 +2484,7 @@
           </a:prstGeom>
         </p:spPr>
         <p:txBody>
-          <a:bodyPr anchorCtr="0" anchor="ctr" bIns="91425" lIns="91425" spcFirstLastPara="1" rIns="91425" wrap="square" tIns="91425">
+          <a:bodyPr spcFirstLastPara="1" wrap="square" lIns="91425" tIns="91425" rIns="91425" bIns="91425" anchor="ctr" anchorCtr="0">
             <a:normAutofit/>
           </a:bodyPr>
           <a:lstStyle>
@@ -2436,7 +2526,7 @@
             </a:lvl9pPr>
           </a:lstStyle>
           <a:p>
-            <a:pPr indent="0" lvl="0" marL="0" rtl="0" algn="r">
+            <a:pPr marL="0" lvl="0" indent="0" algn="r" rtl="0">
               <a:spcBef>
                 <a:spcPts val="0"/>
               </a:spcBef>
@@ -2512,9 +2602,11 @@
       <p:sp>
         <p:nvSpPr>
           <p:cNvPr id="17" name="Google Shape;17;p2"/>
-          <p:cNvSpPr txBox="1"/>
+          <p:cNvSpPr txBox="1">
+            <a:spLocks noGrp="1"/>
+          </p:cNvSpPr>
           <p:nvPr>
-            <p:ph idx="2" type="subTitle"/>
+            <p:ph type="subTitle" idx="2"/>
           </p:nvPr>
         </p:nvSpPr>
         <p:spPr>
@@ -2527,11 +2619,11 @@
           </a:prstGeom>
         </p:spPr>
         <p:txBody>
-          <a:bodyPr anchorCtr="0" anchor="t" bIns="91425" lIns="91425" spcFirstLastPara="1" rIns="91425" wrap="square" tIns="91425">
+          <a:bodyPr spcFirstLastPara="1" wrap="square" lIns="91425" tIns="91425" rIns="91425" bIns="91425" anchor="t" anchorCtr="0">
             <a:normAutofit/>
           </a:bodyPr>
           <a:lstStyle>
-            <a:lvl1pPr lvl="0" rtl="0" algn="ctr">
+            <a:lvl1pPr lvl="0" algn="ctr" rtl="0">
               <a:lnSpc>
                 <a:spcPct val="100000"/>
               </a:lnSpc>
@@ -2546,13 +2638,13 @@
               </a:buClr>
               <a:buSzPts val="2000"/>
               <a:buNone/>
-              <a:defRPr i="1" sz="2000">
+              <a:defRPr sz="2000" i="1">
                 <a:solidFill>
                   <a:schemeClr val="lt1"/>
                 </a:solidFill>
               </a:defRPr>
             </a:lvl1pPr>
-            <a:lvl2pPr lvl="1" rtl="0" algn="ctr">
+            <a:lvl2pPr lvl="1" algn="ctr" rtl="0">
               <a:lnSpc>
                 <a:spcPct val="100000"/>
               </a:lnSpc>
@@ -2566,7 +2658,7 @@
               <a:buNone/>
               <a:defRPr sz="2800"/>
             </a:lvl2pPr>
-            <a:lvl3pPr lvl="2" rtl="0" algn="ctr">
+            <a:lvl3pPr lvl="2" algn="ctr" rtl="0">
               <a:lnSpc>
                 <a:spcPct val="100000"/>
               </a:lnSpc>
@@ -2580,7 +2672,7 @@
               <a:buNone/>
               <a:defRPr sz="2800"/>
             </a:lvl3pPr>
-            <a:lvl4pPr lvl="3" rtl="0" algn="ctr">
+            <a:lvl4pPr lvl="3" algn="ctr" rtl="0">
               <a:lnSpc>
                 <a:spcPct val="100000"/>
               </a:lnSpc>
@@ -2594,7 +2686,7 @@
               <a:buNone/>
               <a:defRPr sz="2800"/>
             </a:lvl4pPr>
-            <a:lvl5pPr lvl="4" rtl="0" algn="ctr">
+            <a:lvl5pPr lvl="4" algn="ctr" rtl="0">
               <a:lnSpc>
                 <a:spcPct val="100000"/>
               </a:lnSpc>
@@ -2608,7 +2700,7 @@
               <a:buNone/>
               <a:defRPr sz="2800"/>
             </a:lvl5pPr>
-            <a:lvl6pPr lvl="5" rtl="0" algn="ctr">
+            <a:lvl6pPr lvl="5" algn="ctr" rtl="0">
               <a:lnSpc>
                 <a:spcPct val="100000"/>
               </a:lnSpc>
@@ -2622,7 +2714,7 @@
               <a:buNone/>
               <a:defRPr sz="2800"/>
             </a:lvl6pPr>
-            <a:lvl7pPr lvl="6" rtl="0" algn="ctr">
+            <a:lvl7pPr lvl="6" algn="ctr" rtl="0">
               <a:lnSpc>
                 <a:spcPct val="100000"/>
               </a:lnSpc>
@@ -2636,7 +2728,7 @@
               <a:buNone/>
               <a:defRPr sz="2800"/>
             </a:lvl7pPr>
-            <a:lvl8pPr lvl="7" rtl="0" algn="ctr">
+            <a:lvl8pPr lvl="7" algn="ctr" rtl="0">
               <a:lnSpc>
                 <a:spcPct val="100000"/>
               </a:lnSpc>
@@ -2650,7 +2742,7 @@
               <a:buNone/>
               <a:defRPr sz="2800"/>
             </a:lvl8pPr>
-            <a:lvl9pPr lvl="8" rtl="0" algn="ctr">
+            <a:lvl9pPr lvl="8" algn="ctr" rtl="0">
               <a:lnSpc>
                 <a:spcPct val="100000"/>
               </a:lnSpc>
@@ -2665,7 +2757,9 @@
               <a:defRPr sz="2800"/>
             </a:lvl9pPr>
           </a:lstStyle>
-          <a:p/>
+          <a:p>
+            <a:endParaRPr/>
+          </a:p>
         </p:txBody>
       </p:sp>
     </p:spTree>
@@ -2677,11 +2771,11 @@
 </file>
 
 <file path=ppt/slideLayouts/slideLayout10.xml><?xml version="1.0" encoding="utf-8"?>
-<p:sldLayout xmlns:a="http://schemas.openxmlformats.org/drawingml/2006/main" xmlns:r="http://schemas.openxmlformats.org/officeDocument/2006/relationships" xmlns:mc="http://schemas.openxmlformats.org/markup-compatibility/2006" xmlns:mv="urn:schemas-microsoft-com:mac:vml" xmlns:p="http://schemas.openxmlformats.org/presentationml/2006/main" xmlns:c="http://schemas.openxmlformats.org/drawingml/2006/chart" xmlns:dgm="http://schemas.openxmlformats.org/drawingml/2006/diagram" xmlns:o="urn:schemas-microsoft-com:office:office" xmlns:v="urn:schemas-microsoft-com:vml" xmlns:pvml="urn:schemas-microsoft-com:office:powerpoint" xmlns:com="http://schemas.openxmlformats.org/drawingml/2006/compatibility" xmlns:p14="http://schemas.microsoft.com/office/powerpoint/2010/main" xmlns:p15="http://schemas.microsoft.com/office/powerpoint/2012/main" xmlns:ahyp="http://schemas.microsoft.com/office/drawing/2018/hyperlinkcolor" matchingName="Big number">
+<p:sldLayout xmlns:a="http://schemas.openxmlformats.org/drawingml/2006/main" xmlns:r="http://schemas.openxmlformats.org/officeDocument/2006/relationships" xmlns:p="http://schemas.openxmlformats.org/presentationml/2006/main" matchingName="Big number">
   <p:cSld name="BIG_NUMBER">
     <p:spTree>
       <p:nvGrpSpPr>
-        <p:cNvPr id="52" name="Shape 52"/>
+        <p:cNvPr id="1" name="Shape 52"/>
         <p:cNvGrpSpPr/>
         <p:nvPr/>
       </p:nvGrpSpPr>
@@ -2696,9 +2790,11 @@
       <p:sp>
         <p:nvSpPr>
           <p:cNvPr id="53" name="Google Shape;53;p11"/>
-          <p:cNvSpPr txBox="1"/>
+          <p:cNvSpPr txBox="1">
+            <a:spLocks noGrp="1"/>
+          </p:cNvSpPr>
           <p:nvPr>
-            <p:ph hasCustomPrompt="1" type="title"/>
+            <p:ph type="title" hasCustomPrompt="1"/>
           </p:nvPr>
         </p:nvSpPr>
         <p:spPr>
@@ -2711,7 +2807,7 @@
           </a:prstGeom>
         </p:spPr>
         <p:txBody>
-          <a:bodyPr anchorCtr="0" anchor="b" bIns="91425" lIns="91425" spcFirstLastPara="1" rIns="91425" wrap="square" tIns="91425">
+          <a:bodyPr spcFirstLastPara="1" wrap="square" lIns="91425" tIns="91425" rIns="91425" bIns="91425" anchor="b" anchorCtr="0">
             <a:normAutofit/>
           </a:bodyPr>
           <a:lstStyle>
@@ -2825,9 +2921,11 @@
       <p:sp>
         <p:nvSpPr>
           <p:cNvPr id="54" name="Google Shape;54;p11"/>
-          <p:cNvSpPr txBox="1"/>
+          <p:cNvSpPr txBox="1">
+            <a:spLocks noGrp="1"/>
+          </p:cNvSpPr>
           <p:nvPr>
-            <p:ph idx="1" type="body"/>
+            <p:ph type="body" idx="1"/>
           </p:nvPr>
         </p:nvSpPr>
         <p:spPr>
@@ -2840,11 +2938,11 @@
           </a:prstGeom>
         </p:spPr>
         <p:txBody>
-          <a:bodyPr anchorCtr="0" anchor="t" bIns="91425" lIns="91425" spcFirstLastPara="1" rIns="91425" wrap="square" tIns="91425">
+          <a:bodyPr spcFirstLastPara="1" wrap="square" lIns="91425" tIns="91425" rIns="91425" bIns="91425" anchor="t" anchorCtr="0">
             <a:normAutofit/>
           </a:bodyPr>
           <a:lstStyle>
-            <a:lvl1pPr indent="-342900" lvl="0" marL="457200" algn="ctr">
+            <a:lvl1pPr marL="457200" lvl="0" indent="-342900" algn="ctr">
               <a:spcBef>
                 <a:spcPts val="0"/>
               </a:spcBef>
@@ -2855,7 +2953,7 @@
               <a:buChar char="●"/>
               <a:defRPr/>
             </a:lvl1pPr>
-            <a:lvl2pPr indent="-317500" lvl="1" marL="914400" algn="ctr">
+            <a:lvl2pPr marL="914400" lvl="1" indent="-317500" algn="ctr">
               <a:spcBef>
                 <a:spcPts val="0"/>
               </a:spcBef>
@@ -2866,7 +2964,7 @@
               <a:buChar char="○"/>
               <a:defRPr/>
             </a:lvl2pPr>
-            <a:lvl3pPr indent="-317500" lvl="2" marL="1371600" algn="ctr">
+            <a:lvl3pPr marL="1371600" lvl="2" indent="-317500" algn="ctr">
               <a:spcBef>
                 <a:spcPts val="0"/>
               </a:spcBef>
@@ -2877,7 +2975,7 @@
               <a:buChar char="■"/>
               <a:defRPr/>
             </a:lvl3pPr>
-            <a:lvl4pPr indent="-317500" lvl="3" marL="1828800" algn="ctr">
+            <a:lvl4pPr marL="1828800" lvl="3" indent="-317500" algn="ctr">
               <a:spcBef>
                 <a:spcPts val="0"/>
               </a:spcBef>
@@ -2888,7 +2986,7 @@
               <a:buChar char="●"/>
               <a:defRPr/>
             </a:lvl4pPr>
-            <a:lvl5pPr indent="-317500" lvl="4" marL="2286000" algn="ctr">
+            <a:lvl5pPr marL="2286000" lvl="4" indent="-317500" algn="ctr">
               <a:spcBef>
                 <a:spcPts val="0"/>
               </a:spcBef>
@@ -2899,7 +2997,7 @@
               <a:buChar char="○"/>
               <a:defRPr/>
             </a:lvl5pPr>
-            <a:lvl6pPr indent="-317500" lvl="5" marL="2743200" algn="ctr">
+            <a:lvl6pPr marL="2743200" lvl="5" indent="-317500" algn="ctr">
               <a:spcBef>
                 <a:spcPts val="0"/>
               </a:spcBef>
@@ -2910,7 +3008,7 @@
               <a:buChar char="■"/>
               <a:defRPr/>
             </a:lvl6pPr>
-            <a:lvl7pPr indent="-317500" lvl="6" marL="3200400" algn="ctr">
+            <a:lvl7pPr marL="3200400" lvl="6" indent="-317500" algn="ctr">
               <a:spcBef>
                 <a:spcPts val="0"/>
               </a:spcBef>
@@ -2921,7 +3019,7 @@
               <a:buChar char="●"/>
               <a:defRPr/>
             </a:lvl7pPr>
-            <a:lvl8pPr indent="-317500" lvl="7" marL="3657600" algn="ctr">
+            <a:lvl8pPr marL="3657600" lvl="7" indent="-317500" algn="ctr">
               <a:spcBef>
                 <a:spcPts val="0"/>
               </a:spcBef>
@@ -2932,7 +3030,7 @@
               <a:buChar char="○"/>
               <a:defRPr/>
             </a:lvl8pPr>
-            <a:lvl9pPr indent="-317500" lvl="8" marL="4114800" algn="ctr">
+            <a:lvl9pPr marL="4114800" lvl="8" indent="-317500" algn="ctr">
               <a:spcBef>
                 <a:spcPts val="0"/>
               </a:spcBef>
@@ -2944,15 +3042,19 @@
               <a:defRPr/>
             </a:lvl9pPr>
           </a:lstStyle>
-          <a:p/>
+          <a:p>
+            <a:endParaRPr/>
+          </a:p>
         </p:txBody>
       </p:sp>
       <p:sp>
         <p:nvSpPr>
           <p:cNvPr id="55" name="Google Shape;55;p11"/>
-          <p:cNvSpPr txBox="1"/>
+          <p:cNvSpPr txBox="1">
+            <a:spLocks noGrp="1"/>
+          </p:cNvSpPr>
           <p:nvPr>
-            <p:ph idx="12" type="sldNum"/>
+            <p:ph type="sldNum" idx="12"/>
           </p:nvPr>
         </p:nvSpPr>
         <p:spPr>
@@ -2965,7 +3067,7 @@
           </a:prstGeom>
         </p:spPr>
         <p:txBody>
-          <a:bodyPr anchorCtr="0" anchor="ctr" bIns="91425" lIns="91425" spcFirstLastPara="1" rIns="91425" wrap="square" tIns="91425">
+          <a:bodyPr spcFirstLastPara="1" wrap="square" lIns="91425" tIns="91425" rIns="91425" bIns="91425" anchor="ctr" anchorCtr="0">
             <a:normAutofit/>
           </a:bodyPr>
           <a:lstStyle>
@@ -3007,7 +3109,7 @@
             </a:lvl9pPr>
           </a:lstStyle>
           <a:p>
-            <a:pPr indent="0" lvl="0" marL="0" rtl="0" algn="r">
+            <a:pPr marL="0" lvl="0" indent="0" algn="r" rtl="0">
               <a:spcBef>
                 <a:spcPts val="0"/>
               </a:spcBef>
@@ -3033,11 +3135,11 @@
 </file>
 
 <file path=ppt/slideLayouts/slideLayout11.xml><?xml version="1.0" encoding="utf-8"?>
-<p:sldLayout xmlns:a="http://schemas.openxmlformats.org/drawingml/2006/main" xmlns:r="http://schemas.openxmlformats.org/officeDocument/2006/relationships" xmlns:mc="http://schemas.openxmlformats.org/markup-compatibility/2006" xmlns:mv="urn:schemas-microsoft-com:mac:vml" xmlns:p="http://schemas.openxmlformats.org/presentationml/2006/main" xmlns:c="http://schemas.openxmlformats.org/drawingml/2006/chart" xmlns:dgm="http://schemas.openxmlformats.org/drawingml/2006/diagram" xmlns:o="urn:schemas-microsoft-com:office:office" xmlns:v="urn:schemas-microsoft-com:vml" xmlns:pvml="urn:schemas-microsoft-com:office:powerpoint" xmlns:com="http://schemas.openxmlformats.org/drawingml/2006/compatibility" xmlns:p14="http://schemas.microsoft.com/office/powerpoint/2010/main" xmlns:p15="http://schemas.microsoft.com/office/powerpoint/2012/main" xmlns:ahyp="http://schemas.microsoft.com/office/drawing/2018/hyperlinkcolor" matchingName="Blank" type="blank">
+<p:sldLayout xmlns:a="http://schemas.openxmlformats.org/drawingml/2006/main" xmlns:r="http://schemas.openxmlformats.org/officeDocument/2006/relationships" xmlns:p="http://schemas.openxmlformats.org/presentationml/2006/main" matchingName="Blank" type="blank">
   <p:cSld name="BLANK">
     <p:spTree>
       <p:nvGrpSpPr>
-        <p:cNvPr id="56" name="Shape 56"/>
+        <p:cNvPr id="1" name="Shape 56"/>
         <p:cNvGrpSpPr/>
         <p:nvPr/>
       </p:nvGrpSpPr>
@@ -3052,9 +3154,11 @@
       <p:sp>
         <p:nvSpPr>
           <p:cNvPr id="57" name="Google Shape;57;p12"/>
-          <p:cNvSpPr txBox="1"/>
+          <p:cNvSpPr txBox="1">
+            <a:spLocks noGrp="1"/>
+          </p:cNvSpPr>
           <p:nvPr>
-            <p:ph idx="12" type="sldNum"/>
+            <p:ph type="sldNum" idx="12"/>
           </p:nvPr>
         </p:nvSpPr>
         <p:spPr>
@@ -3067,7 +3171,7 @@
           </a:prstGeom>
         </p:spPr>
         <p:txBody>
-          <a:bodyPr anchorCtr="0" anchor="ctr" bIns="91425" lIns="91425" spcFirstLastPara="1" rIns="91425" wrap="square" tIns="91425">
+          <a:bodyPr spcFirstLastPara="1" wrap="square" lIns="91425" tIns="91425" rIns="91425" bIns="91425" anchor="ctr" anchorCtr="0">
             <a:normAutofit/>
           </a:bodyPr>
           <a:lstStyle>
@@ -3109,7 +3213,7 @@
             </a:lvl9pPr>
           </a:lstStyle>
           <a:p>
-            <a:pPr indent="0" lvl="0" marL="0" rtl="0" algn="r">
+            <a:pPr marL="0" lvl="0" indent="0" algn="r" rtl="0">
               <a:spcBef>
                 <a:spcPts val="0"/>
               </a:spcBef>
@@ -3135,18 +3239,19 @@
 </file>
 
 <file path=ppt/slideLayouts/slideLayout2.xml><?xml version="1.0" encoding="utf-8"?>
-<p:sldLayout xmlns:a="http://schemas.openxmlformats.org/drawingml/2006/main" xmlns:r="http://schemas.openxmlformats.org/officeDocument/2006/relationships" xmlns:mc="http://schemas.openxmlformats.org/markup-compatibility/2006" xmlns:mv="urn:schemas-microsoft-com:mac:vml" xmlns:p="http://schemas.openxmlformats.org/presentationml/2006/main" xmlns:c="http://schemas.openxmlformats.org/drawingml/2006/chart" xmlns:dgm="http://schemas.openxmlformats.org/drawingml/2006/diagram" xmlns:o="urn:schemas-microsoft-com:office:office" xmlns:v="urn:schemas-microsoft-com:vml" xmlns:pvml="urn:schemas-microsoft-com:office:powerpoint" xmlns:com="http://schemas.openxmlformats.org/drawingml/2006/compatibility" xmlns:p14="http://schemas.microsoft.com/office/powerpoint/2010/main" xmlns:p15="http://schemas.microsoft.com/office/powerpoint/2012/main" xmlns:ahyp="http://schemas.microsoft.com/office/drawing/2018/hyperlinkcolor" matchingName="Section header" type="secHead">
+<p:sldLayout xmlns:a="http://schemas.openxmlformats.org/drawingml/2006/main" xmlns:r="http://schemas.openxmlformats.org/officeDocument/2006/relationships" xmlns:p="http://schemas.openxmlformats.org/presentationml/2006/main" matchingName="Section header" type="secHead">
   <p:cSld name="SECTION_HEADER">
     <p:bg>
       <p:bgPr>
         <a:solidFill>
           <a:schemeClr val="lt1"/>
         </a:solidFill>
+        <a:effectLst/>
       </p:bgPr>
     </p:bg>
     <p:spTree>
       <p:nvGrpSpPr>
-        <p:cNvPr id="18" name="Shape 18"/>
+        <p:cNvPr id="1" name="Shape 18"/>
         <p:cNvGrpSpPr/>
         <p:nvPr/>
       </p:nvGrpSpPr>
@@ -3168,7 +3273,7 @@
           <a:blip r:embed="rId2">
             <a:alphaModFix/>
           </a:blip>
-          <a:srcRect b="22311" l="0" r="0" t="0"/>
+          <a:srcRect b="22311"/>
           <a:stretch/>
         </p:blipFill>
         <p:spPr>
@@ -3188,7 +3293,9 @@
       <p:sp>
         <p:nvSpPr>
           <p:cNvPr id="20" name="Google Shape;20;p3"/>
-          <p:cNvSpPr txBox="1"/>
+          <p:cNvSpPr txBox="1">
+            <a:spLocks noGrp="1"/>
+          </p:cNvSpPr>
           <p:nvPr>
             <p:ph type="title"/>
           </p:nvPr>
@@ -3203,7 +3310,7 @@
           </a:prstGeom>
         </p:spPr>
         <p:txBody>
-          <a:bodyPr anchorCtr="0" anchor="ctr" bIns="91425" lIns="91425" spcFirstLastPara="1" rIns="91425" wrap="square" tIns="91425">
+          <a:bodyPr spcFirstLastPara="1" wrap="square" lIns="91425" tIns="91425" rIns="91425" bIns="91425" anchor="ctr" anchorCtr="0">
             <a:normAutofit/>
           </a:bodyPr>
           <a:lstStyle>
@@ -3219,7 +3326,7 @@
               </a:buClr>
               <a:buSzPts val="3600"/>
               <a:buNone/>
-              <a:defRPr b="1" sz="3600">
+              <a:defRPr sz="3600" b="1">
                 <a:solidFill>
                   <a:schemeClr val="lt1"/>
                 </a:solidFill>
@@ -3314,15 +3421,19 @@
               <a:defRPr sz="3600"/>
             </a:lvl9pPr>
           </a:lstStyle>
-          <a:p/>
+          <a:p>
+            <a:endParaRPr/>
+          </a:p>
         </p:txBody>
       </p:sp>
       <p:sp>
         <p:nvSpPr>
           <p:cNvPr id="21" name="Google Shape;21;p3"/>
-          <p:cNvSpPr txBox="1"/>
+          <p:cNvSpPr txBox="1">
+            <a:spLocks noGrp="1"/>
+          </p:cNvSpPr>
           <p:nvPr>
-            <p:ph idx="12" type="sldNum"/>
+            <p:ph type="sldNum" idx="12"/>
           </p:nvPr>
         </p:nvSpPr>
         <p:spPr>
@@ -3335,7 +3446,7 @@
           </a:prstGeom>
         </p:spPr>
         <p:txBody>
-          <a:bodyPr anchorCtr="0" anchor="ctr" bIns="91425" lIns="91425" spcFirstLastPara="1" rIns="91425" wrap="square" tIns="91425">
+          <a:bodyPr spcFirstLastPara="1" wrap="square" lIns="91425" tIns="91425" rIns="91425" bIns="91425" anchor="ctr" anchorCtr="0">
             <a:normAutofit/>
           </a:bodyPr>
           <a:lstStyle>
@@ -3377,7 +3488,7 @@
             </a:lvl9pPr>
           </a:lstStyle>
           <a:p>
-            <a:pPr indent="0" lvl="0" marL="0" rtl="0" algn="r">
+            <a:pPr marL="0" lvl="0" indent="0" algn="r" rtl="0">
               <a:spcBef>
                 <a:spcPts val="0"/>
               </a:spcBef>
@@ -3459,11 +3570,11 @@
 </file>
 
 <file path=ppt/slideLayouts/slideLayout3.xml><?xml version="1.0" encoding="utf-8"?>
-<p:sldLayout xmlns:a="http://schemas.openxmlformats.org/drawingml/2006/main" xmlns:r="http://schemas.openxmlformats.org/officeDocument/2006/relationships" xmlns:mc="http://schemas.openxmlformats.org/markup-compatibility/2006" xmlns:mv="urn:schemas-microsoft-com:mac:vml" xmlns:p="http://schemas.openxmlformats.org/presentationml/2006/main" xmlns:c="http://schemas.openxmlformats.org/drawingml/2006/chart" xmlns:dgm="http://schemas.openxmlformats.org/drawingml/2006/diagram" xmlns:o="urn:schemas-microsoft-com:office:office" xmlns:v="urn:schemas-microsoft-com:vml" xmlns:pvml="urn:schemas-microsoft-com:office:powerpoint" xmlns:com="http://schemas.openxmlformats.org/drawingml/2006/compatibility" xmlns:p14="http://schemas.microsoft.com/office/powerpoint/2010/main" xmlns:p15="http://schemas.microsoft.com/office/powerpoint/2012/main" xmlns:ahyp="http://schemas.microsoft.com/office/drawing/2018/hyperlinkcolor" matchingName="Title and body" type="tx">
+<p:sldLayout xmlns:a="http://schemas.openxmlformats.org/drawingml/2006/main" xmlns:r="http://schemas.openxmlformats.org/officeDocument/2006/relationships" xmlns:p="http://schemas.openxmlformats.org/presentationml/2006/main" matchingName="Title and body" type="tx">
   <p:cSld name="TITLE_AND_BODY">
     <p:spTree>
       <p:nvGrpSpPr>
-        <p:cNvPr id="24" name="Shape 24"/>
+        <p:cNvPr id="1" name="Shape 24"/>
         <p:cNvGrpSpPr/>
         <p:nvPr/>
       </p:nvGrpSpPr>
@@ -3478,7 +3589,9 @@
       <p:sp>
         <p:nvSpPr>
           <p:cNvPr id="25" name="Google Shape;25;p4"/>
-          <p:cNvSpPr txBox="1"/>
+          <p:cNvSpPr txBox="1">
+            <a:spLocks noGrp="1"/>
+          </p:cNvSpPr>
           <p:nvPr>
             <p:ph type="title"/>
           </p:nvPr>
@@ -3493,7 +3606,7 @@
           </a:prstGeom>
         </p:spPr>
         <p:txBody>
-          <a:bodyPr anchorCtr="0" anchor="t" bIns="91425" lIns="91425" spcFirstLastPara="1" rIns="91425" wrap="square" tIns="91425">
+          <a:bodyPr spcFirstLastPara="1" wrap="square" lIns="91425" tIns="91425" rIns="91425" bIns="91425" anchor="t" anchorCtr="0">
             <a:normAutofit/>
           </a:bodyPr>
           <a:lstStyle>
@@ -3597,15 +3710,19 @@
               <a:defRPr/>
             </a:lvl9pPr>
           </a:lstStyle>
-          <a:p/>
+          <a:p>
+            <a:endParaRPr/>
+          </a:p>
         </p:txBody>
       </p:sp>
       <p:sp>
         <p:nvSpPr>
           <p:cNvPr id="26" name="Google Shape;26;p4"/>
-          <p:cNvSpPr txBox="1"/>
+          <p:cNvSpPr txBox="1">
+            <a:spLocks noGrp="1"/>
+          </p:cNvSpPr>
           <p:nvPr>
-            <p:ph idx="1" type="body"/>
+            <p:ph type="body" idx="1"/>
           </p:nvPr>
         </p:nvSpPr>
         <p:spPr>
@@ -3618,11 +3735,11 @@
           </a:prstGeom>
         </p:spPr>
         <p:txBody>
-          <a:bodyPr anchorCtr="0" anchor="t" bIns="91425" lIns="91425" spcFirstLastPara="1" rIns="91425" wrap="square" tIns="91425">
+          <a:bodyPr spcFirstLastPara="1" wrap="square" lIns="91425" tIns="91425" rIns="91425" bIns="91425" anchor="t" anchorCtr="0">
             <a:normAutofit/>
           </a:bodyPr>
           <a:lstStyle>
-            <a:lvl1pPr indent="-342900" lvl="0" marL="457200">
+            <a:lvl1pPr marL="457200" lvl="0" indent="-342900">
               <a:spcBef>
                 <a:spcPts val="0"/>
               </a:spcBef>
@@ -3633,7 +3750,7 @@
               <a:buChar char="●"/>
               <a:defRPr/>
             </a:lvl1pPr>
-            <a:lvl2pPr indent="-317500" lvl="1" marL="914400">
+            <a:lvl2pPr marL="914400" lvl="1" indent="-317500">
               <a:spcBef>
                 <a:spcPts val="0"/>
               </a:spcBef>
@@ -3644,7 +3761,7 @@
               <a:buChar char="○"/>
               <a:defRPr/>
             </a:lvl2pPr>
-            <a:lvl3pPr indent="-317500" lvl="2" marL="1371600">
+            <a:lvl3pPr marL="1371600" lvl="2" indent="-317500">
               <a:spcBef>
                 <a:spcPts val="0"/>
               </a:spcBef>
@@ -3655,7 +3772,7 @@
               <a:buChar char="■"/>
               <a:defRPr/>
             </a:lvl3pPr>
-            <a:lvl4pPr indent="-317500" lvl="3" marL="1828800">
+            <a:lvl4pPr marL="1828800" lvl="3" indent="-317500">
               <a:spcBef>
                 <a:spcPts val="0"/>
               </a:spcBef>
@@ -3666,7 +3783,7 @@
               <a:buChar char="●"/>
               <a:defRPr/>
             </a:lvl4pPr>
-            <a:lvl5pPr indent="-317500" lvl="4" marL="2286000">
+            <a:lvl5pPr marL="2286000" lvl="4" indent="-317500">
               <a:spcBef>
                 <a:spcPts val="0"/>
               </a:spcBef>
@@ -3677,7 +3794,7 @@
               <a:buChar char="○"/>
               <a:defRPr/>
             </a:lvl5pPr>
-            <a:lvl6pPr indent="-317500" lvl="5" marL="2743200">
+            <a:lvl6pPr marL="2743200" lvl="5" indent="-317500">
               <a:spcBef>
                 <a:spcPts val="0"/>
               </a:spcBef>
@@ -3688,7 +3805,7 @@
               <a:buChar char="■"/>
               <a:defRPr/>
             </a:lvl6pPr>
-            <a:lvl7pPr indent="-317500" lvl="6" marL="3200400">
+            <a:lvl7pPr marL="3200400" lvl="6" indent="-317500">
               <a:spcBef>
                 <a:spcPts val="0"/>
               </a:spcBef>
@@ -3699,7 +3816,7 @@
               <a:buChar char="●"/>
               <a:defRPr/>
             </a:lvl7pPr>
-            <a:lvl8pPr indent="-317500" lvl="7" marL="3657600">
+            <a:lvl8pPr marL="3657600" lvl="7" indent="-317500">
               <a:spcBef>
                 <a:spcPts val="0"/>
               </a:spcBef>
@@ -3710,7 +3827,7 @@
               <a:buChar char="○"/>
               <a:defRPr/>
             </a:lvl8pPr>
-            <a:lvl9pPr indent="-317500" lvl="8" marL="4114800">
+            <a:lvl9pPr marL="4114800" lvl="8" indent="-317500">
               <a:spcBef>
                 <a:spcPts val="0"/>
               </a:spcBef>
@@ -3722,15 +3839,19 @@
               <a:defRPr/>
             </a:lvl9pPr>
           </a:lstStyle>
-          <a:p/>
+          <a:p>
+            <a:endParaRPr/>
+          </a:p>
         </p:txBody>
       </p:sp>
       <p:sp>
         <p:nvSpPr>
           <p:cNvPr id="27" name="Google Shape;27;p4"/>
-          <p:cNvSpPr txBox="1"/>
+          <p:cNvSpPr txBox="1">
+            <a:spLocks noGrp="1"/>
+          </p:cNvSpPr>
           <p:nvPr>
-            <p:ph idx="12" type="sldNum"/>
+            <p:ph type="sldNum" idx="12"/>
           </p:nvPr>
         </p:nvSpPr>
         <p:spPr>
@@ -3743,7 +3864,7 @@
           </a:prstGeom>
         </p:spPr>
         <p:txBody>
-          <a:bodyPr anchorCtr="0" anchor="ctr" bIns="91425" lIns="91425" spcFirstLastPara="1" rIns="91425" wrap="square" tIns="91425">
+          <a:bodyPr spcFirstLastPara="1" wrap="square" lIns="91425" tIns="91425" rIns="91425" bIns="91425" anchor="ctr" anchorCtr="0">
             <a:normAutofit/>
           </a:bodyPr>
           <a:lstStyle>
@@ -3785,7 +3906,7 @@
             </a:lvl9pPr>
           </a:lstStyle>
           <a:p>
-            <a:pPr indent="0" lvl="0" marL="0" rtl="0" algn="r">
+            <a:pPr marL="0" lvl="0" indent="0" algn="r" rtl="0">
               <a:spcBef>
                 <a:spcPts val="0"/>
               </a:spcBef>
@@ -3811,11 +3932,11 @@
 </file>
 
 <file path=ppt/slideLayouts/slideLayout4.xml><?xml version="1.0" encoding="utf-8"?>
-<p:sldLayout xmlns:a="http://schemas.openxmlformats.org/drawingml/2006/main" xmlns:r="http://schemas.openxmlformats.org/officeDocument/2006/relationships" xmlns:mc="http://schemas.openxmlformats.org/markup-compatibility/2006" xmlns:mv="urn:schemas-microsoft-com:mac:vml" xmlns:p="http://schemas.openxmlformats.org/presentationml/2006/main" xmlns:c="http://schemas.openxmlformats.org/drawingml/2006/chart" xmlns:dgm="http://schemas.openxmlformats.org/drawingml/2006/diagram" xmlns:o="urn:schemas-microsoft-com:office:office" xmlns:v="urn:schemas-microsoft-com:vml" xmlns:pvml="urn:schemas-microsoft-com:office:powerpoint" xmlns:com="http://schemas.openxmlformats.org/drawingml/2006/compatibility" xmlns:p14="http://schemas.microsoft.com/office/powerpoint/2010/main" xmlns:p15="http://schemas.microsoft.com/office/powerpoint/2012/main" xmlns:ahyp="http://schemas.microsoft.com/office/drawing/2018/hyperlinkcolor" matchingName="Title and two columns" type="twoColTx">
+<p:sldLayout xmlns:a="http://schemas.openxmlformats.org/drawingml/2006/main" xmlns:r="http://schemas.openxmlformats.org/officeDocument/2006/relationships" xmlns:p="http://schemas.openxmlformats.org/presentationml/2006/main" matchingName="Title and two columns" type="twoColTx">
   <p:cSld name="TITLE_AND_TWO_COLUMNS">
     <p:spTree>
       <p:nvGrpSpPr>
-        <p:cNvPr id="28" name="Shape 28"/>
+        <p:cNvPr id="1" name="Shape 28"/>
         <p:cNvGrpSpPr/>
         <p:nvPr/>
       </p:nvGrpSpPr>
@@ -3830,7 +3951,9 @@
       <p:sp>
         <p:nvSpPr>
           <p:cNvPr id="29" name="Google Shape;29;p5"/>
-          <p:cNvSpPr txBox="1"/>
+          <p:cNvSpPr txBox="1">
+            <a:spLocks noGrp="1"/>
+          </p:cNvSpPr>
           <p:nvPr>
             <p:ph type="title"/>
           </p:nvPr>
@@ -3845,7 +3968,7 @@
           </a:prstGeom>
         </p:spPr>
         <p:txBody>
-          <a:bodyPr anchorCtr="0" anchor="t" bIns="91425" lIns="91425" spcFirstLastPara="1" rIns="91425" wrap="square" tIns="91425">
+          <a:bodyPr spcFirstLastPara="1" wrap="square" lIns="91425" tIns="91425" rIns="91425" bIns="91425" anchor="t" anchorCtr="0">
             <a:normAutofit/>
           </a:bodyPr>
           <a:lstStyle>
@@ -3949,15 +4072,19 @@
               <a:defRPr/>
             </a:lvl9pPr>
           </a:lstStyle>
-          <a:p/>
+          <a:p>
+            <a:endParaRPr/>
+          </a:p>
         </p:txBody>
       </p:sp>
       <p:sp>
         <p:nvSpPr>
           <p:cNvPr id="30" name="Google Shape;30;p5"/>
-          <p:cNvSpPr txBox="1"/>
+          <p:cNvSpPr txBox="1">
+            <a:spLocks noGrp="1"/>
+          </p:cNvSpPr>
           <p:nvPr>
-            <p:ph idx="1" type="body"/>
+            <p:ph type="body" idx="1"/>
           </p:nvPr>
         </p:nvSpPr>
         <p:spPr>
@@ -3970,11 +4097,11 @@
           </a:prstGeom>
         </p:spPr>
         <p:txBody>
-          <a:bodyPr anchorCtr="0" anchor="t" bIns="91425" lIns="91425" spcFirstLastPara="1" rIns="91425" wrap="square" tIns="91425">
+          <a:bodyPr spcFirstLastPara="1" wrap="square" lIns="91425" tIns="91425" rIns="91425" bIns="91425" anchor="t" anchorCtr="0">
             <a:normAutofit/>
           </a:bodyPr>
           <a:lstStyle>
-            <a:lvl1pPr indent="-317500" lvl="0" marL="457200">
+            <a:lvl1pPr marL="457200" lvl="0" indent="-317500">
               <a:spcBef>
                 <a:spcPts val="0"/>
               </a:spcBef>
@@ -3985,7 +4112,7 @@
               <a:buChar char="●"/>
               <a:defRPr sz="1400"/>
             </a:lvl1pPr>
-            <a:lvl2pPr indent="-304800" lvl="1" marL="914400">
+            <a:lvl2pPr marL="914400" lvl="1" indent="-304800">
               <a:spcBef>
                 <a:spcPts val="0"/>
               </a:spcBef>
@@ -3996,7 +4123,7 @@
               <a:buChar char="○"/>
               <a:defRPr sz="1200"/>
             </a:lvl2pPr>
-            <a:lvl3pPr indent="-304800" lvl="2" marL="1371600">
+            <a:lvl3pPr marL="1371600" lvl="2" indent="-304800">
               <a:spcBef>
                 <a:spcPts val="0"/>
               </a:spcBef>
@@ -4007,7 +4134,7 @@
               <a:buChar char="■"/>
               <a:defRPr sz="1200"/>
             </a:lvl3pPr>
-            <a:lvl4pPr indent="-304800" lvl="3" marL="1828800">
+            <a:lvl4pPr marL="1828800" lvl="3" indent="-304800">
               <a:spcBef>
                 <a:spcPts val="0"/>
               </a:spcBef>
@@ -4018,7 +4145,7 @@
               <a:buChar char="●"/>
               <a:defRPr sz="1200"/>
             </a:lvl4pPr>
-            <a:lvl5pPr indent="-304800" lvl="4" marL="2286000">
+            <a:lvl5pPr marL="2286000" lvl="4" indent="-304800">
               <a:spcBef>
                 <a:spcPts val="0"/>
               </a:spcBef>
@@ -4029,7 +4156,7 @@
               <a:buChar char="○"/>
               <a:defRPr sz="1200"/>
             </a:lvl5pPr>
-            <a:lvl6pPr indent="-304800" lvl="5" marL="2743200">
+            <a:lvl6pPr marL="2743200" lvl="5" indent="-304800">
               <a:spcBef>
                 <a:spcPts val="0"/>
               </a:spcBef>
@@ -4040,7 +4167,7 @@
               <a:buChar char="■"/>
               <a:defRPr sz="1200"/>
             </a:lvl6pPr>
-            <a:lvl7pPr indent="-304800" lvl="6" marL="3200400">
+            <a:lvl7pPr marL="3200400" lvl="6" indent="-304800">
               <a:spcBef>
                 <a:spcPts val="0"/>
               </a:spcBef>
@@ -4051,7 +4178,7 @@
               <a:buChar char="●"/>
               <a:defRPr sz="1200"/>
             </a:lvl7pPr>
-            <a:lvl8pPr indent="-304800" lvl="7" marL="3657600">
+            <a:lvl8pPr marL="3657600" lvl="7" indent="-304800">
               <a:spcBef>
                 <a:spcPts val="0"/>
               </a:spcBef>
@@ -4062,7 +4189,7 @@
               <a:buChar char="○"/>
               <a:defRPr sz="1200"/>
             </a:lvl8pPr>
-            <a:lvl9pPr indent="-304800" lvl="8" marL="4114800">
+            <a:lvl9pPr marL="4114800" lvl="8" indent="-304800">
               <a:spcBef>
                 <a:spcPts val="0"/>
               </a:spcBef>
@@ -4074,15 +4201,19 @@
               <a:defRPr sz="1200"/>
             </a:lvl9pPr>
           </a:lstStyle>
-          <a:p/>
+          <a:p>
+            <a:endParaRPr/>
+          </a:p>
         </p:txBody>
       </p:sp>
       <p:sp>
         <p:nvSpPr>
           <p:cNvPr id="31" name="Google Shape;31;p5"/>
-          <p:cNvSpPr txBox="1"/>
+          <p:cNvSpPr txBox="1">
+            <a:spLocks noGrp="1"/>
+          </p:cNvSpPr>
           <p:nvPr>
-            <p:ph idx="2" type="body"/>
+            <p:ph type="body" idx="2"/>
           </p:nvPr>
         </p:nvSpPr>
         <p:spPr>
@@ -4095,11 +4226,11 @@
           </a:prstGeom>
         </p:spPr>
         <p:txBody>
-          <a:bodyPr anchorCtr="0" anchor="t" bIns="91425" lIns="91425" spcFirstLastPara="1" rIns="91425" wrap="square" tIns="91425">
+          <a:bodyPr spcFirstLastPara="1" wrap="square" lIns="91425" tIns="91425" rIns="91425" bIns="91425" anchor="t" anchorCtr="0">
             <a:normAutofit/>
           </a:bodyPr>
           <a:lstStyle>
-            <a:lvl1pPr indent="-317500" lvl="0" marL="457200">
+            <a:lvl1pPr marL="457200" lvl="0" indent="-317500">
               <a:spcBef>
                 <a:spcPts val="0"/>
               </a:spcBef>
@@ -4110,7 +4241,7 @@
               <a:buChar char="●"/>
               <a:defRPr sz="1400"/>
             </a:lvl1pPr>
-            <a:lvl2pPr indent="-304800" lvl="1" marL="914400">
+            <a:lvl2pPr marL="914400" lvl="1" indent="-304800">
               <a:spcBef>
                 <a:spcPts val="0"/>
               </a:spcBef>
@@ -4121,7 +4252,7 @@
               <a:buChar char="○"/>
               <a:defRPr sz="1200"/>
             </a:lvl2pPr>
-            <a:lvl3pPr indent="-304800" lvl="2" marL="1371600">
+            <a:lvl3pPr marL="1371600" lvl="2" indent="-304800">
               <a:spcBef>
                 <a:spcPts val="0"/>
               </a:spcBef>
@@ -4132,7 +4263,7 @@
               <a:buChar char="■"/>
               <a:defRPr sz="1200"/>
             </a:lvl3pPr>
-            <a:lvl4pPr indent="-304800" lvl="3" marL="1828800">
+            <a:lvl4pPr marL="1828800" lvl="3" indent="-304800">
               <a:spcBef>
                 <a:spcPts val="0"/>
               </a:spcBef>
@@ -4143,7 +4274,7 @@
               <a:buChar char="●"/>
               <a:defRPr sz="1200"/>
             </a:lvl4pPr>
-            <a:lvl5pPr indent="-304800" lvl="4" marL="2286000">
+            <a:lvl5pPr marL="2286000" lvl="4" indent="-304800">
               <a:spcBef>
                 <a:spcPts val="0"/>
               </a:spcBef>
@@ -4154,7 +4285,7 @@
               <a:buChar char="○"/>
               <a:defRPr sz="1200"/>
             </a:lvl5pPr>
-            <a:lvl6pPr indent="-304800" lvl="5" marL="2743200">
+            <a:lvl6pPr marL="2743200" lvl="5" indent="-304800">
               <a:spcBef>
                 <a:spcPts val="0"/>
               </a:spcBef>
@@ -4165,7 +4296,7 @@
               <a:buChar char="■"/>
               <a:defRPr sz="1200"/>
             </a:lvl6pPr>
-            <a:lvl7pPr indent="-304800" lvl="6" marL="3200400">
+            <a:lvl7pPr marL="3200400" lvl="6" indent="-304800">
               <a:spcBef>
                 <a:spcPts val="0"/>
               </a:spcBef>
@@ -4176,7 +4307,7 @@
               <a:buChar char="●"/>
               <a:defRPr sz="1200"/>
             </a:lvl7pPr>
-            <a:lvl8pPr indent="-304800" lvl="7" marL="3657600">
+            <a:lvl8pPr marL="3657600" lvl="7" indent="-304800">
               <a:spcBef>
                 <a:spcPts val="0"/>
               </a:spcBef>
@@ -4187,7 +4318,7 @@
               <a:buChar char="○"/>
               <a:defRPr sz="1200"/>
             </a:lvl8pPr>
-            <a:lvl9pPr indent="-304800" lvl="8" marL="4114800">
+            <a:lvl9pPr marL="4114800" lvl="8" indent="-304800">
               <a:spcBef>
                 <a:spcPts val="0"/>
               </a:spcBef>
@@ -4199,15 +4330,19 @@
               <a:defRPr sz="1200"/>
             </a:lvl9pPr>
           </a:lstStyle>
-          <a:p/>
+          <a:p>
+            <a:endParaRPr/>
+          </a:p>
         </p:txBody>
       </p:sp>
       <p:sp>
         <p:nvSpPr>
           <p:cNvPr id="32" name="Google Shape;32;p5"/>
-          <p:cNvSpPr txBox="1"/>
+          <p:cNvSpPr txBox="1">
+            <a:spLocks noGrp="1"/>
+          </p:cNvSpPr>
           <p:nvPr>
-            <p:ph idx="12" type="sldNum"/>
+            <p:ph type="sldNum" idx="12"/>
           </p:nvPr>
         </p:nvSpPr>
         <p:spPr>
@@ -4220,7 +4355,7 @@
           </a:prstGeom>
         </p:spPr>
         <p:txBody>
-          <a:bodyPr anchorCtr="0" anchor="ctr" bIns="91425" lIns="91425" spcFirstLastPara="1" rIns="91425" wrap="square" tIns="91425">
+          <a:bodyPr spcFirstLastPara="1" wrap="square" lIns="91425" tIns="91425" rIns="91425" bIns="91425" anchor="ctr" anchorCtr="0">
             <a:normAutofit/>
           </a:bodyPr>
           <a:lstStyle>
@@ -4262,7 +4397,7 @@
             </a:lvl9pPr>
           </a:lstStyle>
           <a:p>
-            <a:pPr indent="0" lvl="0" marL="0" rtl="0" algn="r">
+            <a:pPr marL="0" lvl="0" indent="0" algn="r" rtl="0">
               <a:spcBef>
                 <a:spcPts val="0"/>
               </a:spcBef>
@@ -4288,11 +4423,11 @@
 </file>
 
 <file path=ppt/slideLayouts/slideLayout5.xml><?xml version="1.0" encoding="utf-8"?>
-<p:sldLayout xmlns:a="http://schemas.openxmlformats.org/drawingml/2006/main" xmlns:r="http://schemas.openxmlformats.org/officeDocument/2006/relationships" xmlns:mc="http://schemas.openxmlformats.org/markup-compatibility/2006" xmlns:mv="urn:schemas-microsoft-com:mac:vml" xmlns:p="http://schemas.openxmlformats.org/presentationml/2006/main" xmlns:c="http://schemas.openxmlformats.org/drawingml/2006/chart" xmlns:dgm="http://schemas.openxmlformats.org/drawingml/2006/diagram" xmlns:o="urn:schemas-microsoft-com:office:office" xmlns:v="urn:schemas-microsoft-com:vml" xmlns:pvml="urn:schemas-microsoft-com:office:powerpoint" xmlns:com="http://schemas.openxmlformats.org/drawingml/2006/compatibility" xmlns:p14="http://schemas.microsoft.com/office/powerpoint/2010/main" xmlns:p15="http://schemas.microsoft.com/office/powerpoint/2012/main" xmlns:ahyp="http://schemas.microsoft.com/office/drawing/2018/hyperlinkcolor" matchingName="Title only" type="titleOnly">
+<p:sldLayout xmlns:a="http://schemas.openxmlformats.org/drawingml/2006/main" xmlns:r="http://schemas.openxmlformats.org/officeDocument/2006/relationships" xmlns:p="http://schemas.openxmlformats.org/presentationml/2006/main" matchingName="Title only" type="titleOnly">
   <p:cSld name="TITLE_ONLY">
     <p:spTree>
       <p:nvGrpSpPr>
-        <p:cNvPr id="33" name="Shape 33"/>
+        <p:cNvPr id="1" name="Shape 33"/>
         <p:cNvGrpSpPr/>
         <p:nvPr/>
       </p:nvGrpSpPr>
@@ -4307,7 +4442,9 @@
       <p:sp>
         <p:nvSpPr>
           <p:cNvPr id="34" name="Google Shape;34;p6"/>
-          <p:cNvSpPr txBox="1"/>
+          <p:cNvSpPr txBox="1">
+            <a:spLocks noGrp="1"/>
+          </p:cNvSpPr>
           <p:nvPr>
             <p:ph type="title"/>
           </p:nvPr>
@@ -4322,7 +4459,7 @@
           </a:prstGeom>
         </p:spPr>
         <p:txBody>
-          <a:bodyPr anchorCtr="0" anchor="t" bIns="91425" lIns="91425" spcFirstLastPara="1" rIns="91425" wrap="square" tIns="91425">
+          <a:bodyPr spcFirstLastPara="1" wrap="square" lIns="91425" tIns="91425" rIns="91425" bIns="91425" anchor="t" anchorCtr="0">
             <a:normAutofit/>
           </a:bodyPr>
           <a:lstStyle>
@@ -4426,15 +4563,19 @@
               <a:defRPr/>
             </a:lvl9pPr>
           </a:lstStyle>
-          <a:p/>
+          <a:p>
+            <a:endParaRPr/>
+          </a:p>
         </p:txBody>
       </p:sp>
       <p:sp>
         <p:nvSpPr>
           <p:cNvPr id="35" name="Google Shape;35;p6"/>
-          <p:cNvSpPr txBox="1"/>
+          <p:cNvSpPr txBox="1">
+            <a:spLocks noGrp="1"/>
+          </p:cNvSpPr>
           <p:nvPr>
-            <p:ph idx="12" type="sldNum"/>
+            <p:ph type="sldNum" idx="12"/>
           </p:nvPr>
         </p:nvSpPr>
         <p:spPr>
@@ -4447,7 +4588,7 @@
           </a:prstGeom>
         </p:spPr>
         <p:txBody>
-          <a:bodyPr anchorCtr="0" anchor="ctr" bIns="91425" lIns="91425" spcFirstLastPara="1" rIns="91425" wrap="square" tIns="91425">
+          <a:bodyPr spcFirstLastPara="1" wrap="square" lIns="91425" tIns="91425" rIns="91425" bIns="91425" anchor="ctr" anchorCtr="0">
             <a:normAutofit/>
           </a:bodyPr>
           <a:lstStyle>
@@ -4489,7 +4630,7 @@
             </a:lvl9pPr>
           </a:lstStyle>
           <a:p>
-            <a:pPr indent="0" lvl="0" marL="0" rtl="0" algn="r">
+            <a:pPr marL="0" lvl="0" indent="0" algn="r" rtl="0">
               <a:spcBef>
                 <a:spcPts val="0"/>
               </a:spcBef>
@@ -4515,11 +4656,11 @@
 </file>
 
 <file path=ppt/slideLayouts/slideLayout6.xml><?xml version="1.0" encoding="utf-8"?>
-<p:sldLayout xmlns:a="http://schemas.openxmlformats.org/drawingml/2006/main" xmlns:r="http://schemas.openxmlformats.org/officeDocument/2006/relationships" xmlns:mc="http://schemas.openxmlformats.org/markup-compatibility/2006" xmlns:mv="urn:schemas-microsoft-com:mac:vml" xmlns:p="http://schemas.openxmlformats.org/presentationml/2006/main" xmlns:c="http://schemas.openxmlformats.org/drawingml/2006/chart" xmlns:dgm="http://schemas.openxmlformats.org/drawingml/2006/diagram" xmlns:o="urn:schemas-microsoft-com:office:office" xmlns:v="urn:schemas-microsoft-com:vml" xmlns:pvml="urn:schemas-microsoft-com:office:powerpoint" xmlns:com="http://schemas.openxmlformats.org/drawingml/2006/compatibility" xmlns:p14="http://schemas.microsoft.com/office/powerpoint/2010/main" xmlns:p15="http://schemas.microsoft.com/office/powerpoint/2012/main" xmlns:ahyp="http://schemas.microsoft.com/office/drawing/2018/hyperlinkcolor" matchingName="One column text">
+<p:sldLayout xmlns:a="http://schemas.openxmlformats.org/drawingml/2006/main" xmlns:r="http://schemas.openxmlformats.org/officeDocument/2006/relationships" xmlns:p="http://schemas.openxmlformats.org/presentationml/2006/main" matchingName="One column text">
   <p:cSld name="ONE_COLUMN_TEXT">
     <p:spTree>
       <p:nvGrpSpPr>
-        <p:cNvPr id="36" name="Shape 36"/>
+        <p:cNvPr id="1" name="Shape 36"/>
         <p:cNvGrpSpPr/>
         <p:nvPr/>
       </p:nvGrpSpPr>
@@ -4534,7 +4675,9 @@
       <p:sp>
         <p:nvSpPr>
           <p:cNvPr id="37" name="Google Shape;37;p7"/>
-          <p:cNvSpPr txBox="1"/>
+          <p:cNvSpPr txBox="1">
+            <a:spLocks noGrp="1"/>
+          </p:cNvSpPr>
           <p:nvPr>
             <p:ph type="title"/>
           </p:nvPr>
@@ -4549,7 +4692,7 @@
           </a:prstGeom>
         </p:spPr>
         <p:txBody>
-          <a:bodyPr anchorCtr="0" anchor="b" bIns="91425" lIns="91425" spcFirstLastPara="1" rIns="91425" wrap="square" tIns="91425">
+          <a:bodyPr spcFirstLastPara="1" wrap="square" lIns="91425" tIns="91425" rIns="91425" bIns="91425" anchor="b" anchorCtr="0">
             <a:normAutofit/>
           </a:bodyPr>
           <a:lstStyle>
@@ -4562,7 +4705,7 @@
               </a:spcAft>
               <a:buSzPts val="2400"/>
               <a:buNone/>
-              <a:defRPr b="1" sz="2400"/>
+              <a:defRPr sz="2400" b="1"/>
             </a:lvl1pPr>
             <a:lvl2pPr lvl="1">
               <a:spcBef>
@@ -4653,15 +4796,19 @@
               <a:defRPr sz="2400"/>
             </a:lvl9pPr>
           </a:lstStyle>
-          <a:p/>
+          <a:p>
+            <a:endParaRPr/>
+          </a:p>
         </p:txBody>
       </p:sp>
       <p:sp>
         <p:nvSpPr>
           <p:cNvPr id="38" name="Google Shape;38;p7"/>
-          <p:cNvSpPr txBox="1"/>
+          <p:cNvSpPr txBox="1">
+            <a:spLocks noGrp="1"/>
+          </p:cNvSpPr>
           <p:nvPr>
-            <p:ph idx="1" type="body"/>
+            <p:ph type="body" idx="1"/>
           </p:nvPr>
         </p:nvSpPr>
         <p:spPr>
@@ -4674,11 +4821,11 @@
           </a:prstGeom>
         </p:spPr>
         <p:txBody>
-          <a:bodyPr anchorCtr="0" anchor="t" bIns="91425" lIns="91425" spcFirstLastPara="1" rIns="91425" wrap="square" tIns="91425">
+          <a:bodyPr spcFirstLastPara="1" wrap="square" lIns="91425" tIns="91425" rIns="91425" bIns="91425" anchor="t" anchorCtr="0">
             <a:normAutofit/>
           </a:bodyPr>
           <a:lstStyle>
-            <a:lvl1pPr indent="-304800" lvl="0" marL="457200">
+            <a:lvl1pPr marL="457200" lvl="0" indent="-304800">
               <a:spcBef>
                 <a:spcPts val="0"/>
               </a:spcBef>
@@ -4689,7 +4836,7 @@
               <a:buChar char="●"/>
               <a:defRPr sz="1200"/>
             </a:lvl1pPr>
-            <a:lvl2pPr indent="-304800" lvl="1" marL="914400">
+            <a:lvl2pPr marL="914400" lvl="1" indent="-304800">
               <a:spcBef>
                 <a:spcPts val="0"/>
               </a:spcBef>
@@ -4700,7 +4847,7 @@
               <a:buChar char="○"/>
               <a:defRPr sz="1200"/>
             </a:lvl2pPr>
-            <a:lvl3pPr indent="-304800" lvl="2" marL="1371600">
+            <a:lvl3pPr marL="1371600" lvl="2" indent="-304800">
               <a:spcBef>
                 <a:spcPts val="0"/>
               </a:spcBef>
@@ -4711,7 +4858,7 @@
               <a:buChar char="■"/>
               <a:defRPr sz="1200"/>
             </a:lvl3pPr>
-            <a:lvl4pPr indent="-304800" lvl="3" marL="1828800">
+            <a:lvl4pPr marL="1828800" lvl="3" indent="-304800">
               <a:spcBef>
                 <a:spcPts val="0"/>
               </a:spcBef>
@@ -4722,7 +4869,7 @@
               <a:buChar char="●"/>
               <a:defRPr sz="1200"/>
             </a:lvl4pPr>
-            <a:lvl5pPr indent="-304800" lvl="4" marL="2286000">
+            <a:lvl5pPr marL="2286000" lvl="4" indent="-304800">
               <a:spcBef>
                 <a:spcPts val="0"/>
               </a:spcBef>
@@ -4733,7 +4880,7 @@
               <a:buChar char="○"/>
               <a:defRPr sz="1200"/>
             </a:lvl5pPr>
-            <a:lvl6pPr indent="-304800" lvl="5" marL="2743200">
+            <a:lvl6pPr marL="2743200" lvl="5" indent="-304800">
               <a:spcBef>
                 <a:spcPts val="0"/>
               </a:spcBef>
@@ -4744,7 +4891,7 @@
               <a:buChar char="■"/>
               <a:defRPr sz="1200"/>
             </a:lvl6pPr>
-            <a:lvl7pPr indent="-304800" lvl="6" marL="3200400">
+            <a:lvl7pPr marL="3200400" lvl="6" indent="-304800">
               <a:spcBef>
                 <a:spcPts val="0"/>
               </a:spcBef>
@@ -4755,7 +4902,7 @@
               <a:buChar char="●"/>
               <a:defRPr sz="1200"/>
             </a:lvl7pPr>
-            <a:lvl8pPr indent="-304800" lvl="7" marL="3657600">
+            <a:lvl8pPr marL="3657600" lvl="7" indent="-304800">
               <a:spcBef>
                 <a:spcPts val="0"/>
               </a:spcBef>
@@ -4766,7 +4913,7 @@
               <a:buChar char="○"/>
               <a:defRPr sz="1200"/>
             </a:lvl8pPr>
-            <a:lvl9pPr indent="-304800" lvl="8" marL="4114800">
+            <a:lvl9pPr marL="4114800" lvl="8" indent="-304800">
               <a:spcBef>
                 <a:spcPts val="0"/>
               </a:spcBef>
@@ -4778,15 +4925,19 @@
               <a:defRPr sz="1200"/>
             </a:lvl9pPr>
           </a:lstStyle>
-          <a:p/>
+          <a:p>
+            <a:endParaRPr/>
+          </a:p>
         </p:txBody>
       </p:sp>
       <p:sp>
         <p:nvSpPr>
           <p:cNvPr id="39" name="Google Shape;39;p7"/>
-          <p:cNvSpPr txBox="1"/>
+          <p:cNvSpPr txBox="1">
+            <a:spLocks noGrp="1"/>
+          </p:cNvSpPr>
           <p:nvPr>
-            <p:ph idx="12" type="sldNum"/>
+            <p:ph type="sldNum" idx="12"/>
           </p:nvPr>
         </p:nvSpPr>
         <p:spPr>
@@ -4799,7 +4950,7 @@
           </a:prstGeom>
         </p:spPr>
         <p:txBody>
-          <a:bodyPr anchorCtr="0" anchor="ctr" bIns="91425" lIns="91425" spcFirstLastPara="1" rIns="91425" wrap="square" tIns="91425">
+          <a:bodyPr spcFirstLastPara="1" wrap="square" lIns="91425" tIns="91425" rIns="91425" bIns="91425" anchor="ctr" anchorCtr="0">
             <a:normAutofit/>
           </a:bodyPr>
           <a:lstStyle>
@@ -4841,7 +4992,7 @@
             </a:lvl9pPr>
           </a:lstStyle>
           <a:p>
-            <a:pPr indent="0" lvl="0" marL="0" rtl="0" algn="r">
+            <a:pPr marL="0" lvl="0" indent="0" algn="r" rtl="0">
               <a:spcBef>
                 <a:spcPts val="0"/>
               </a:spcBef>
@@ -4867,11 +5018,11 @@
 </file>
 
 <file path=ppt/slideLayouts/slideLayout7.xml><?xml version="1.0" encoding="utf-8"?>
-<p:sldLayout xmlns:a="http://schemas.openxmlformats.org/drawingml/2006/main" xmlns:r="http://schemas.openxmlformats.org/officeDocument/2006/relationships" xmlns:mc="http://schemas.openxmlformats.org/markup-compatibility/2006" xmlns:mv="urn:schemas-microsoft-com:mac:vml" xmlns:p="http://schemas.openxmlformats.org/presentationml/2006/main" xmlns:c="http://schemas.openxmlformats.org/drawingml/2006/chart" xmlns:dgm="http://schemas.openxmlformats.org/drawingml/2006/diagram" xmlns:o="urn:schemas-microsoft-com:office:office" xmlns:v="urn:schemas-microsoft-com:vml" xmlns:pvml="urn:schemas-microsoft-com:office:powerpoint" xmlns:com="http://schemas.openxmlformats.org/drawingml/2006/compatibility" xmlns:p14="http://schemas.microsoft.com/office/powerpoint/2010/main" xmlns:p15="http://schemas.microsoft.com/office/powerpoint/2012/main" xmlns:ahyp="http://schemas.microsoft.com/office/drawing/2018/hyperlinkcolor" matchingName="Main point">
+<p:sldLayout xmlns:a="http://schemas.openxmlformats.org/drawingml/2006/main" xmlns:r="http://schemas.openxmlformats.org/officeDocument/2006/relationships" xmlns:p="http://schemas.openxmlformats.org/presentationml/2006/main" matchingName="Main point">
   <p:cSld name="MAIN_POINT">
     <p:spTree>
       <p:nvGrpSpPr>
-        <p:cNvPr id="40" name="Shape 40"/>
+        <p:cNvPr id="1" name="Shape 40"/>
         <p:cNvGrpSpPr/>
         <p:nvPr/>
       </p:nvGrpSpPr>
@@ -4886,7 +5037,9 @@
       <p:sp>
         <p:nvSpPr>
           <p:cNvPr id="41" name="Google Shape;41;p8"/>
-          <p:cNvSpPr txBox="1"/>
+          <p:cNvSpPr txBox="1">
+            <a:spLocks noGrp="1"/>
+          </p:cNvSpPr>
           <p:nvPr>
             <p:ph type="title"/>
           </p:nvPr>
@@ -4901,7 +5054,7 @@
           </a:prstGeom>
         </p:spPr>
         <p:txBody>
-          <a:bodyPr anchorCtr="0" anchor="ctr" bIns="91425" lIns="91425" spcFirstLastPara="1" rIns="91425" wrap="square" tIns="91425">
+          <a:bodyPr spcFirstLastPara="1" wrap="square" lIns="91425" tIns="91425" rIns="91425" bIns="91425" anchor="ctr" anchorCtr="0">
             <a:normAutofit/>
           </a:bodyPr>
           <a:lstStyle>
@@ -5005,15 +5158,19 @@
               <a:defRPr sz="4800"/>
             </a:lvl9pPr>
           </a:lstStyle>
-          <a:p/>
+          <a:p>
+            <a:endParaRPr/>
+          </a:p>
         </p:txBody>
       </p:sp>
       <p:sp>
         <p:nvSpPr>
           <p:cNvPr id="42" name="Google Shape;42;p8"/>
-          <p:cNvSpPr txBox="1"/>
+          <p:cNvSpPr txBox="1">
+            <a:spLocks noGrp="1"/>
+          </p:cNvSpPr>
           <p:nvPr>
-            <p:ph idx="12" type="sldNum"/>
+            <p:ph type="sldNum" idx="12"/>
           </p:nvPr>
         </p:nvSpPr>
         <p:spPr>
@@ -5026,7 +5183,7 @@
           </a:prstGeom>
         </p:spPr>
         <p:txBody>
-          <a:bodyPr anchorCtr="0" anchor="ctr" bIns="91425" lIns="91425" spcFirstLastPara="1" rIns="91425" wrap="square" tIns="91425">
+          <a:bodyPr spcFirstLastPara="1" wrap="square" lIns="91425" tIns="91425" rIns="91425" bIns="91425" anchor="ctr" anchorCtr="0">
             <a:normAutofit/>
           </a:bodyPr>
           <a:lstStyle>
@@ -5068,7 +5225,7 @@
             </a:lvl9pPr>
           </a:lstStyle>
           <a:p>
-            <a:pPr indent="0" lvl="0" marL="0" rtl="0" algn="r">
+            <a:pPr marL="0" lvl="0" indent="0" algn="r" rtl="0">
               <a:spcBef>
                 <a:spcPts val="0"/>
               </a:spcBef>
@@ -5094,11 +5251,11 @@
 </file>
 
 <file path=ppt/slideLayouts/slideLayout8.xml><?xml version="1.0" encoding="utf-8"?>
-<p:sldLayout xmlns:a="http://schemas.openxmlformats.org/drawingml/2006/main" xmlns:r="http://schemas.openxmlformats.org/officeDocument/2006/relationships" xmlns:mc="http://schemas.openxmlformats.org/markup-compatibility/2006" xmlns:mv="urn:schemas-microsoft-com:mac:vml" xmlns:p="http://schemas.openxmlformats.org/presentationml/2006/main" xmlns:c="http://schemas.openxmlformats.org/drawingml/2006/chart" xmlns:dgm="http://schemas.openxmlformats.org/drawingml/2006/diagram" xmlns:o="urn:schemas-microsoft-com:office:office" xmlns:v="urn:schemas-microsoft-com:vml" xmlns:pvml="urn:schemas-microsoft-com:office:powerpoint" xmlns:com="http://schemas.openxmlformats.org/drawingml/2006/compatibility" xmlns:p14="http://schemas.microsoft.com/office/powerpoint/2010/main" xmlns:p15="http://schemas.microsoft.com/office/powerpoint/2012/main" xmlns:ahyp="http://schemas.microsoft.com/office/drawing/2018/hyperlinkcolor" matchingName="Section title and description">
+<p:sldLayout xmlns:a="http://schemas.openxmlformats.org/drawingml/2006/main" xmlns:r="http://schemas.openxmlformats.org/officeDocument/2006/relationships" xmlns:p="http://schemas.openxmlformats.org/presentationml/2006/main" matchingName="Section title and description">
   <p:cSld name="SECTION_TITLE_AND_DESCRIPTION">
     <p:spTree>
       <p:nvGrpSpPr>
-        <p:cNvPr id="43" name="Shape 43"/>
+        <p:cNvPr id="1" name="Shape 43"/>
         <p:cNvGrpSpPr/>
         <p:nvPr/>
       </p:nvGrpSpPr>
@@ -5132,23 +5289,20 @@
           </a:ln>
         </p:spPr>
         <p:txBody>
-          <a:bodyPr anchorCtr="0" anchor="ctr" bIns="91425" lIns="91425" spcFirstLastPara="1" rIns="91425" wrap="square" tIns="91425">
+          <a:bodyPr spcFirstLastPara="1" wrap="square" lIns="91425" tIns="91425" rIns="91425" bIns="91425" anchor="ctr" anchorCtr="0">
             <a:noAutofit/>
           </a:bodyPr>
           <a:lstStyle/>
           <a:p>
-            <a:pPr indent="0" lvl="0" marL="0" rtl="0" algn="l">
-              <a:spcBef>
-                <a:spcPts val="0"/>
-              </a:spcBef>
-              <a:spcAft>
-                <a:spcPts val="0"/>
-              </a:spcAft>
-              <a:buNone/>
-            </a:pPr>
-            <a:r>
-              <a:t/>
-            </a:r>
+            <a:pPr marL="0" lvl="0" indent="0" algn="l" rtl="0">
+              <a:spcBef>
+                <a:spcPts val="0"/>
+              </a:spcBef>
+              <a:spcAft>
+                <a:spcPts val="0"/>
+              </a:spcAft>
+              <a:buNone/>
+            </a:pPr>
             <a:endParaRPr/>
           </a:p>
         </p:txBody>
@@ -5156,7 +5310,9 @@
       <p:sp>
         <p:nvSpPr>
           <p:cNvPr id="45" name="Google Shape;45;p9"/>
-          <p:cNvSpPr txBox="1"/>
+          <p:cNvSpPr txBox="1">
+            <a:spLocks noGrp="1"/>
+          </p:cNvSpPr>
           <p:nvPr>
             <p:ph type="title"/>
           </p:nvPr>
@@ -5171,7 +5327,7 @@
           </a:prstGeom>
         </p:spPr>
         <p:txBody>
-          <a:bodyPr anchorCtr="0" anchor="b" bIns="91425" lIns="91425" spcFirstLastPara="1" rIns="91425" wrap="square" tIns="91425">
+          <a:bodyPr spcFirstLastPara="1" wrap="square" lIns="91425" tIns="91425" rIns="91425" bIns="91425" anchor="b" anchorCtr="0">
             <a:normAutofit/>
           </a:bodyPr>
           <a:lstStyle>
@@ -5275,15 +5431,19 @@
               <a:defRPr sz="4200"/>
             </a:lvl9pPr>
           </a:lstStyle>
-          <a:p/>
+          <a:p>
+            <a:endParaRPr/>
+          </a:p>
         </p:txBody>
       </p:sp>
       <p:sp>
         <p:nvSpPr>
           <p:cNvPr id="46" name="Google Shape;46;p9"/>
-          <p:cNvSpPr txBox="1"/>
+          <p:cNvSpPr txBox="1">
+            <a:spLocks noGrp="1"/>
+          </p:cNvSpPr>
           <p:nvPr>
-            <p:ph idx="1" type="subTitle"/>
+            <p:ph type="subTitle" idx="1"/>
           </p:nvPr>
         </p:nvSpPr>
         <p:spPr>
@@ -5296,7 +5456,7 @@
           </a:prstGeom>
         </p:spPr>
         <p:txBody>
-          <a:bodyPr anchorCtr="0" anchor="t" bIns="91425" lIns="91425" spcFirstLastPara="1" rIns="91425" wrap="square" tIns="91425">
+          <a:bodyPr spcFirstLastPara="1" wrap="square" lIns="91425" tIns="91425" rIns="91425" bIns="91425" anchor="t" anchorCtr="0">
             <a:normAutofit/>
           </a:bodyPr>
           <a:lstStyle>
@@ -5427,15 +5587,19 @@
               <a:defRPr sz="2100"/>
             </a:lvl9pPr>
           </a:lstStyle>
-          <a:p/>
+          <a:p>
+            <a:endParaRPr/>
+          </a:p>
         </p:txBody>
       </p:sp>
       <p:sp>
         <p:nvSpPr>
           <p:cNvPr id="47" name="Google Shape;47;p9"/>
-          <p:cNvSpPr txBox="1"/>
+          <p:cNvSpPr txBox="1">
+            <a:spLocks noGrp="1"/>
+          </p:cNvSpPr>
           <p:nvPr>
-            <p:ph idx="2" type="body"/>
+            <p:ph type="body" idx="2"/>
           </p:nvPr>
         </p:nvSpPr>
         <p:spPr>
@@ -5448,11 +5612,11 @@
           </a:prstGeom>
         </p:spPr>
         <p:txBody>
-          <a:bodyPr anchorCtr="0" anchor="ctr" bIns="91425" lIns="91425" spcFirstLastPara="1" rIns="91425" wrap="square" tIns="91425">
+          <a:bodyPr spcFirstLastPara="1" wrap="square" lIns="91425" tIns="91425" rIns="91425" bIns="91425" anchor="ctr" anchorCtr="0">
             <a:normAutofit/>
           </a:bodyPr>
           <a:lstStyle>
-            <a:lvl1pPr indent="-342900" lvl="0" marL="457200">
+            <a:lvl1pPr marL="457200" lvl="0" indent="-342900">
               <a:spcBef>
                 <a:spcPts val="0"/>
               </a:spcBef>
@@ -5463,7 +5627,7 @@
               <a:buChar char="●"/>
               <a:defRPr/>
             </a:lvl1pPr>
-            <a:lvl2pPr indent="-317500" lvl="1" marL="914400">
+            <a:lvl2pPr marL="914400" lvl="1" indent="-317500">
               <a:spcBef>
                 <a:spcPts val="0"/>
               </a:spcBef>
@@ -5474,7 +5638,7 @@
               <a:buChar char="○"/>
               <a:defRPr/>
             </a:lvl2pPr>
-            <a:lvl3pPr indent="-317500" lvl="2" marL="1371600">
+            <a:lvl3pPr marL="1371600" lvl="2" indent="-317500">
               <a:spcBef>
                 <a:spcPts val="0"/>
               </a:spcBef>
@@ -5485,7 +5649,7 @@
               <a:buChar char="■"/>
               <a:defRPr/>
             </a:lvl3pPr>
-            <a:lvl4pPr indent="-317500" lvl="3" marL="1828800">
+            <a:lvl4pPr marL="1828800" lvl="3" indent="-317500">
               <a:spcBef>
                 <a:spcPts val="0"/>
               </a:spcBef>
@@ -5496,7 +5660,7 @@
               <a:buChar char="●"/>
               <a:defRPr/>
             </a:lvl4pPr>
-            <a:lvl5pPr indent="-317500" lvl="4" marL="2286000">
+            <a:lvl5pPr marL="2286000" lvl="4" indent="-317500">
               <a:spcBef>
                 <a:spcPts val="0"/>
               </a:spcBef>
@@ -5507,7 +5671,7 @@
               <a:buChar char="○"/>
               <a:defRPr/>
             </a:lvl5pPr>
-            <a:lvl6pPr indent="-317500" lvl="5" marL="2743200">
+            <a:lvl6pPr marL="2743200" lvl="5" indent="-317500">
               <a:spcBef>
                 <a:spcPts val="0"/>
               </a:spcBef>
@@ -5518,7 +5682,7 @@
               <a:buChar char="■"/>
               <a:defRPr/>
             </a:lvl6pPr>
-            <a:lvl7pPr indent="-317500" lvl="6" marL="3200400">
+            <a:lvl7pPr marL="3200400" lvl="6" indent="-317500">
               <a:spcBef>
                 <a:spcPts val="0"/>
               </a:spcBef>
@@ -5529,7 +5693,7 @@
               <a:buChar char="●"/>
               <a:defRPr/>
             </a:lvl7pPr>
-            <a:lvl8pPr indent="-317500" lvl="7" marL="3657600">
+            <a:lvl8pPr marL="3657600" lvl="7" indent="-317500">
               <a:spcBef>
                 <a:spcPts val="0"/>
               </a:spcBef>
@@ -5540,7 +5704,7 @@
               <a:buChar char="○"/>
               <a:defRPr/>
             </a:lvl8pPr>
-            <a:lvl9pPr indent="-317500" lvl="8" marL="4114800">
+            <a:lvl9pPr marL="4114800" lvl="8" indent="-317500">
               <a:spcBef>
                 <a:spcPts val="0"/>
               </a:spcBef>
@@ -5552,15 +5716,19 @@
               <a:defRPr/>
             </a:lvl9pPr>
           </a:lstStyle>
-          <a:p/>
+          <a:p>
+            <a:endParaRPr/>
+          </a:p>
         </p:txBody>
       </p:sp>
       <p:sp>
         <p:nvSpPr>
           <p:cNvPr id="48" name="Google Shape;48;p9"/>
-          <p:cNvSpPr txBox="1"/>
+          <p:cNvSpPr txBox="1">
+            <a:spLocks noGrp="1"/>
+          </p:cNvSpPr>
           <p:nvPr>
-            <p:ph idx="12" type="sldNum"/>
+            <p:ph type="sldNum" idx="12"/>
           </p:nvPr>
         </p:nvSpPr>
         <p:spPr>
@@ -5573,7 +5741,7 @@
           </a:prstGeom>
         </p:spPr>
         <p:txBody>
-          <a:bodyPr anchorCtr="0" anchor="ctr" bIns="91425" lIns="91425" spcFirstLastPara="1" rIns="91425" wrap="square" tIns="91425">
+          <a:bodyPr spcFirstLastPara="1" wrap="square" lIns="91425" tIns="91425" rIns="91425" bIns="91425" anchor="ctr" anchorCtr="0">
             <a:normAutofit/>
           </a:bodyPr>
           <a:lstStyle>
@@ -5615,7 +5783,7 @@
             </a:lvl9pPr>
           </a:lstStyle>
           <a:p>
-            <a:pPr indent="0" lvl="0" marL="0" rtl="0" algn="r">
+            <a:pPr marL="0" lvl="0" indent="0" algn="r" rtl="0">
               <a:spcBef>
                 <a:spcPts val="0"/>
               </a:spcBef>
@@ -5641,11 +5809,11 @@
 </file>
 
 <file path=ppt/slideLayouts/slideLayout9.xml><?xml version="1.0" encoding="utf-8"?>
-<p:sldLayout xmlns:a="http://schemas.openxmlformats.org/drawingml/2006/main" xmlns:r="http://schemas.openxmlformats.org/officeDocument/2006/relationships" xmlns:mc="http://schemas.openxmlformats.org/markup-compatibility/2006" xmlns:mv="urn:schemas-microsoft-com:mac:vml" xmlns:p="http://schemas.openxmlformats.org/presentationml/2006/main" xmlns:c="http://schemas.openxmlformats.org/drawingml/2006/chart" xmlns:dgm="http://schemas.openxmlformats.org/drawingml/2006/diagram" xmlns:o="urn:schemas-microsoft-com:office:office" xmlns:v="urn:schemas-microsoft-com:vml" xmlns:pvml="urn:schemas-microsoft-com:office:powerpoint" xmlns:com="http://schemas.openxmlformats.org/drawingml/2006/compatibility" xmlns:p14="http://schemas.microsoft.com/office/powerpoint/2010/main" xmlns:p15="http://schemas.microsoft.com/office/powerpoint/2012/main" xmlns:ahyp="http://schemas.microsoft.com/office/drawing/2018/hyperlinkcolor" matchingName="Caption">
+<p:sldLayout xmlns:a="http://schemas.openxmlformats.org/drawingml/2006/main" xmlns:r="http://schemas.openxmlformats.org/officeDocument/2006/relationships" xmlns:p="http://schemas.openxmlformats.org/presentationml/2006/main" matchingName="Caption">
   <p:cSld name="CAPTION_ONLY">
     <p:spTree>
       <p:nvGrpSpPr>
-        <p:cNvPr id="49" name="Shape 49"/>
+        <p:cNvPr id="1" name="Shape 49"/>
         <p:cNvGrpSpPr/>
         <p:nvPr/>
       </p:nvGrpSpPr>
@@ -5660,9 +5828,11 @@
       <p:sp>
         <p:nvSpPr>
           <p:cNvPr id="50" name="Google Shape;50;p10"/>
-          <p:cNvSpPr txBox="1"/>
+          <p:cNvSpPr txBox="1">
+            <a:spLocks noGrp="1"/>
+          </p:cNvSpPr>
           <p:nvPr>
-            <p:ph idx="1" type="body"/>
+            <p:ph type="body" idx="1"/>
           </p:nvPr>
         </p:nvSpPr>
         <p:spPr>
@@ -5675,11 +5845,11 @@
           </a:prstGeom>
         </p:spPr>
         <p:txBody>
-          <a:bodyPr anchorCtr="0" anchor="ctr" bIns="91425" lIns="91425" spcFirstLastPara="1" rIns="91425" wrap="square" tIns="91425">
+          <a:bodyPr spcFirstLastPara="1" wrap="square" lIns="91425" tIns="91425" rIns="91425" bIns="91425" anchor="ctr" anchorCtr="0">
             <a:normAutofit/>
           </a:bodyPr>
           <a:lstStyle>
-            <a:lvl1pPr indent="-228600" lvl="0" marL="457200">
+            <a:lvl1pPr marL="457200" lvl="0" indent="-228600">
               <a:lnSpc>
                 <a:spcPct val="100000"/>
               </a:lnSpc>
@@ -5694,15 +5864,19 @@
               <a:defRPr/>
             </a:lvl1pPr>
           </a:lstStyle>
-          <a:p/>
+          <a:p>
+            <a:endParaRPr/>
+          </a:p>
         </p:txBody>
       </p:sp>
       <p:sp>
         <p:nvSpPr>
           <p:cNvPr id="51" name="Google Shape;51;p10"/>
-          <p:cNvSpPr txBox="1"/>
+          <p:cNvSpPr txBox="1">
+            <a:spLocks noGrp="1"/>
+          </p:cNvSpPr>
           <p:nvPr>
-            <p:ph idx="12" type="sldNum"/>
+            <p:ph type="sldNum" idx="12"/>
           </p:nvPr>
         </p:nvSpPr>
         <p:spPr>
@@ -5715,7 +5889,7 @@
           </a:prstGeom>
         </p:spPr>
         <p:txBody>
-          <a:bodyPr anchorCtr="0" anchor="ctr" bIns="91425" lIns="91425" spcFirstLastPara="1" rIns="91425" wrap="square" tIns="91425">
+          <a:bodyPr spcFirstLastPara="1" wrap="square" lIns="91425" tIns="91425" rIns="91425" bIns="91425" anchor="ctr" anchorCtr="0">
             <a:normAutofit/>
           </a:bodyPr>
           <a:lstStyle>
@@ -5757,7 +5931,7 @@
             </a:lvl9pPr>
           </a:lstStyle>
           <a:p>
-            <a:pPr indent="0" lvl="0" marL="0" rtl="0" algn="r">
+            <a:pPr marL="0" lvl="0" indent="0" algn="r" rtl="0">
               <a:spcBef>
                 <a:spcPts val="0"/>
               </a:spcBef>
@@ -5783,18 +5957,19 @@
 </file>
 
 <file path=ppt/slideMasters/slideMaster1.xml><?xml version="1.0" encoding="utf-8"?>
-<p:sldMaster xmlns:a="http://schemas.openxmlformats.org/drawingml/2006/main" xmlns:r="http://schemas.openxmlformats.org/officeDocument/2006/relationships" xmlns:mc="http://schemas.openxmlformats.org/markup-compatibility/2006" xmlns:mv="urn:schemas-microsoft-com:mac:vml" xmlns:p="http://schemas.openxmlformats.org/presentationml/2006/main" xmlns:c="http://schemas.openxmlformats.org/drawingml/2006/chart" xmlns:dgm="http://schemas.openxmlformats.org/drawingml/2006/diagram" xmlns:o="urn:schemas-microsoft-com:office:office" xmlns:v="urn:schemas-microsoft-com:vml" xmlns:pvml="urn:schemas-microsoft-com:office:powerpoint" xmlns:com="http://schemas.openxmlformats.org/drawingml/2006/compatibility" xmlns:p14="http://schemas.microsoft.com/office/powerpoint/2010/main" xmlns:p15="http://schemas.microsoft.com/office/powerpoint/2012/main" xmlns:ahyp="http://schemas.microsoft.com/office/drawing/2018/hyperlinkcolor">
+<p:sldMaster xmlns:a="http://schemas.openxmlformats.org/drawingml/2006/main" xmlns:r="http://schemas.openxmlformats.org/officeDocument/2006/relationships" xmlns:p="http://schemas.openxmlformats.org/presentationml/2006/main">
   <p:cSld name="simple-light-2">
     <p:bg>
       <p:bgPr>
         <a:solidFill>
           <a:schemeClr val="lt1"/>
         </a:solidFill>
+        <a:effectLst/>
       </p:bgPr>
     </p:bg>
     <p:spTree>
       <p:nvGrpSpPr>
-        <p:cNvPr id="5" name="Shape 5"/>
+        <p:cNvPr id="1" name="Shape 5"/>
         <p:cNvGrpSpPr/>
         <p:nvPr/>
       </p:nvGrpSpPr>
@@ -5809,7 +5984,9 @@
       <p:sp>
         <p:nvSpPr>
           <p:cNvPr id="6" name="Google Shape;6;p1"/>
-          <p:cNvSpPr txBox="1"/>
+          <p:cNvSpPr txBox="1">
+            <a:spLocks noGrp="1"/>
+          </p:cNvSpPr>
           <p:nvPr>
             <p:ph type="title"/>
           </p:nvPr>
@@ -5828,7 +6005,7 @@
           </a:ln>
         </p:spPr>
         <p:txBody>
-          <a:bodyPr anchorCtr="0" anchor="t" bIns="91425" lIns="91425" spcFirstLastPara="1" rIns="91425" wrap="square" tIns="91425">
+          <a:bodyPr spcFirstLastPara="1" wrap="square" lIns="91425" tIns="91425" rIns="91425" bIns="91425" anchor="t" anchorCtr="0">
             <a:normAutofit/>
           </a:bodyPr>
           <a:lstStyle>
@@ -5995,15 +6172,19 @@
               </a:defRPr>
             </a:lvl9pPr>
           </a:lstStyle>
-          <a:p/>
+          <a:p>
+            <a:endParaRPr/>
+          </a:p>
         </p:txBody>
       </p:sp>
       <p:sp>
         <p:nvSpPr>
           <p:cNvPr id="7" name="Google Shape;7;p1"/>
-          <p:cNvSpPr txBox="1"/>
+          <p:cNvSpPr txBox="1">
+            <a:spLocks noGrp="1"/>
+          </p:cNvSpPr>
           <p:nvPr>
-            <p:ph idx="1" type="body"/>
+            <p:ph type="body" idx="1"/>
           </p:nvPr>
         </p:nvSpPr>
         <p:spPr>
@@ -6020,11 +6201,11 @@
           </a:ln>
         </p:spPr>
         <p:txBody>
-          <a:bodyPr anchorCtr="0" anchor="t" bIns="91425" lIns="91425" spcFirstLastPara="1" rIns="91425" wrap="square" tIns="91425">
+          <a:bodyPr spcFirstLastPara="1" wrap="square" lIns="91425" tIns="91425" rIns="91425" bIns="91425" anchor="t" anchorCtr="0">
             <a:normAutofit/>
           </a:bodyPr>
           <a:lstStyle>
-            <a:lvl1pPr indent="-342900" lvl="0" marL="457200">
+            <a:lvl1pPr marL="457200" lvl="0" indent="-342900">
               <a:lnSpc>
                 <a:spcPct val="115000"/>
               </a:lnSpc>
@@ -6045,7 +6226,7 @@
                 </a:solidFill>
               </a:defRPr>
             </a:lvl1pPr>
-            <a:lvl2pPr indent="-317500" lvl="1" marL="914400">
+            <a:lvl2pPr marL="914400" lvl="1" indent="-317500">
               <a:lnSpc>
                 <a:spcPct val="115000"/>
               </a:lnSpc>
@@ -6066,7 +6247,7 @@
                 </a:solidFill>
               </a:defRPr>
             </a:lvl2pPr>
-            <a:lvl3pPr indent="-317500" lvl="2" marL="1371600">
+            <a:lvl3pPr marL="1371600" lvl="2" indent="-317500">
               <a:lnSpc>
                 <a:spcPct val="115000"/>
               </a:lnSpc>
@@ -6087,7 +6268,7 @@
                 </a:solidFill>
               </a:defRPr>
             </a:lvl3pPr>
-            <a:lvl4pPr indent="-317500" lvl="3" marL="1828800">
+            <a:lvl4pPr marL="1828800" lvl="3" indent="-317500">
               <a:lnSpc>
                 <a:spcPct val="115000"/>
               </a:lnSpc>
@@ -6108,7 +6289,7 @@
                 </a:solidFill>
               </a:defRPr>
             </a:lvl4pPr>
-            <a:lvl5pPr indent="-317500" lvl="4" marL="2286000">
+            <a:lvl5pPr marL="2286000" lvl="4" indent="-317500">
               <a:lnSpc>
                 <a:spcPct val="115000"/>
               </a:lnSpc>
@@ -6129,7 +6310,7 @@
                 </a:solidFill>
               </a:defRPr>
             </a:lvl5pPr>
-            <a:lvl6pPr indent="-317500" lvl="5" marL="2743200">
+            <a:lvl6pPr marL="2743200" lvl="5" indent="-317500">
               <a:lnSpc>
                 <a:spcPct val="115000"/>
               </a:lnSpc>
@@ -6150,7 +6331,7 @@
                 </a:solidFill>
               </a:defRPr>
             </a:lvl6pPr>
-            <a:lvl7pPr indent="-317500" lvl="6" marL="3200400">
+            <a:lvl7pPr marL="3200400" lvl="6" indent="-317500">
               <a:lnSpc>
                 <a:spcPct val="115000"/>
               </a:lnSpc>
@@ -6171,7 +6352,7 @@
                 </a:solidFill>
               </a:defRPr>
             </a:lvl7pPr>
-            <a:lvl8pPr indent="-317500" lvl="7" marL="3657600">
+            <a:lvl8pPr marL="3657600" lvl="7" indent="-317500">
               <a:lnSpc>
                 <a:spcPct val="115000"/>
               </a:lnSpc>
@@ -6192,7 +6373,7 @@
                 </a:solidFill>
               </a:defRPr>
             </a:lvl8pPr>
-            <a:lvl9pPr indent="-317500" lvl="8" marL="4114800">
+            <a:lvl9pPr marL="4114800" lvl="8" indent="-317500">
               <a:lnSpc>
                 <a:spcPct val="115000"/>
               </a:lnSpc>
@@ -6214,15 +6395,19 @@
               </a:defRPr>
             </a:lvl9pPr>
           </a:lstStyle>
-          <a:p/>
+          <a:p>
+            <a:endParaRPr/>
+          </a:p>
         </p:txBody>
       </p:sp>
       <p:sp>
         <p:nvSpPr>
           <p:cNvPr id="8" name="Google Shape;8;p1"/>
-          <p:cNvSpPr txBox="1"/>
+          <p:cNvSpPr txBox="1">
+            <a:spLocks noGrp="1"/>
+          </p:cNvSpPr>
           <p:nvPr>
-            <p:ph idx="12" type="sldNum"/>
+            <p:ph type="sldNum" idx="12"/>
           </p:nvPr>
         </p:nvSpPr>
         <p:spPr>
@@ -6239,7 +6424,7 @@
           </a:ln>
         </p:spPr>
         <p:txBody>
-          <a:bodyPr anchorCtr="0" anchor="ctr" bIns="91425" lIns="91425" spcFirstLastPara="1" rIns="91425" wrap="square" tIns="91425">
+          <a:bodyPr spcFirstLastPara="1" wrap="square" lIns="91425" tIns="91425" rIns="91425" bIns="91425" anchor="ctr" anchorCtr="0">
             <a:normAutofit/>
           </a:bodyPr>
           <a:lstStyle>
@@ -6317,7 +6502,7 @@
             </a:lvl9pPr>
           </a:lstStyle>
           <a:p>
-            <a:pPr indent="0" lvl="0" marL="0" rtl="0" algn="r">
+            <a:pPr marL="0" lvl="0" indent="0" algn="r" rtl="0">
               <a:spcBef>
                 <a:spcPts val="0"/>
               </a:spcBef>
@@ -6341,7 +6526,7 @@
           <p:nvPr/>
         </p:nvPicPr>
         <p:blipFill>
-          <a:blip r:embed="rId1">
+          <a:blip r:embed="rId13">
             <a:alphaModFix/>
           </a:blip>
           <a:stretch>
@@ -6364,24 +6549,24 @@
       </p:pic>
     </p:spTree>
   </p:cSld>
-  <p:clrMap accent1="accent1" accent2="accent2" accent3="accent3" accent4="accent4" accent5="accent5" accent6="accent6" bg1="lt1" bg2="dk2" tx1="dk1" tx2="lt2" folHlink="folHlink" hlink="hlink"/>
+  <p:clrMap bg1="lt1" tx1="dk1" bg2="dk2" tx2="lt2" accent1="accent1" accent2="accent2" accent3="accent3" accent4="accent4" accent5="accent5" accent6="accent6" hlink="hlink" folHlink="folHlink"/>
   <p:sldLayoutIdLst>
-    <p:sldLayoutId id="2147483648" r:id="rId2"/>
-    <p:sldLayoutId id="2147483649" r:id="rId3"/>
-    <p:sldLayoutId id="2147483650" r:id="rId4"/>
-    <p:sldLayoutId id="2147483651" r:id="rId5"/>
-    <p:sldLayoutId id="2147483652" r:id="rId6"/>
-    <p:sldLayoutId id="2147483653" r:id="rId7"/>
-    <p:sldLayoutId id="2147483654" r:id="rId8"/>
-    <p:sldLayoutId id="2147483655" r:id="rId9"/>
-    <p:sldLayoutId id="2147483656" r:id="rId10"/>
-    <p:sldLayoutId id="2147483657" r:id="rId11"/>
-    <p:sldLayoutId id="2147483658" r:id="rId12"/>
+    <p:sldLayoutId id="2147483648" r:id="rId1"/>
+    <p:sldLayoutId id="2147483649" r:id="rId2"/>
+    <p:sldLayoutId id="2147483650" r:id="rId3"/>
+    <p:sldLayoutId id="2147483651" r:id="rId4"/>
+    <p:sldLayoutId id="2147483652" r:id="rId5"/>
+    <p:sldLayoutId id="2147483653" r:id="rId6"/>
+    <p:sldLayoutId id="2147483654" r:id="rId7"/>
+    <p:sldLayoutId id="2147483655" r:id="rId8"/>
+    <p:sldLayoutId id="2147483656" r:id="rId9"/>
+    <p:sldLayoutId id="2147483657" r:id="rId10"/>
+    <p:sldLayoutId id="2147483658" r:id="rId11"/>
   </p:sldLayoutIdLst>
-  <p:hf dt="0" ftr="0" hdr="0" sldNum="0"/>
+  <p:hf sldNum="0" hdr="0" ftr="0" dt="0"/>
   <p:txStyles>
     <p:titleStyle>
-      <a:defPPr lvl="0" marR="0" rtl="0" algn="l">
+      <a:defPPr marR="0" lvl="0" algn="l" rtl="0">
         <a:lnSpc>
           <a:spcPct val="100000"/>
         </a:lnSpc>
@@ -6392,7 +6577,7 @@
           <a:spcPts val="0"/>
         </a:spcAft>
       </a:defPPr>
-      <a:lvl1pPr lvl="0" marR="0" rtl="0" algn="l">
+      <a:lvl1pPr marR="0" lvl="0" algn="l" rtl="0">
         <a:lnSpc>
           <a:spcPct val="100000"/>
         </a:lnSpc>
@@ -6406,7 +6591,7 @@
           <a:srgbClr val="000000"/>
         </a:buClr>
         <a:buFont typeface="Arial"/>
-        <a:defRPr b="0" i="0" sz="1400" u="none" cap="none" strike="noStrike">
+        <a:defRPr sz="1400" b="0" i="0" u="none" strike="noStrike" cap="none">
           <a:solidFill>
             <a:srgbClr val="000000"/>
           </a:solidFill>
@@ -6416,7 +6601,7 @@
           <a:sym typeface="Arial"/>
         </a:defRPr>
       </a:lvl1pPr>
-      <a:lvl2pPr lvl="1" marR="0" rtl="0" algn="l">
+      <a:lvl2pPr marR="0" lvl="1" algn="l" rtl="0">
         <a:lnSpc>
           <a:spcPct val="100000"/>
         </a:lnSpc>
@@ -6430,7 +6615,7 @@
           <a:srgbClr val="000000"/>
         </a:buClr>
         <a:buFont typeface="Arial"/>
-        <a:defRPr b="0" i="0" sz="1400" u="none" cap="none" strike="noStrike">
+        <a:defRPr sz="1400" b="0" i="0" u="none" strike="noStrike" cap="none">
           <a:solidFill>
             <a:srgbClr val="000000"/>
           </a:solidFill>
@@ -6440,7 +6625,7 @@
           <a:sym typeface="Arial"/>
         </a:defRPr>
       </a:lvl2pPr>
-      <a:lvl3pPr lvl="2" marR="0" rtl="0" algn="l">
+      <a:lvl3pPr marR="0" lvl="2" algn="l" rtl="0">
         <a:lnSpc>
           <a:spcPct val="100000"/>
         </a:lnSpc>
@@ -6454,7 +6639,7 @@
           <a:srgbClr val="000000"/>
         </a:buClr>
         <a:buFont typeface="Arial"/>
-        <a:defRPr b="0" i="0" sz="1400" u="none" cap="none" strike="noStrike">
+        <a:defRPr sz="1400" b="0" i="0" u="none" strike="noStrike" cap="none">
           <a:solidFill>
             <a:srgbClr val="000000"/>
           </a:solidFill>
@@ -6464,7 +6649,7 @@
           <a:sym typeface="Arial"/>
         </a:defRPr>
       </a:lvl3pPr>
-      <a:lvl4pPr lvl="3" marR="0" rtl="0" algn="l">
+      <a:lvl4pPr marR="0" lvl="3" algn="l" rtl="0">
         <a:lnSpc>
           <a:spcPct val="100000"/>
         </a:lnSpc>
@@ -6478,7 +6663,7 @@
           <a:srgbClr val="000000"/>
         </a:buClr>
         <a:buFont typeface="Arial"/>
-        <a:defRPr b="0" i="0" sz="1400" u="none" cap="none" strike="noStrike">
+        <a:defRPr sz="1400" b="0" i="0" u="none" strike="noStrike" cap="none">
           <a:solidFill>
             <a:srgbClr val="000000"/>
           </a:solidFill>
@@ -6488,7 +6673,7 @@
           <a:sym typeface="Arial"/>
         </a:defRPr>
       </a:lvl4pPr>
-      <a:lvl5pPr lvl="4" marR="0" rtl="0" algn="l">
+      <a:lvl5pPr marR="0" lvl="4" algn="l" rtl="0">
         <a:lnSpc>
           <a:spcPct val="100000"/>
         </a:lnSpc>
@@ -6502,7 +6687,7 @@
           <a:srgbClr val="000000"/>
         </a:buClr>
         <a:buFont typeface="Arial"/>
-        <a:defRPr b="0" i="0" sz="1400" u="none" cap="none" strike="noStrike">
+        <a:defRPr sz="1400" b="0" i="0" u="none" strike="noStrike" cap="none">
           <a:solidFill>
             <a:srgbClr val="000000"/>
           </a:solidFill>
@@ -6512,7 +6697,7 @@
           <a:sym typeface="Arial"/>
         </a:defRPr>
       </a:lvl5pPr>
-      <a:lvl6pPr lvl="5" marR="0" rtl="0" algn="l">
+      <a:lvl6pPr marR="0" lvl="5" algn="l" rtl="0">
         <a:lnSpc>
           <a:spcPct val="100000"/>
         </a:lnSpc>
@@ -6526,7 +6711,7 @@
           <a:srgbClr val="000000"/>
         </a:buClr>
         <a:buFont typeface="Arial"/>
-        <a:defRPr b="0" i="0" sz="1400" u="none" cap="none" strike="noStrike">
+        <a:defRPr sz="1400" b="0" i="0" u="none" strike="noStrike" cap="none">
           <a:solidFill>
             <a:srgbClr val="000000"/>
           </a:solidFill>
@@ -6536,7 +6721,7 @@
           <a:sym typeface="Arial"/>
         </a:defRPr>
       </a:lvl6pPr>
-      <a:lvl7pPr lvl="6" marR="0" rtl="0" algn="l">
+      <a:lvl7pPr marR="0" lvl="6" algn="l" rtl="0">
         <a:lnSpc>
           <a:spcPct val="100000"/>
         </a:lnSpc>
@@ -6550,7 +6735,7 @@
           <a:srgbClr val="000000"/>
         </a:buClr>
         <a:buFont typeface="Arial"/>
-        <a:defRPr b="0" i="0" sz="1400" u="none" cap="none" strike="noStrike">
+        <a:defRPr sz="1400" b="0" i="0" u="none" strike="noStrike" cap="none">
           <a:solidFill>
             <a:srgbClr val="000000"/>
           </a:solidFill>
@@ -6560,7 +6745,7 @@
           <a:sym typeface="Arial"/>
         </a:defRPr>
       </a:lvl7pPr>
-      <a:lvl8pPr lvl="7" marR="0" rtl="0" algn="l">
+      <a:lvl8pPr marR="0" lvl="7" algn="l" rtl="0">
         <a:lnSpc>
           <a:spcPct val="100000"/>
         </a:lnSpc>
@@ -6574,7 +6759,7 @@
           <a:srgbClr val="000000"/>
         </a:buClr>
         <a:buFont typeface="Arial"/>
-        <a:defRPr b="0" i="0" sz="1400" u="none" cap="none" strike="noStrike">
+        <a:defRPr sz="1400" b="0" i="0" u="none" strike="noStrike" cap="none">
           <a:solidFill>
             <a:srgbClr val="000000"/>
           </a:solidFill>
@@ -6584,7 +6769,7 @@
           <a:sym typeface="Arial"/>
         </a:defRPr>
       </a:lvl8pPr>
-      <a:lvl9pPr lvl="8" marR="0" rtl="0" algn="l">
+      <a:lvl9pPr marR="0" lvl="8" algn="l" rtl="0">
         <a:lnSpc>
           <a:spcPct val="100000"/>
         </a:lnSpc>
@@ -6598,7 +6783,7 @@
           <a:srgbClr val="000000"/>
         </a:buClr>
         <a:buFont typeface="Arial"/>
-        <a:defRPr b="0" i="0" sz="1400" u="none" cap="none" strike="noStrike">
+        <a:defRPr sz="1400" b="0" i="0" u="none" strike="noStrike" cap="none">
           <a:solidFill>
             <a:srgbClr val="000000"/>
           </a:solidFill>
@@ -6610,7 +6795,7 @@
       </a:lvl9pPr>
     </p:titleStyle>
     <p:bodyStyle>
-      <a:defPPr lvl="0" marR="0" rtl="0" algn="l">
+      <a:defPPr marR="0" lvl="0" algn="l" rtl="0">
         <a:lnSpc>
           <a:spcPct val="100000"/>
         </a:lnSpc>
@@ -6621,7 +6806,7 @@
           <a:spcPts val="0"/>
         </a:spcAft>
       </a:defPPr>
-      <a:lvl1pPr lvl="0" marR="0" rtl="0" algn="l">
+      <a:lvl1pPr marR="0" lvl="0" algn="l" rtl="0">
         <a:lnSpc>
           <a:spcPct val="100000"/>
         </a:lnSpc>
@@ -6635,7 +6820,7 @@
           <a:srgbClr val="000000"/>
         </a:buClr>
         <a:buFont typeface="Arial"/>
-        <a:defRPr b="0" i="0" sz="1400" u="none" cap="none" strike="noStrike">
+        <a:defRPr sz="1400" b="0" i="0" u="none" strike="noStrike" cap="none">
           <a:solidFill>
             <a:srgbClr val="000000"/>
           </a:solidFill>
@@ -6645,7 +6830,7 @@
           <a:sym typeface="Arial"/>
         </a:defRPr>
       </a:lvl1pPr>
-      <a:lvl2pPr lvl="1" marR="0" rtl="0" algn="l">
+      <a:lvl2pPr marR="0" lvl="1" algn="l" rtl="0">
         <a:lnSpc>
           <a:spcPct val="100000"/>
         </a:lnSpc>
@@ -6659,7 +6844,7 @@
           <a:srgbClr val="000000"/>
         </a:buClr>
         <a:buFont typeface="Arial"/>
-        <a:defRPr b="0" i="0" sz="1400" u="none" cap="none" strike="noStrike">
+        <a:defRPr sz="1400" b="0" i="0" u="none" strike="noStrike" cap="none">
           <a:solidFill>
             <a:srgbClr val="000000"/>
           </a:solidFill>
@@ -6669,7 +6854,7 @@
           <a:sym typeface="Arial"/>
         </a:defRPr>
       </a:lvl2pPr>
-      <a:lvl3pPr lvl="2" marR="0" rtl="0" algn="l">
+      <a:lvl3pPr marR="0" lvl="2" algn="l" rtl="0">
         <a:lnSpc>
           <a:spcPct val="100000"/>
         </a:lnSpc>
@@ -6683,7 +6868,7 @@
           <a:srgbClr val="000000"/>
         </a:buClr>
         <a:buFont typeface="Arial"/>
-        <a:defRPr b="0" i="0" sz="1400" u="none" cap="none" strike="noStrike">
+        <a:defRPr sz="1400" b="0" i="0" u="none" strike="noStrike" cap="none">
           <a:solidFill>
             <a:srgbClr val="000000"/>
           </a:solidFill>
@@ -6693,7 +6878,7 @@
           <a:sym typeface="Arial"/>
         </a:defRPr>
       </a:lvl3pPr>
-      <a:lvl4pPr lvl="3" marR="0" rtl="0" algn="l">
+      <a:lvl4pPr marR="0" lvl="3" algn="l" rtl="0">
         <a:lnSpc>
           <a:spcPct val="100000"/>
         </a:lnSpc>
@@ -6707,7 +6892,7 @@
           <a:srgbClr val="000000"/>
         </a:buClr>
         <a:buFont typeface="Arial"/>
-        <a:defRPr b="0" i="0" sz="1400" u="none" cap="none" strike="noStrike">
+        <a:defRPr sz="1400" b="0" i="0" u="none" strike="noStrike" cap="none">
           <a:solidFill>
             <a:srgbClr val="000000"/>
           </a:solidFill>
@@ -6717,7 +6902,7 @@
           <a:sym typeface="Arial"/>
         </a:defRPr>
       </a:lvl4pPr>
-      <a:lvl5pPr lvl="4" marR="0" rtl="0" algn="l">
+      <a:lvl5pPr marR="0" lvl="4" algn="l" rtl="0">
         <a:lnSpc>
           <a:spcPct val="100000"/>
         </a:lnSpc>
@@ -6731,7 +6916,7 @@
           <a:srgbClr val="000000"/>
         </a:buClr>
         <a:buFont typeface="Arial"/>
-        <a:defRPr b="0" i="0" sz="1400" u="none" cap="none" strike="noStrike">
+        <a:defRPr sz="1400" b="0" i="0" u="none" strike="noStrike" cap="none">
           <a:solidFill>
             <a:srgbClr val="000000"/>
           </a:solidFill>
@@ -6741,7 +6926,7 @@
           <a:sym typeface="Arial"/>
         </a:defRPr>
       </a:lvl5pPr>
-      <a:lvl6pPr lvl="5" marR="0" rtl="0" algn="l">
+      <a:lvl6pPr marR="0" lvl="5" algn="l" rtl="0">
         <a:lnSpc>
           <a:spcPct val="100000"/>
         </a:lnSpc>
@@ -6755,7 +6940,7 @@
           <a:srgbClr val="000000"/>
         </a:buClr>
         <a:buFont typeface="Arial"/>
-        <a:defRPr b="0" i="0" sz="1400" u="none" cap="none" strike="noStrike">
+        <a:defRPr sz="1400" b="0" i="0" u="none" strike="noStrike" cap="none">
           <a:solidFill>
             <a:srgbClr val="000000"/>
           </a:solidFill>
@@ -6765,7 +6950,7 @@
           <a:sym typeface="Arial"/>
         </a:defRPr>
       </a:lvl6pPr>
-      <a:lvl7pPr lvl="6" marR="0" rtl="0" algn="l">
+      <a:lvl7pPr marR="0" lvl="6" algn="l" rtl="0">
         <a:lnSpc>
           <a:spcPct val="100000"/>
         </a:lnSpc>
@@ -6779,7 +6964,7 @@
           <a:srgbClr val="000000"/>
         </a:buClr>
         <a:buFont typeface="Arial"/>
-        <a:defRPr b="0" i="0" sz="1400" u="none" cap="none" strike="noStrike">
+        <a:defRPr sz="1400" b="0" i="0" u="none" strike="noStrike" cap="none">
           <a:solidFill>
             <a:srgbClr val="000000"/>
           </a:solidFill>
@@ -6789,7 +6974,7 @@
           <a:sym typeface="Arial"/>
         </a:defRPr>
       </a:lvl7pPr>
-      <a:lvl8pPr lvl="7" marR="0" rtl="0" algn="l">
+      <a:lvl8pPr marR="0" lvl="7" algn="l" rtl="0">
         <a:lnSpc>
           <a:spcPct val="100000"/>
         </a:lnSpc>
@@ -6803,7 +6988,7 @@
           <a:srgbClr val="000000"/>
         </a:buClr>
         <a:buFont typeface="Arial"/>
-        <a:defRPr b="0" i="0" sz="1400" u="none" cap="none" strike="noStrike">
+        <a:defRPr sz="1400" b="0" i="0" u="none" strike="noStrike" cap="none">
           <a:solidFill>
             <a:srgbClr val="000000"/>
           </a:solidFill>
@@ -6813,7 +6998,7 @@
           <a:sym typeface="Arial"/>
         </a:defRPr>
       </a:lvl8pPr>
-      <a:lvl9pPr lvl="8" marR="0" rtl="0" algn="l">
+      <a:lvl9pPr marR="0" lvl="8" algn="l" rtl="0">
         <a:lnSpc>
           <a:spcPct val="100000"/>
         </a:lnSpc>
@@ -6827,7 +7012,7 @@
           <a:srgbClr val="000000"/>
         </a:buClr>
         <a:buFont typeface="Arial"/>
-        <a:defRPr b="0" i="0" sz="1400" u="none" cap="none" strike="noStrike">
+        <a:defRPr sz="1400" b="0" i="0" u="none" strike="noStrike" cap="none">
           <a:solidFill>
             <a:srgbClr val="000000"/>
           </a:solidFill>
@@ -6839,7 +7024,7 @@
       </a:lvl9pPr>
     </p:bodyStyle>
     <p:otherStyle>
-      <a:defPPr lvl="0" marR="0" rtl="0" algn="l">
+      <a:defPPr marR="0" lvl="0" algn="l" rtl="0">
         <a:lnSpc>
           <a:spcPct val="100000"/>
         </a:lnSpc>
@@ -6850,7 +7035,7 @@
           <a:spcPts val="0"/>
         </a:spcAft>
       </a:defPPr>
-      <a:lvl1pPr lvl="0" marR="0" rtl="0" algn="l">
+      <a:lvl1pPr marR="0" lvl="0" algn="l" rtl="0">
         <a:lnSpc>
           <a:spcPct val="100000"/>
         </a:lnSpc>
@@ -6864,7 +7049,7 @@
           <a:srgbClr val="000000"/>
         </a:buClr>
         <a:buFont typeface="Arial"/>
-        <a:defRPr b="0" i="0" sz="1400" u="none" cap="none" strike="noStrike">
+        <a:defRPr sz="1400" b="0" i="0" u="none" strike="noStrike" cap="none">
           <a:solidFill>
             <a:srgbClr val="000000"/>
           </a:solidFill>
@@ -6874,7 +7059,7 @@
           <a:sym typeface="Arial"/>
         </a:defRPr>
       </a:lvl1pPr>
-      <a:lvl2pPr lvl="1" marR="0" rtl="0" algn="l">
+      <a:lvl2pPr marR="0" lvl="1" algn="l" rtl="0">
         <a:lnSpc>
           <a:spcPct val="100000"/>
         </a:lnSpc>
@@ -6888,7 +7073,7 @@
           <a:srgbClr val="000000"/>
         </a:buClr>
         <a:buFont typeface="Arial"/>
-        <a:defRPr b="0" i="0" sz="1400" u="none" cap="none" strike="noStrike">
+        <a:defRPr sz="1400" b="0" i="0" u="none" strike="noStrike" cap="none">
           <a:solidFill>
             <a:srgbClr val="000000"/>
           </a:solidFill>
@@ -6898,7 +7083,7 @@
           <a:sym typeface="Arial"/>
         </a:defRPr>
       </a:lvl2pPr>
-      <a:lvl3pPr lvl="2" marR="0" rtl="0" algn="l">
+      <a:lvl3pPr marR="0" lvl="2" algn="l" rtl="0">
         <a:lnSpc>
           <a:spcPct val="100000"/>
         </a:lnSpc>
@@ -6912,7 +7097,7 @@
           <a:srgbClr val="000000"/>
         </a:buClr>
         <a:buFont typeface="Arial"/>
-        <a:defRPr b="0" i="0" sz="1400" u="none" cap="none" strike="noStrike">
+        <a:defRPr sz="1400" b="0" i="0" u="none" strike="noStrike" cap="none">
           <a:solidFill>
             <a:srgbClr val="000000"/>
           </a:solidFill>
@@ -6922,7 +7107,7 @@
           <a:sym typeface="Arial"/>
         </a:defRPr>
       </a:lvl3pPr>
-      <a:lvl4pPr lvl="3" marR="0" rtl="0" algn="l">
+      <a:lvl4pPr marR="0" lvl="3" algn="l" rtl="0">
         <a:lnSpc>
           <a:spcPct val="100000"/>
         </a:lnSpc>
@@ -6936,7 +7121,7 @@
           <a:srgbClr val="000000"/>
         </a:buClr>
         <a:buFont typeface="Arial"/>
-        <a:defRPr b="0" i="0" sz="1400" u="none" cap="none" strike="noStrike">
+        <a:defRPr sz="1400" b="0" i="0" u="none" strike="noStrike" cap="none">
           <a:solidFill>
             <a:srgbClr val="000000"/>
           </a:solidFill>
@@ -6946,7 +7131,7 @@
           <a:sym typeface="Arial"/>
         </a:defRPr>
       </a:lvl4pPr>
-      <a:lvl5pPr lvl="4" marR="0" rtl="0" algn="l">
+      <a:lvl5pPr marR="0" lvl="4" algn="l" rtl="0">
         <a:lnSpc>
           <a:spcPct val="100000"/>
         </a:lnSpc>
@@ -6960,7 +7145,7 @@
           <a:srgbClr val="000000"/>
         </a:buClr>
         <a:buFont typeface="Arial"/>
-        <a:defRPr b="0" i="0" sz="1400" u="none" cap="none" strike="noStrike">
+        <a:defRPr sz="1400" b="0" i="0" u="none" strike="noStrike" cap="none">
           <a:solidFill>
             <a:srgbClr val="000000"/>
           </a:solidFill>
@@ -6970,7 +7155,7 @@
           <a:sym typeface="Arial"/>
         </a:defRPr>
       </a:lvl5pPr>
-      <a:lvl6pPr lvl="5" marR="0" rtl="0" algn="l">
+      <a:lvl6pPr marR="0" lvl="5" algn="l" rtl="0">
         <a:lnSpc>
           <a:spcPct val="100000"/>
         </a:lnSpc>
@@ -6984,7 +7169,7 @@
           <a:srgbClr val="000000"/>
         </a:buClr>
         <a:buFont typeface="Arial"/>
-        <a:defRPr b="0" i="0" sz="1400" u="none" cap="none" strike="noStrike">
+        <a:defRPr sz="1400" b="0" i="0" u="none" strike="noStrike" cap="none">
           <a:solidFill>
             <a:srgbClr val="000000"/>
           </a:solidFill>
@@ -6994,7 +7179,7 @@
           <a:sym typeface="Arial"/>
         </a:defRPr>
       </a:lvl6pPr>
-      <a:lvl7pPr lvl="6" marR="0" rtl="0" algn="l">
+      <a:lvl7pPr marR="0" lvl="6" algn="l" rtl="0">
         <a:lnSpc>
           <a:spcPct val="100000"/>
         </a:lnSpc>
@@ -7008,7 +7193,7 @@
           <a:srgbClr val="000000"/>
         </a:buClr>
         <a:buFont typeface="Arial"/>
-        <a:defRPr b="0" i="0" sz="1400" u="none" cap="none" strike="noStrike">
+        <a:defRPr sz="1400" b="0" i="0" u="none" strike="noStrike" cap="none">
           <a:solidFill>
             <a:srgbClr val="000000"/>
           </a:solidFill>
@@ -7018,7 +7203,7 @@
           <a:sym typeface="Arial"/>
         </a:defRPr>
       </a:lvl7pPr>
-      <a:lvl8pPr lvl="7" marR="0" rtl="0" algn="l">
+      <a:lvl8pPr marR="0" lvl="7" algn="l" rtl="0">
         <a:lnSpc>
           <a:spcPct val="100000"/>
         </a:lnSpc>
@@ -7032,7 +7217,7 @@
           <a:srgbClr val="000000"/>
         </a:buClr>
         <a:buFont typeface="Arial"/>
-        <a:defRPr b="0" i="0" sz="1400" u="none" cap="none" strike="noStrike">
+        <a:defRPr sz="1400" b="0" i="0" u="none" strike="noStrike" cap="none">
           <a:solidFill>
             <a:srgbClr val="000000"/>
           </a:solidFill>
@@ -7042,7 +7227,7 @@
           <a:sym typeface="Arial"/>
         </a:defRPr>
       </a:lvl8pPr>
-      <a:lvl9pPr lvl="8" marR="0" rtl="0" algn="l">
+      <a:lvl9pPr marR="0" lvl="8" algn="l" rtl="0">
         <a:lnSpc>
           <a:spcPct val="100000"/>
         </a:lnSpc>
@@ -7056,7 +7241,7 @@
           <a:srgbClr val="000000"/>
         </a:buClr>
         <a:buFont typeface="Arial"/>
-        <a:defRPr b="0" i="0" sz="1400" u="none" cap="none" strike="noStrike">
+        <a:defRPr sz="1400" b="0" i="0" u="none" strike="noStrike" cap="none">
           <a:solidFill>
             <a:srgbClr val="000000"/>
           </a:solidFill>
@@ -7072,11 +7257,11 @@
 </file>
 
 <file path=ppt/slides/slide1.xml><?xml version="1.0" encoding="utf-8"?>
-<p:sld xmlns:a="http://schemas.openxmlformats.org/drawingml/2006/main" xmlns:r="http://schemas.openxmlformats.org/officeDocument/2006/relationships" xmlns:mc="http://schemas.openxmlformats.org/markup-compatibility/2006" xmlns:mv="urn:schemas-microsoft-com:mac:vml" xmlns:p="http://schemas.openxmlformats.org/presentationml/2006/main" xmlns:c="http://schemas.openxmlformats.org/drawingml/2006/chart" xmlns:dgm="http://schemas.openxmlformats.org/drawingml/2006/diagram" xmlns:o="urn:schemas-microsoft-com:office:office" xmlns:v="urn:schemas-microsoft-com:vml" xmlns:pvml="urn:schemas-microsoft-com:office:powerpoint" xmlns:com="http://schemas.openxmlformats.org/drawingml/2006/compatibility" xmlns:p14="http://schemas.microsoft.com/office/powerpoint/2010/main" xmlns:p15="http://schemas.microsoft.com/office/powerpoint/2012/main" xmlns:ahyp="http://schemas.microsoft.com/office/drawing/2018/hyperlinkcolor">
+<p:sld xmlns:a="http://schemas.openxmlformats.org/drawingml/2006/main" xmlns:r="http://schemas.openxmlformats.org/officeDocument/2006/relationships" xmlns:p="http://schemas.openxmlformats.org/presentationml/2006/main">
   <p:cSld>
     <p:spTree>
       <p:nvGrpSpPr>
-        <p:cNvPr id="61" name="Shape 61"/>
+        <p:cNvPr id="1" name="Shape 61"/>
         <p:cNvGrpSpPr/>
         <p:nvPr/>
       </p:nvGrpSpPr>
@@ -7091,7 +7276,9 @@
       <p:sp>
         <p:nvSpPr>
           <p:cNvPr id="62" name="Google Shape;62;p13"/>
-          <p:cNvSpPr txBox="1"/>
+          <p:cNvSpPr txBox="1">
+            <a:spLocks noGrp="1"/>
+          </p:cNvSpPr>
           <p:nvPr>
             <p:ph type="ctrTitle"/>
           </p:nvPr>
@@ -7106,12 +7293,12 @@
           </a:prstGeom>
         </p:spPr>
         <p:txBody>
-          <a:bodyPr anchorCtr="0" anchor="b" bIns="91425" lIns="91425" spcFirstLastPara="1" rIns="91425" wrap="square" tIns="91425">
+          <a:bodyPr spcFirstLastPara="1" wrap="square" lIns="91425" tIns="91425" rIns="91425" bIns="91425" anchor="b" anchorCtr="0">
             <a:normAutofit/>
           </a:bodyPr>
           <a:lstStyle/>
           <a:p>
-            <a:pPr indent="0" lvl="0" marL="0" rtl="0" algn="ctr">
+            <a:pPr marL="0" lvl="0" indent="0" algn="ctr" rtl="0">
               <a:spcBef>
                 <a:spcPts val="0"/>
               </a:spcBef>
@@ -7131,9 +7318,11 @@
       <p:sp>
         <p:nvSpPr>
           <p:cNvPr id="63" name="Google Shape;63;p13"/>
-          <p:cNvSpPr txBox="1"/>
+          <p:cNvSpPr txBox="1">
+            <a:spLocks noGrp="1"/>
+          </p:cNvSpPr>
           <p:nvPr>
-            <p:ph idx="1" type="subTitle"/>
+            <p:ph type="subTitle" idx="1"/>
           </p:nvPr>
         </p:nvSpPr>
         <p:spPr>
@@ -7146,12 +7335,12 @@
           </a:prstGeom>
         </p:spPr>
         <p:txBody>
-          <a:bodyPr anchorCtr="0" anchor="t" bIns="91425" lIns="91425" spcFirstLastPara="1" rIns="91425" wrap="square" tIns="91425">
+          <a:bodyPr spcFirstLastPara="1" wrap="square" lIns="91425" tIns="91425" rIns="91425" bIns="91425" anchor="t" anchorCtr="0">
             <a:normAutofit/>
           </a:bodyPr>
           <a:lstStyle/>
           <a:p>
-            <a:pPr indent="0" lvl="0" marL="0" rtl="0" algn="ctr">
+            <a:pPr marL="0" lvl="0" indent="0" algn="ctr" rtl="0">
               <a:spcBef>
                 <a:spcPts val="0"/>
               </a:spcBef>
@@ -7171,9 +7360,11 @@
       <p:sp>
         <p:nvSpPr>
           <p:cNvPr id="64" name="Google Shape;64;p13"/>
-          <p:cNvSpPr txBox="1"/>
+          <p:cNvSpPr txBox="1">
+            <a:spLocks noGrp="1"/>
+          </p:cNvSpPr>
           <p:nvPr>
-            <p:ph idx="2" type="subTitle"/>
+            <p:ph type="subTitle" idx="2"/>
           </p:nvPr>
         </p:nvSpPr>
         <p:spPr>
@@ -7186,12 +7377,12 @@
           </a:prstGeom>
         </p:spPr>
         <p:txBody>
-          <a:bodyPr anchorCtr="0" anchor="t" bIns="91425" lIns="91425" spcFirstLastPara="1" rIns="91425" wrap="square" tIns="91425">
+          <a:bodyPr spcFirstLastPara="1" wrap="square" lIns="91425" tIns="91425" rIns="91425" bIns="91425" anchor="t" anchorCtr="0">
             <a:normAutofit fontScale="77500" lnSpcReduction="20000"/>
           </a:bodyPr>
           <a:lstStyle/>
           <a:p>
-            <a:pPr indent="0" lvl="0" marL="0" rtl="0" algn="ctr">
+            <a:pPr marL="0" lvl="0" indent="0" algn="ctr" rtl="0">
               <a:spcBef>
                 <a:spcPts val="0"/>
               </a:spcBef>
@@ -7206,13 +7397,13 @@
               <a:buNone/>
             </a:pPr>
             <a:r>
-              <a:rPr lang="en"/>
-              <a:t>Melissa Winstanley</a:t>
+              <a:rPr lang="en-US" dirty="0"/>
+              <a:t>Naomi Alterman</a:t>
             </a:r>
-            <a:endParaRPr/>
-          </a:p>
-          <a:p>
-            <a:pPr indent="0" lvl="0" marL="0" rtl="0" algn="ctr">
+            <a:endParaRPr dirty="0"/>
+          </a:p>
+          <a:p>
+            <a:pPr marL="0" lvl="0" indent="0" algn="ctr" rtl="0">
               <a:spcBef>
                 <a:spcPts val="0"/>
               </a:spcBef>
@@ -7227,13 +7418,13 @@
               <a:buNone/>
             </a:pPr>
             <a:r>
-              <a:rPr lang="en"/>
+              <a:rPr lang="en" dirty="0"/>
               <a:t>University of Washington</a:t>
             </a:r>
-            <a:endParaRPr/>
-          </a:p>
-          <a:p>
-            <a:pPr indent="0" lvl="0" marL="0" rtl="0" algn="ctr">
+            <a:endParaRPr dirty="0"/>
+          </a:p>
+          <a:p>
+            <a:pPr marL="0" lvl="0" indent="0" algn="ctr" rtl="0">
               <a:spcBef>
                 <a:spcPts val="0"/>
               </a:spcBef>
@@ -7248,10 +7439,10 @@
               <a:buNone/>
             </a:pPr>
             <a:r>
-              <a:rPr lang="en"/>
-              <a:t>March 6, 2025</a:t>
+              <a:rPr lang="en" dirty="0"/>
+              <a:t>March 3, 2026</a:t>
             </a:r>
-            <a:endParaRPr/>
+            <a:endParaRPr dirty="0"/>
           </a:p>
         </p:txBody>
       </p:sp>
@@ -7264,11 +7455,11 @@
 </file>
 
 <file path=ppt/slides/slide10.xml><?xml version="1.0" encoding="utf-8"?>
-<p:sld xmlns:a="http://schemas.openxmlformats.org/drawingml/2006/main" xmlns:r="http://schemas.openxmlformats.org/officeDocument/2006/relationships" xmlns:mc="http://schemas.openxmlformats.org/markup-compatibility/2006" xmlns:mv="urn:schemas-microsoft-com:mac:vml" xmlns:p="http://schemas.openxmlformats.org/presentationml/2006/main" xmlns:c="http://schemas.openxmlformats.org/drawingml/2006/chart" xmlns:dgm="http://schemas.openxmlformats.org/drawingml/2006/diagram" xmlns:o="urn:schemas-microsoft-com:office:office" xmlns:v="urn:schemas-microsoft-com:vml" xmlns:pvml="urn:schemas-microsoft-com:office:powerpoint" xmlns:com="http://schemas.openxmlformats.org/drawingml/2006/compatibility" xmlns:p14="http://schemas.microsoft.com/office/powerpoint/2010/main" xmlns:p15="http://schemas.microsoft.com/office/powerpoint/2012/main" xmlns:ahyp="http://schemas.microsoft.com/office/drawing/2018/hyperlinkcolor">
+<p:sld xmlns:a="http://schemas.openxmlformats.org/drawingml/2006/main" xmlns:r="http://schemas.openxmlformats.org/officeDocument/2006/relationships" xmlns:p="http://schemas.openxmlformats.org/presentationml/2006/main">
   <p:cSld>
     <p:spTree>
       <p:nvGrpSpPr>
-        <p:cNvPr id="128" name="Shape 128"/>
+        <p:cNvPr id="1" name="Shape 128"/>
         <p:cNvGrpSpPr/>
         <p:nvPr/>
       </p:nvGrpSpPr>
@@ -7283,7 +7474,9 @@
       <p:sp>
         <p:nvSpPr>
           <p:cNvPr id="129" name="Google Shape;129;p22"/>
-          <p:cNvSpPr txBox="1"/>
+          <p:cNvSpPr txBox="1">
+            <a:spLocks noGrp="1"/>
+          </p:cNvSpPr>
           <p:nvPr>
             <p:ph type="title"/>
           </p:nvPr>
@@ -7298,12 +7491,12 @@
           </a:prstGeom>
         </p:spPr>
         <p:txBody>
-          <a:bodyPr anchorCtr="0" anchor="t" bIns="91425" lIns="91425" spcFirstLastPara="1" rIns="91425" wrap="square" tIns="91425">
+          <a:bodyPr spcFirstLastPara="1" wrap="square" lIns="91425" tIns="91425" rIns="91425" bIns="91425" anchor="t" anchorCtr="0">
             <a:normAutofit fontScale="90000"/>
           </a:bodyPr>
           <a:lstStyle/>
           <a:p>
-            <a:pPr indent="0" lvl="0" marL="0" rtl="0" algn="l">
+            <a:pPr marL="0" lvl="0" indent="0" algn="l" rtl="0">
               <a:spcBef>
                 <a:spcPts val="0"/>
               </a:spcBef>
@@ -7338,18 +7531,15 @@
             </a:endParaRPr>
           </a:p>
           <a:p>
-            <a:pPr indent="0" lvl="0" marL="0" rtl="0" algn="l">
-              <a:spcBef>
-                <a:spcPts val="0"/>
-              </a:spcBef>
-              <a:spcAft>
-                <a:spcPts val="0"/>
-              </a:spcAft>
-              <a:buNone/>
-            </a:pPr>
-            <a:r>
-              <a:t/>
-            </a:r>
+            <a:pPr marL="0" lvl="0" indent="0" algn="l" rtl="0">
+              <a:spcBef>
+                <a:spcPts val="0"/>
+              </a:spcBef>
+              <a:spcAft>
+                <a:spcPts val="0"/>
+              </a:spcAft>
+              <a:buNone/>
+            </a:pPr>
             <a:endParaRPr/>
           </a:p>
         </p:txBody>
@@ -7357,9 +7547,11 @@
       <p:sp>
         <p:nvSpPr>
           <p:cNvPr id="130" name="Google Shape;130;p22"/>
-          <p:cNvSpPr txBox="1"/>
+          <p:cNvSpPr txBox="1">
+            <a:spLocks noGrp="1"/>
+          </p:cNvSpPr>
           <p:nvPr>
-            <p:ph idx="1" type="body"/>
+            <p:ph type="body" idx="1"/>
           </p:nvPr>
         </p:nvSpPr>
         <p:spPr>
@@ -7372,14 +7564,26 @@
           </a:prstGeom>
         </p:spPr>
         <p:txBody>
-          <a:bodyPr anchorCtr="0" anchor="t" bIns="91425" lIns="91425" spcFirstLastPara="1" rIns="91425" wrap="square" tIns="91425">
+          <a:bodyPr spcFirstLastPara="1" wrap="square" lIns="91425" tIns="91425" rIns="91425" bIns="91425" anchor="t" anchorCtr="0">
             <a:normAutofit/>
           </a:bodyPr>
           <a:lstStyle/>
           <a:p>
-            <a:pPr indent="0" lvl="0" marL="0" rtl="0" algn="l">
-              <a:spcBef>
-                <a:spcPts val="0"/>
+            <a:pPr marL="0" lvl="0" indent="0" algn="l" rtl="0">
+              <a:spcBef>
+                <a:spcPts val="0"/>
+              </a:spcBef>
+              <a:spcAft>
+                <a:spcPts val="0"/>
+              </a:spcAft>
+              <a:buNone/>
+            </a:pPr>
+            <a:endParaRPr dirty="0"/>
+          </a:p>
+          <a:p>
+            <a:pPr marL="0" lvl="0" indent="0" algn="l" rtl="0">
+              <a:spcBef>
+                <a:spcPts val="1200"/>
               </a:spcBef>
               <a:spcAft>
                 <a:spcPts val="0"/>
@@ -7387,22 +7591,7 @@
               <a:buNone/>
             </a:pPr>
             <a:r>
-              <a:t/>
-            </a:r>
-            <a:endParaRPr/>
-          </a:p>
-          <a:p>
-            <a:pPr indent="0" lvl="0" marL="0" rtl="0" algn="l">
-              <a:spcBef>
-                <a:spcPts val="1200"/>
-              </a:spcBef>
-              <a:spcAft>
-                <a:spcPts val="0"/>
-              </a:spcAft>
-              <a:buNone/>
-            </a:pPr>
-            <a:r>
-              <a:rPr lang="en" u="sng">
+              <a:rPr lang="en" u="sng" dirty="0">
                 <a:solidFill>
                   <a:schemeClr val="hlink"/>
                 </a:solidFill>
@@ -7410,10 +7599,10 @@
               </a:rPr>
               <a:t>https://github.com/UWDATA515/ci_example/blob/main/pyproject.toml</a:t>
             </a:r>
-            <a:endParaRPr/>
-          </a:p>
-          <a:p>
-            <a:pPr indent="0" lvl="0" marL="0" rtl="0" algn="l">
+            <a:endParaRPr dirty="0"/>
+          </a:p>
+          <a:p>
+            <a:pPr marL="0" lvl="0" indent="0" algn="l" rtl="0">
               <a:spcBef>
                 <a:spcPts val="1200"/>
               </a:spcBef>
@@ -7422,10 +7611,7 @@
               </a:spcAft>
               <a:buNone/>
             </a:pPr>
-            <a:r>
-              <a:t/>
-            </a:r>
-            <a:endParaRPr/>
+            <a:endParaRPr dirty="0"/>
           </a:p>
         </p:txBody>
       </p:sp>
@@ -7438,11 +7624,11 @@
 </file>
 
 <file path=ppt/slides/slide11.xml><?xml version="1.0" encoding="utf-8"?>
-<p:sld xmlns:a="http://schemas.openxmlformats.org/drawingml/2006/main" xmlns:r="http://schemas.openxmlformats.org/officeDocument/2006/relationships" xmlns:mc="http://schemas.openxmlformats.org/markup-compatibility/2006" xmlns:mv="urn:schemas-microsoft-com:mac:vml" xmlns:p="http://schemas.openxmlformats.org/presentationml/2006/main" xmlns:c="http://schemas.openxmlformats.org/drawingml/2006/chart" xmlns:dgm="http://schemas.openxmlformats.org/drawingml/2006/diagram" xmlns:o="urn:schemas-microsoft-com:office:office" xmlns:v="urn:schemas-microsoft-com:vml" xmlns:pvml="urn:schemas-microsoft-com:office:powerpoint" xmlns:com="http://schemas.openxmlformats.org/drawingml/2006/compatibility" xmlns:p14="http://schemas.microsoft.com/office/powerpoint/2010/main" xmlns:p15="http://schemas.microsoft.com/office/powerpoint/2012/main" xmlns:ahyp="http://schemas.microsoft.com/office/drawing/2018/hyperlinkcolor">
+<p:sld xmlns:a="http://schemas.openxmlformats.org/drawingml/2006/main" xmlns:r="http://schemas.openxmlformats.org/officeDocument/2006/relationships" xmlns:p="http://schemas.openxmlformats.org/presentationml/2006/main">
   <p:cSld>
     <p:spTree>
       <p:nvGrpSpPr>
-        <p:cNvPr id="134" name="Shape 134"/>
+        <p:cNvPr id="1" name="Shape 134"/>
         <p:cNvGrpSpPr/>
         <p:nvPr/>
       </p:nvGrpSpPr>
@@ -7457,7 +7643,9 @@
       <p:sp>
         <p:nvSpPr>
           <p:cNvPr id="135" name="Google Shape;135;p23"/>
-          <p:cNvSpPr txBox="1"/>
+          <p:cNvSpPr txBox="1">
+            <a:spLocks noGrp="1"/>
+          </p:cNvSpPr>
           <p:nvPr>
             <p:ph type="title"/>
           </p:nvPr>
@@ -7472,12 +7660,12 @@
           </a:prstGeom>
         </p:spPr>
         <p:txBody>
-          <a:bodyPr anchorCtr="0" anchor="t" bIns="91425" lIns="91425" spcFirstLastPara="1" rIns="91425" wrap="square" tIns="91425">
+          <a:bodyPr spcFirstLastPara="1" wrap="square" lIns="91425" tIns="91425" rIns="91425" bIns="91425" anchor="t" anchorCtr="0">
             <a:normAutofit fontScale="90000"/>
           </a:bodyPr>
           <a:lstStyle/>
           <a:p>
-            <a:pPr indent="0" lvl="0" marL="0" rtl="0" algn="l">
+            <a:pPr marL="0" lvl="0" indent="0" algn="l" rtl="0">
               <a:spcBef>
                 <a:spcPts val="0"/>
               </a:spcBef>
@@ -7497,9 +7685,11 @@
       <p:sp>
         <p:nvSpPr>
           <p:cNvPr id="136" name="Google Shape;136;p23"/>
-          <p:cNvSpPr txBox="1"/>
+          <p:cNvSpPr txBox="1">
+            <a:spLocks noGrp="1"/>
+          </p:cNvSpPr>
           <p:nvPr>
-            <p:ph idx="1" type="body"/>
+            <p:ph type="body" idx="1"/>
           </p:nvPr>
         </p:nvSpPr>
         <p:spPr>
@@ -7512,12 +7702,12 @@
           </a:prstGeom>
         </p:spPr>
         <p:txBody>
-          <a:bodyPr anchorCtr="0" anchor="t" bIns="91425" lIns="91425" spcFirstLastPara="1" rIns="91425" wrap="square" tIns="91425">
+          <a:bodyPr spcFirstLastPara="1" wrap="square" lIns="91425" tIns="91425" rIns="91425" bIns="91425" anchor="t" anchorCtr="0">
             <a:normAutofit/>
           </a:bodyPr>
           <a:lstStyle/>
           <a:p>
-            <a:pPr indent="0" lvl="0" marL="0" rtl="0" algn="l">
+            <a:pPr marL="0" lvl="0" indent="0" algn="l" rtl="0">
               <a:spcBef>
                 <a:spcPts val="0"/>
               </a:spcBef>
@@ -7527,13 +7717,13 @@
               <a:buNone/>
             </a:pPr>
             <a:r>
-              <a:rPr lang="en"/>
+              <a:rPr lang="en" dirty="0"/>
               <a:t>Check out existing Python packages. These may be more complicated:</a:t>
             </a:r>
-            <a:endParaRPr/>
-          </a:p>
-          <a:p>
-            <a:pPr indent="0" lvl="0" marL="0" rtl="0" algn="l">
+            <a:endParaRPr dirty="0"/>
+          </a:p>
+          <a:p>
+            <a:pPr marL="0" lvl="0" indent="0" algn="l" rtl="0">
               <a:spcBef>
                 <a:spcPts val="1200"/>
               </a:spcBef>
@@ -7543,7 +7733,7 @@
               <a:buNone/>
             </a:pPr>
             <a:r>
-              <a:rPr lang="en" u="sng">
+              <a:rPr lang="en" u="sng" dirty="0">
                 <a:solidFill>
                   <a:schemeClr val="hlink"/>
                 </a:solidFill>
@@ -7551,10 +7741,10 @@
               </a:rPr>
               <a:t>https://github.com/numpy/numpy</a:t>
             </a:r>
-            <a:endParaRPr/>
-          </a:p>
-          <a:p>
-            <a:pPr indent="0" lvl="0" marL="0" rtl="0" algn="l">
+            <a:endParaRPr dirty="0"/>
+          </a:p>
+          <a:p>
+            <a:pPr marL="0" lvl="0" indent="0" algn="l" rtl="0">
               <a:spcBef>
                 <a:spcPts val="1200"/>
               </a:spcBef>
@@ -7564,7 +7754,7 @@
               <a:buNone/>
             </a:pPr>
             <a:r>
-              <a:rPr lang="en" u="sng">
+              <a:rPr lang="en" u="sng" dirty="0">
                 <a:solidFill>
                   <a:schemeClr val="hlink"/>
                 </a:solidFill>
@@ -7572,22 +7762,47 @@
               </a:rPr>
               <a:t>https://github.com/pandas-dev/pandas</a:t>
             </a:r>
-            <a:endParaRPr/>
-          </a:p>
-          <a:p>
-            <a:pPr indent="0" lvl="0" marL="0" rtl="0" algn="l">
+            <a:endParaRPr lang="en" u="sng" dirty="0">
+              <a:solidFill>
+                <a:schemeClr val="hlink"/>
+              </a:solidFill>
+            </a:endParaRPr>
+          </a:p>
+          <a:p>
+            <a:pPr marL="0" lvl="0" indent="0">
               <a:spcBef>
                 <a:spcPts val="1200"/>
               </a:spcBef>
-              <a:spcAft>
+              <a:buNone/>
+            </a:pPr>
+            <a:r>
+              <a:rPr lang="en-US" dirty="0">
+                <a:hlinkClick r:id="rId5"/>
+              </a:rPr>
+              <a:t>https://github.com/pylint-dev/pylint</a:t>
+            </a:r>
+            <a:endParaRPr lang="en-US" dirty="0"/>
+          </a:p>
+          <a:p>
+            <a:pPr marL="0" lvl="0" indent="0">
+              <a:spcBef>
                 <a:spcPts val="1200"/>
-              </a:spcAft>
-              <a:buNone/>
-            </a:pPr>
-            <a:r>
-              <a:t/>
-            </a:r>
-            <a:endParaRPr/>
+              </a:spcBef>
+              <a:buNone/>
+            </a:pPr>
+            <a:endParaRPr dirty="0"/>
+          </a:p>
+          <a:p>
+            <a:pPr marL="0" lvl="0" indent="0" algn="l" rtl="0">
+              <a:spcBef>
+                <a:spcPts val="1200"/>
+              </a:spcBef>
+              <a:spcAft>
+                <a:spcPts val="1200"/>
+              </a:spcAft>
+              <a:buNone/>
+            </a:pPr>
+            <a:endParaRPr dirty="0"/>
           </a:p>
         </p:txBody>
       </p:sp>
@@ -7600,11 +7815,11 @@
 </file>
 
 <file path=ppt/slides/slide12.xml><?xml version="1.0" encoding="utf-8"?>
-<p:sld xmlns:a="http://schemas.openxmlformats.org/drawingml/2006/main" xmlns:r="http://schemas.openxmlformats.org/officeDocument/2006/relationships" xmlns:mc="http://schemas.openxmlformats.org/markup-compatibility/2006" xmlns:mv="urn:schemas-microsoft-com:mac:vml" xmlns:p="http://schemas.openxmlformats.org/presentationml/2006/main" xmlns:c="http://schemas.openxmlformats.org/drawingml/2006/chart" xmlns:dgm="http://schemas.openxmlformats.org/drawingml/2006/diagram" xmlns:o="urn:schemas-microsoft-com:office:office" xmlns:v="urn:schemas-microsoft-com:vml" xmlns:pvml="urn:schemas-microsoft-com:office:powerpoint" xmlns:com="http://schemas.openxmlformats.org/drawingml/2006/compatibility" xmlns:p14="http://schemas.microsoft.com/office/powerpoint/2010/main" xmlns:p15="http://schemas.microsoft.com/office/powerpoint/2012/main" xmlns:ahyp="http://schemas.microsoft.com/office/drawing/2018/hyperlinkcolor">
+<p:sld xmlns:a="http://schemas.openxmlformats.org/drawingml/2006/main" xmlns:r="http://schemas.openxmlformats.org/officeDocument/2006/relationships" xmlns:p="http://schemas.openxmlformats.org/presentationml/2006/main">
   <p:cSld>
     <p:spTree>
       <p:nvGrpSpPr>
-        <p:cNvPr id="140" name="Shape 140"/>
+        <p:cNvPr id="1" name="Shape 140"/>
         <p:cNvGrpSpPr/>
         <p:nvPr/>
       </p:nvGrpSpPr>
@@ -7619,7 +7834,9 @@
       <p:sp>
         <p:nvSpPr>
           <p:cNvPr id="141" name="Google Shape;141;p24"/>
-          <p:cNvSpPr txBox="1"/>
+          <p:cNvSpPr txBox="1">
+            <a:spLocks noGrp="1"/>
+          </p:cNvSpPr>
           <p:nvPr>
             <p:ph type="title"/>
           </p:nvPr>
@@ -7634,12 +7851,12 @@
           </a:prstGeom>
         </p:spPr>
         <p:txBody>
-          <a:bodyPr anchorCtr="0" anchor="t" bIns="91425" lIns="91425" spcFirstLastPara="1" rIns="91425" wrap="square" tIns="91425">
+          <a:bodyPr spcFirstLastPara="1" wrap="square" lIns="91425" tIns="91425" rIns="91425" bIns="91425" anchor="t" anchorCtr="0">
             <a:normAutofit fontScale="90000"/>
           </a:bodyPr>
           <a:lstStyle/>
           <a:p>
-            <a:pPr indent="0" lvl="0" marL="0" rtl="0" algn="l">
+            <a:pPr marL="0" lvl="0" indent="0" algn="l" rtl="0">
               <a:spcBef>
                 <a:spcPts val="0"/>
               </a:spcBef>
@@ -7659,9 +7876,11 @@
       <p:sp>
         <p:nvSpPr>
           <p:cNvPr id="142" name="Google Shape;142;p24"/>
-          <p:cNvSpPr txBox="1"/>
+          <p:cNvSpPr txBox="1">
+            <a:spLocks noGrp="1"/>
+          </p:cNvSpPr>
           <p:nvPr>
-            <p:ph idx="1" type="body"/>
+            <p:ph type="body" idx="1"/>
           </p:nvPr>
         </p:nvSpPr>
         <p:spPr>
@@ -7674,12 +7893,12 @@
           </a:prstGeom>
         </p:spPr>
         <p:txBody>
-          <a:bodyPr anchorCtr="0" anchor="t" bIns="91425" lIns="91425" spcFirstLastPara="1" rIns="91425" wrap="square" tIns="91425">
-            <a:normAutofit/>
+          <a:bodyPr spcFirstLastPara="1" wrap="square" lIns="91425" tIns="91425" rIns="91425" bIns="91425" anchor="t" anchorCtr="0">
+            <a:normAutofit lnSpcReduction="10000"/>
           </a:bodyPr>
           <a:lstStyle/>
           <a:p>
-            <a:pPr indent="0" lvl="0" marL="0" rtl="0" algn="l">
+            <a:pPr marL="0" lvl="0" indent="0" algn="l" rtl="0">
               <a:spcBef>
                 <a:spcPts val="0"/>
               </a:spcBef>
@@ -7700,7 +7919,7 @@
             <a:endParaRPr/>
           </a:p>
           <a:p>
-            <a:pPr indent="0" lvl="0" marL="0" rtl="0" algn="l">
+            <a:pPr marL="0" lvl="0" indent="0" algn="l" rtl="0">
               <a:spcBef>
                 <a:spcPts val="1200"/>
               </a:spcBef>
@@ -7716,7 +7935,7 @@
             <a:endParaRPr/>
           </a:p>
           <a:p>
-            <a:pPr indent="0" lvl="0" marL="0" rtl="0" algn="l">
+            <a:pPr marL="0" lvl="0" indent="0" algn="l" rtl="0">
               <a:spcBef>
                 <a:spcPts val="1200"/>
               </a:spcBef>
@@ -7744,22 +7963,19 @@
             <a:endParaRPr/>
           </a:p>
           <a:p>
-            <a:pPr indent="0" lvl="0" marL="0" rtl="0" algn="l">
-              <a:spcBef>
-                <a:spcPts val="0"/>
-              </a:spcBef>
-              <a:spcAft>
-                <a:spcPts val="0"/>
-              </a:spcAft>
-              <a:buNone/>
-            </a:pPr>
-            <a:r>
-              <a:t/>
-            </a:r>
+            <a:pPr marL="0" lvl="0" indent="0" algn="l" rtl="0">
+              <a:spcBef>
+                <a:spcPts val="0"/>
+              </a:spcBef>
+              <a:spcAft>
+                <a:spcPts val="0"/>
+              </a:spcAft>
+              <a:buNone/>
+            </a:pPr>
             <a:endParaRPr/>
           </a:p>
           <a:p>
-            <a:pPr indent="0" lvl="0" marL="0" rtl="0" algn="l">
+            <a:pPr marL="0" lvl="0" indent="0" algn="l" rtl="0">
               <a:spcBef>
                 <a:spcPts val="0"/>
               </a:spcBef>
@@ -7788,7 +8004,7 @@
             <a:endParaRPr/>
           </a:p>
           <a:p>
-            <a:pPr indent="0" lvl="0" marL="0" rtl="0" algn="l">
+            <a:pPr marL="0" lvl="0" indent="0" algn="l" rtl="0">
               <a:spcBef>
                 <a:spcPts val="1200"/>
               </a:spcBef>
@@ -7809,7 +8025,7 @@
             <a:endParaRPr/>
           </a:p>
           <a:p>
-            <a:pPr indent="0" lvl="0" marL="0" rtl="0" algn="l">
+            <a:pPr marL="0" lvl="0" indent="0" algn="l" rtl="0">
               <a:spcBef>
                 <a:spcPts val="1200"/>
               </a:spcBef>
@@ -7859,23 +8075,23 @@
           <a:solidFill>
             <a:srgbClr val="F4CCCC"/>
           </a:solidFill>
-          <a:ln cap="flat" cmpd="sng" w="9525">
+          <a:ln w="9525" cap="flat" cmpd="sng">
             <a:solidFill>
               <a:srgbClr val="FF0000"/>
             </a:solidFill>
             <a:prstDash val="solid"/>
             <a:round/>
-            <a:headEnd len="sm" w="sm" type="none"/>
-            <a:tailEnd len="sm" w="sm" type="none"/>
+            <a:headEnd type="none" w="sm" len="sm"/>
+            <a:tailEnd type="none" w="sm" len="sm"/>
           </a:ln>
         </p:spPr>
         <p:txBody>
-          <a:bodyPr anchorCtr="0" anchor="ctr" bIns="91425" lIns="91425" spcFirstLastPara="1" rIns="91425" wrap="square" tIns="91425">
+          <a:bodyPr spcFirstLastPara="1" wrap="square" lIns="91425" tIns="91425" rIns="91425" bIns="91425" anchor="ctr" anchorCtr="0">
             <a:noAutofit/>
           </a:bodyPr>
           <a:lstStyle/>
           <a:p>
-            <a:pPr indent="0" lvl="0" marL="0" rtl="0" algn="ctr">
+            <a:pPr marL="0" lvl="0" indent="0" algn="ctr" rtl="0">
               <a:spcBef>
                 <a:spcPts val="0"/>
               </a:spcBef>
@@ -7885,7 +8101,7 @@
               <a:buNone/>
             </a:pPr>
             <a:r>
-              <a:rPr b="1" lang="en" sz="2500">
+              <a:rPr lang="en" sz="2500" b="1">
                 <a:solidFill>
                   <a:srgbClr val="85200C"/>
                 </a:solidFill>
@@ -7896,7 +8112,7 @@
               </a:rPr>
               <a:t>NOT REQUIRED!</a:t>
             </a:r>
-            <a:endParaRPr b="1" sz="2500">
+            <a:endParaRPr sz="2500" b="1">
               <a:solidFill>
                 <a:srgbClr val="85200C"/>
               </a:solidFill>
@@ -7916,32 +8132,32 @@
   <p:timing>
     <p:tnLst>
       <p:par>
-        <p:cTn dur="indefinite" nodeType="tmRoot" restart="never">
+        <p:cTn id="1" dur="indefinite" restart="never" nodeType="tmRoot">
           <p:childTnLst>
             <p:seq concurrent="1" nextAc="seek">
-              <p:cTn dur="indefinite" id="2" nodeType="mainSeq">
+              <p:cTn id="2" dur="indefinite" nodeType="mainSeq">
                 <p:childTnLst>
                   <p:par>
-                    <p:cTn fill="hold">
+                    <p:cTn id="3" fill="hold">
                       <p:stCondLst>
                         <p:cond delay="indefinite"/>
                       </p:stCondLst>
                       <p:childTnLst>
                         <p:par>
-                          <p:cTn fill="hold">
+                          <p:cTn id="4" fill="hold">
                             <p:stCondLst>
                               <p:cond delay="0"/>
                             </p:stCondLst>
                             <p:childTnLst>
                               <p:par>
-                                <p:cTn fill="hold" nodeType="clickEffect" presetClass="entr" presetID="1" presetSubtype="0">
+                                <p:cTn id="5" presetID="1" presetClass="entr" presetSubtype="0" fill="hold" nodeType="clickEffect">
                                   <p:stCondLst>
                                     <p:cond delay="0"/>
                                   </p:stCondLst>
                                   <p:childTnLst>
                                     <p:set>
                                       <p:cBhvr>
-                                        <p:cTn dur="1" fill="hold">
+                                        <p:cTn id="6" dur="1" fill="hold">
                                           <p:stCondLst>
                                             <p:cond delay="0"/>
                                           </p:stCondLst>
@@ -7969,14 +8185,14 @@
                 </p:childTnLst>
               </p:cTn>
               <p:prevCondLst>
-                <p:cond evt="onPrev">
+                <p:cond evt="onPrev" delay="0">
                   <p:tgtEl>
                     <p:sldTgt/>
                   </p:tgtEl>
                 </p:cond>
               </p:prevCondLst>
               <p:nextCondLst>
-                <p:cond evt="onNext">
+                <p:cond evt="onNext" delay="0">
                   <p:tgtEl>
                     <p:sldTgt/>
                   </p:tgtEl>
@@ -7992,11 +8208,11 @@
 </file>
 
 <file path=ppt/slides/slide13.xml><?xml version="1.0" encoding="utf-8"?>
-<p:sld xmlns:a="http://schemas.openxmlformats.org/drawingml/2006/main" xmlns:r="http://schemas.openxmlformats.org/officeDocument/2006/relationships" xmlns:mc="http://schemas.openxmlformats.org/markup-compatibility/2006" xmlns:mv="urn:schemas-microsoft-com:mac:vml" xmlns:p="http://schemas.openxmlformats.org/presentationml/2006/main" xmlns:c="http://schemas.openxmlformats.org/drawingml/2006/chart" xmlns:dgm="http://schemas.openxmlformats.org/drawingml/2006/diagram" xmlns:o="urn:schemas-microsoft-com:office:office" xmlns:v="urn:schemas-microsoft-com:vml" xmlns:pvml="urn:schemas-microsoft-com:office:powerpoint" xmlns:com="http://schemas.openxmlformats.org/drawingml/2006/compatibility" xmlns:p14="http://schemas.microsoft.com/office/powerpoint/2010/main" xmlns:p15="http://schemas.microsoft.com/office/powerpoint/2012/main" xmlns:ahyp="http://schemas.microsoft.com/office/drawing/2018/hyperlinkcolor">
+<p:sld xmlns:a="http://schemas.openxmlformats.org/drawingml/2006/main" xmlns:r="http://schemas.openxmlformats.org/officeDocument/2006/relationships" xmlns:p="http://schemas.openxmlformats.org/presentationml/2006/main">
   <p:cSld>
     <p:spTree>
       <p:nvGrpSpPr>
-        <p:cNvPr id="147" name="Shape 147"/>
+        <p:cNvPr id="1" name="Shape 147"/>
         <p:cNvGrpSpPr/>
         <p:nvPr/>
       </p:nvGrpSpPr>
@@ -8011,7 +8227,9 @@
       <p:sp>
         <p:nvSpPr>
           <p:cNvPr id="148" name="Google Shape;148;p25"/>
-          <p:cNvSpPr txBox="1"/>
+          <p:cNvSpPr txBox="1">
+            <a:spLocks noGrp="1"/>
+          </p:cNvSpPr>
           <p:nvPr>
             <p:ph type="title"/>
           </p:nvPr>
@@ -8026,12 +8244,12 @@
           </a:prstGeom>
         </p:spPr>
         <p:txBody>
-          <a:bodyPr anchorCtr="0" anchor="t" bIns="91425" lIns="91425" spcFirstLastPara="1" rIns="91425" wrap="square" tIns="91425">
+          <a:bodyPr spcFirstLastPara="1" wrap="square" lIns="91425" tIns="91425" rIns="91425" bIns="91425" anchor="t" anchorCtr="0">
             <a:normAutofit fontScale="90000"/>
           </a:bodyPr>
           <a:lstStyle/>
           <a:p>
-            <a:pPr indent="0" lvl="0" marL="0" rtl="0" algn="l">
+            <a:pPr marL="0" lvl="0" indent="0" algn="l" rtl="0">
               <a:spcBef>
                 <a:spcPts val="0"/>
               </a:spcBef>
@@ -8042,11 +8260,7 @@
             </a:pPr>
             <a:r>
               <a:rPr lang="en"/>
-              <a:t>Exercise</a:t>
-            </a:r>
-            <a:r>
-              <a:rPr lang="en"/>
-              <a:t>: Set up your project’s </a:t>
+              <a:t>Exercise: Set up your project’s </a:t>
             </a:r>
             <a:r>
               <a:rPr lang="en">
@@ -8068,9 +8282,11 @@
       <p:sp>
         <p:nvSpPr>
           <p:cNvPr id="149" name="Google Shape;149;p25"/>
-          <p:cNvSpPr txBox="1"/>
+          <p:cNvSpPr txBox="1">
+            <a:spLocks noGrp="1"/>
+          </p:cNvSpPr>
           <p:nvPr>
-            <p:ph idx="1" type="body"/>
+            <p:ph type="body" idx="1"/>
           </p:nvPr>
         </p:nvSpPr>
         <p:spPr>
@@ -8083,12 +8299,12 @@
           </a:prstGeom>
         </p:spPr>
         <p:txBody>
-          <a:bodyPr anchorCtr="0" anchor="t" bIns="91425" lIns="91425" spcFirstLastPara="1" rIns="91425" wrap="square" tIns="91425">
+          <a:bodyPr spcFirstLastPara="1" wrap="square" lIns="91425" tIns="91425" rIns="91425" bIns="91425" anchor="t" anchorCtr="0">
             <a:normAutofit/>
           </a:bodyPr>
           <a:lstStyle/>
           <a:p>
-            <a:pPr indent="0" lvl="0" marL="0" rtl="0" algn="l">
+            <a:pPr marL="0" lvl="0" indent="0" algn="l" rtl="0">
               <a:spcBef>
                 <a:spcPts val="0"/>
               </a:spcBef>
@@ -8098,7 +8314,7 @@
               <a:buNone/>
             </a:pPr>
             <a:r>
-              <a:rPr lang="en" u="sng">
+              <a:rPr lang="en" u="sng" dirty="0">
                 <a:solidFill>
                   <a:schemeClr val="hlink"/>
                 </a:solidFill>
@@ -8106,10 +8322,10 @@
               </a:rPr>
               <a:t>https://setuptools.pypa.io/en/latest/userguide/index.html</a:t>
             </a:r>
-            <a:endParaRPr/>
-          </a:p>
-          <a:p>
-            <a:pPr indent="0" lvl="0" marL="0" rtl="0" algn="l">
+            <a:endParaRPr dirty="0"/>
+          </a:p>
+          <a:p>
+            <a:pPr marL="0" lvl="0" indent="0" algn="l" rtl="0">
               <a:spcBef>
                 <a:spcPts val="1200"/>
               </a:spcBef>
@@ -8119,13 +8335,13 @@
               <a:buNone/>
             </a:pPr>
             <a:r>
-              <a:rPr lang="en"/>
+              <a:rPr lang="en" dirty="0"/>
               <a:t>Make sure it builds!</a:t>
             </a:r>
-            <a:endParaRPr/>
-          </a:p>
-          <a:p>
-            <a:pPr indent="0" lvl="0" marL="457200" rtl="0" algn="l">
+            <a:endParaRPr dirty="0"/>
+          </a:p>
+          <a:p>
+            <a:pPr marL="457200" lvl="0" indent="0" algn="l" rtl="0">
               <a:spcBef>
                 <a:spcPts val="1200"/>
               </a:spcBef>
@@ -8135,7 +8351,7 @@
               <a:buNone/>
             </a:pPr>
             <a:r>
-              <a:rPr lang="en">
+              <a:rPr lang="en" dirty="0">
                 <a:latin typeface="Courier New"/>
                 <a:ea typeface="Courier New"/>
                 <a:cs typeface="Courier New"/>
@@ -8143,7 +8359,7 @@
               </a:rPr>
               <a:t>python -m build</a:t>
             </a:r>
-            <a:endParaRPr>
+            <a:endParaRPr dirty="0">
               <a:latin typeface="Courier New"/>
               <a:ea typeface="Courier New"/>
               <a:cs typeface="Courier New"/>
@@ -8151,7 +8367,7 @@
             </a:endParaRPr>
           </a:p>
           <a:p>
-            <a:pPr indent="0" lvl="0" marL="0" rtl="0" algn="l">
+            <a:pPr marL="0" lvl="0" indent="0" algn="l" rtl="0">
               <a:spcBef>
                 <a:spcPts val="1200"/>
               </a:spcBef>
@@ -8161,13 +8377,13 @@
               <a:buNone/>
             </a:pPr>
             <a:r>
-              <a:rPr lang="en"/>
+              <a:rPr lang="en" dirty="0"/>
               <a:t>(remember to install the build tools as part of your environment!)</a:t>
             </a:r>
-            <a:endParaRPr/>
-          </a:p>
-          <a:p>
-            <a:pPr indent="0" lvl="0" marL="0" rtl="0" algn="l">
+            <a:endParaRPr dirty="0"/>
+          </a:p>
+          <a:p>
+            <a:pPr marL="0" lvl="0" indent="0" algn="l" rtl="0">
               <a:spcBef>
                 <a:spcPts val="1200"/>
               </a:spcBef>
@@ -8177,13 +8393,13 @@
               <a:buNone/>
             </a:pPr>
             <a:r>
-              <a:rPr lang="en"/>
+              <a:rPr lang="en" dirty="0"/>
               <a:t>Test it out!</a:t>
             </a:r>
-            <a:endParaRPr/>
-          </a:p>
-          <a:p>
-            <a:pPr indent="-342900" lvl="0" marL="457200" rtl="0" algn="l">
+            <a:endParaRPr dirty="0"/>
+          </a:p>
+          <a:p>
+            <a:pPr marL="457200" lvl="0" indent="-342900" algn="l" rtl="0">
               <a:spcBef>
                 <a:spcPts val="1200"/>
               </a:spcBef>
@@ -8194,13 +8410,13 @@
               <a:buChar char="●"/>
             </a:pPr>
             <a:r>
-              <a:rPr lang="en"/>
+              <a:rPr lang="en" dirty="0"/>
               <a:t>Move the built tar.gz from dist to a folder outside your repo</a:t>
             </a:r>
-            <a:endParaRPr/>
-          </a:p>
-          <a:p>
-            <a:pPr indent="-342900" lvl="0" marL="457200" rtl="0" algn="l">
+            <a:endParaRPr dirty="0"/>
+          </a:p>
+          <a:p>
+            <a:pPr marL="457200" lvl="0" indent="-342900" algn="l" rtl="0">
               <a:spcBef>
                 <a:spcPts val="0"/>
               </a:spcBef>
@@ -8211,13 +8427,13 @@
               <a:buChar char="●"/>
             </a:pPr>
             <a:r>
-              <a:rPr lang="en"/>
+              <a:rPr lang="en" dirty="0"/>
               <a:t>Create a new (empty) conda environment</a:t>
             </a:r>
-            <a:endParaRPr/>
-          </a:p>
-          <a:p>
-            <a:pPr indent="-342900" lvl="0" marL="457200" rtl="0" algn="l">
+            <a:endParaRPr dirty="0"/>
+          </a:p>
+          <a:p>
+            <a:pPr marL="457200" lvl="0" indent="-342900" algn="l" rtl="0">
               <a:spcBef>
                 <a:spcPts val="0"/>
               </a:spcBef>
@@ -8228,7 +8444,7 @@
               <a:buChar char="●"/>
             </a:pPr>
             <a:r>
-              <a:rPr lang="en">
+              <a:rPr lang="en" dirty="0">
                 <a:latin typeface="Courier New"/>
                 <a:ea typeface="Courier New"/>
                 <a:cs typeface="Courier New"/>
@@ -8236,7 +8452,7 @@
               </a:rPr>
               <a:t>python3 -m pip install ./&lt;your-package-name&gt;.tar.gz</a:t>
             </a:r>
-            <a:endParaRPr>
+            <a:endParaRPr dirty="0">
               <a:latin typeface="Courier New"/>
               <a:ea typeface="Courier New"/>
               <a:cs typeface="Courier New"/>
@@ -8244,7 +8460,7 @@
             </a:endParaRPr>
           </a:p>
           <a:p>
-            <a:pPr indent="-342900" lvl="0" marL="457200" rtl="0" algn="l">
+            <a:pPr marL="457200" lvl="0" indent="-342900" algn="l" rtl="0">
               <a:spcBef>
                 <a:spcPts val="0"/>
               </a:spcBef>
@@ -8255,10 +8471,10 @@
               <a:buChar char="●"/>
             </a:pPr>
             <a:r>
-              <a:rPr lang="en"/>
+              <a:rPr lang="en" dirty="0"/>
               <a:t>Try running python and try importing your modules and functions</a:t>
             </a:r>
-            <a:endParaRPr/>
+            <a:endParaRPr dirty="0"/>
           </a:p>
         </p:txBody>
       </p:sp>
@@ -8271,11 +8487,11 @@
 </file>
 
 <file path=ppt/slides/slide2.xml><?xml version="1.0" encoding="utf-8"?>
-<p:sld xmlns:a="http://schemas.openxmlformats.org/drawingml/2006/main" xmlns:r="http://schemas.openxmlformats.org/officeDocument/2006/relationships" xmlns:mc="http://schemas.openxmlformats.org/markup-compatibility/2006" xmlns:mv="urn:schemas-microsoft-com:mac:vml" xmlns:p="http://schemas.openxmlformats.org/presentationml/2006/main" xmlns:c="http://schemas.openxmlformats.org/drawingml/2006/chart" xmlns:dgm="http://schemas.openxmlformats.org/drawingml/2006/diagram" xmlns:o="urn:schemas-microsoft-com:office:office" xmlns:v="urn:schemas-microsoft-com:vml" xmlns:pvml="urn:schemas-microsoft-com:office:powerpoint" xmlns:com="http://schemas.openxmlformats.org/drawingml/2006/compatibility" xmlns:p14="http://schemas.microsoft.com/office/powerpoint/2010/main" xmlns:p15="http://schemas.microsoft.com/office/powerpoint/2012/main" xmlns:ahyp="http://schemas.microsoft.com/office/drawing/2018/hyperlinkcolor">
+<p:sld xmlns:a="http://schemas.openxmlformats.org/drawingml/2006/main" xmlns:r="http://schemas.openxmlformats.org/officeDocument/2006/relationships" xmlns:p="http://schemas.openxmlformats.org/presentationml/2006/main">
   <p:cSld>
     <p:spTree>
       <p:nvGrpSpPr>
-        <p:cNvPr id="68" name="Shape 68"/>
+        <p:cNvPr id="1" name="Shape 68"/>
         <p:cNvGrpSpPr/>
         <p:nvPr/>
       </p:nvGrpSpPr>
@@ -8290,7 +8506,9 @@
       <p:sp>
         <p:nvSpPr>
           <p:cNvPr id="69" name="Google Shape;69;p14"/>
-          <p:cNvSpPr txBox="1"/>
+          <p:cNvSpPr txBox="1">
+            <a:spLocks noGrp="1"/>
+          </p:cNvSpPr>
           <p:nvPr>
             <p:ph type="title"/>
           </p:nvPr>
@@ -8305,12 +8523,12 @@
           </a:prstGeom>
         </p:spPr>
         <p:txBody>
-          <a:bodyPr anchorCtr="0" anchor="t" bIns="91425" lIns="91425" spcFirstLastPara="1" rIns="91425" wrap="square" tIns="91425">
+          <a:bodyPr spcFirstLastPara="1" wrap="square" lIns="91425" tIns="91425" rIns="91425" bIns="91425" anchor="t" anchorCtr="0">
             <a:normAutofit fontScale="90000"/>
           </a:bodyPr>
           <a:lstStyle/>
           <a:p>
-            <a:pPr indent="0" lvl="0" marL="0" rtl="0" algn="l">
+            <a:pPr marL="0" lvl="0" indent="0" algn="l" rtl="0">
               <a:spcBef>
                 <a:spcPts val="0"/>
               </a:spcBef>
@@ -8330,27 +8548,29 @@
       <p:sp>
         <p:nvSpPr>
           <p:cNvPr id="70" name="Google Shape;70;p14"/>
-          <p:cNvSpPr txBox="1"/>
+          <p:cNvSpPr txBox="1">
+            <a:spLocks noGrp="1"/>
+          </p:cNvSpPr>
           <p:nvPr>
-            <p:ph idx="1" type="body"/>
+            <p:ph type="body" idx="1"/>
           </p:nvPr>
         </p:nvSpPr>
         <p:spPr>
           <a:xfrm>
             <a:off x="311700" y="1152475"/>
-            <a:ext cx="8520600" cy="3416400"/>
+            <a:ext cx="7506774" cy="3416400"/>
           </a:xfrm>
           <a:prstGeom prst="rect">
             <a:avLst/>
           </a:prstGeom>
         </p:spPr>
         <p:txBody>
-          <a:bodyPr anchorCtr="0" anchor="t" bIns="91425" lIns="91425" spcFirstLastPara="1" rIns="91425" wrap="square" tIns="91425">
+          <a:bodyPr spcFirstLastPara="1" wrap="square" lIns="91425" tIns="91425" rIns="91425" bIns="91425" anchor="t" anchorCtr="0">
             <a:normAutofit/>
           </a:bodyPr>
           <a:lstStyle/>
           <a:p>
-            <a:pPr indent="0" lvl="0" marL="0" rtl="0" algn="l">
+            <a:pPr marL="0" lvl="0" indent="0" algn="l" rtl="0">
               <a:spcBef>
                 <a:spcPts val="0"/>
               </a:spcBef>
@@ -8360,13 +8580,13 @@
               <a:buNone/>
             </a:pPr>
             <a:r>
-              <a:rPr lang="en"/>
+              <a:rPr lang="en" dirty="0"/>
               <a:t>Next week: Practice Presentations</a:t>
             </a:r>
-            <a:endParaRPr/>
-          </a:p>
-          <a:p>
-            <a:pPr indent="-342900" lvl="0" marL="914400" rtl="0" algn="l">
+            <a:endParaRPr dirty="0"/>
+          </a:p>
+          <a:p>
+            <a:pPr marL="914400" lvl="0" indent="-342900" algn="l" rtl="0">
               <a:spcBef>
                 <a:spcPts val="1200"/>
               </a:spcBef>
@@ -8377,13 +8597,13 @@
               <a:buChar char="●"/>
             </a:pPr>
             <a:r>
-              <a:rPr lang="en"/>
+              <a:rPr lang="en" dirty="0"/>
               <a:t>Similar to your first demo - low stress</a:t>
             </a:r>
-            <a:endParaRPr/>
-          </a:p>
-          <a:p>
-            <a:pPr indent="-342900" lvl="0" marL="914400" rtl="0" algn="l">
+            <a:endParaRPr dirty="0"/>
+          </a:p>
+          <a:p>
+            <a:pPr marL="914400" lvl="0" indent="-342900" algn="l" rtl="0">
               <a:spcBef>
                 <a:spcPts val="0"/>
               </a:spcBef>
@@ -8394,13 +8614,13 @@
               <a:buChar char="●"/>
             </a:pPr>
             <a:r>
-              <a:rPr lang="en"/>
+              <a:rPr lang="en" dirty="0"/>
               <a:t>You should ALSO have a first draft of your presentation</a:t>
             </a:r>
-            <a:endParaRPr/>
-          </a:p>
-          <a:p>
-            <a:pPr indent="-317500" lvl="1" marL="1371600" rtl="0" algn="l">
+            <a:endParaRPr dirty="0"/>
+          </a:p>
+          <a:p>
+            <a:pPr marL="1371600" lvl="1" indent="-317500" algn="l" rtl="0">
               <a:spcBef>
                 <a:spcPts val="0"/>
               </a:spcBef>
@@ -8411,13 +8631,13 @@
               <a:buChar char="○"/>
             </a:pPr>
             <a:r>
-              <a:rPr lang="en"/>
+              <a:rPr lang="en" dirty="0"/>
               <a:t>Definitely does not need to be complete, but we want to see the beginning</a:t>
             </a:r>
-            <a:endParaRPr/>
-          </a:p>
-          <a:p>
-            <a:pPr indent="-342900" lvl="0" marL="914400" rtl="0" algn="l">
+            <a:endParaRPr dirty="0"/>
+          </a:p>
+          <a:p>
+            <a:pPr marL="914400" lvl="0" indent="-342900" algn="l" rtl="0">
               <a:spcBef>
                 <a:spcPts val="0"/>
               </a:spcBef>
@@ -8428,13 +8648,13 @@
               <a:buChar char="●"/>
             </a:pPr>
             <a:r>
-              <a:rPr lang="en"/>
+              <a:rPr lang="en" dirty="0"/>
               <a:t>This is also your time to have any last minute discussions with instructors</a:t>
             </a:r>
-            <a:endParaRPr/>
-          </a:p>
-          <a:p>
-            <a:pPr indent="0" lvl="0" marL="0" rtl="0" algn="l">
+            <a:endParaRPr dirty="0"/>
+          </a:p>
+          <a:p>
+            <a:pPr marL="0" lvl="0" indent="0" algn="l" rtl="0">
               <a:spcBef>
                 <a:spcPts val="1200"/>
               </a:spcBef>
@@ -8443,10 +8663,7 @@
               </a:spcAft>
               <a:buNone/>
             </a:pPr>
-            <a:r>
-              <a:t/>
-            </a:r>
-            <a:endParaRPr/>
+            <a:endParaRPr dirty="0"/>
           </a:p>
         </p:txBody>
       </p:sp>
@@ -8459,11 +8676,11 @@
 </file>
 
 <file path=ppt/slides/slide3.xml><?xml version="1.0" encoding="utf-8"?>
-<p:sld xmlns:a="http://schemas.openxmlformats.org/drawingml/2006/main" xmlns:r="http://schemas.openxmlformats.org/officeDocument/2006/relationships" xmlns:mc="http://schemas.openxmlformats.org/markup-compatibility/2006" xmlns:mv="urn:schemas-microsoft-com:mac:vml" xmlns:p="http://schemas.openxmlformats.org/presentationml/2006/main" xmlns:c="http://schemas.openxmlformats.org/drawingml/2006/chart" xmlns:dgm="http://schemas.openxmlformats.org/drawingml/2006/diagram" xmlns:o="urn:schemas-microsoft-com:office:office" xmlns:v="urn:schemas-microsoft-com:vml" xmlns:pvml="urn:schemas-microsoft-com:office:powerpoint" xmlns:com="http://schemas.openxmlformats.org/drawingml/2006/compatibility" xmlns:p14="http://schemas.microsoft.com/office/powerpoint/2010/main" xmlns:p15="http://schemas.microsoft.com/office/powerpoint/2012/main" xmlns:ahyp="http://schemas.microsoft.com/office/drawing/2018/hyperlinkcolor">
+<p:sld xmlns:a="http://schemas.openxmlformats.org/drawingml/2006/main" xmlns:r="http://schemas.openxmlformats.org/officeDocument/2006/relationships" xmlns:p="http://schemas.openxmlformats.org/presentationml/2006/main">
   <p:cSld>
     <p:spTree>
       <p:nvGrpSpPr>
-        <p:cNvPr id="74" name="Shape 74"/>
+        <p:cNvPr id="1" name="Shape 74"/>
         <p:cNvGrpSpPr/>
         <p:nvPr/>
       </p:nvGrpSpPr>
@@ -8478,7 +8695,9 @@
       <p:sp>
         <p:nvSpPr>
           <p:cNvPr id="75" name="Google Shape;75;p15"/>
-          <p:cNvSpPr txBox="1"/>
+          <p:cNvSpPr txBox="1">
+            <a:spLocks noGrp="1"/>
+          </p:cNvSpPr>
           <p:nvPr>
             <p:ph type="title"/>
           </p:nvPr>
@@ -8493,12 +8712,12 @@
           </a:prstGeom>
         </p:spPr>
         <p:txBody>
-          <a:bodyPr anchorCtr="0" anchor="t" bIns="91425" lIns="91425" spcFirstLastPara="1" rIns="91425" wrap="square" tIns="91425">
+          <a:bodyPr spcFirstLastPara="1" wrap="square" lIns="91425" tIns="91425" rIns="91425" bIns="91425" anchor="t" anchorCtr="0">
             <a:normAutofit fontScale="90000"/>
           </a:bodyPr>
           <a:lstStyle/>
           <a:p>
-            <a:pPr indent="0" lvl="0" marL="0" rtl="0" algn="l">
+            <a:pPr marL="0" lvl="0" indent="0" algn="l" rtl="0">
               <a:spcBef>
                 <a:spcPts val="0"/>
               </a:spcBef>
@@ -8518,9 +8737,11 @@
       <p:sp>
         <p:nvSpPr>
           <p:cNvPr id="76" name="Google Shape;76;p15"/>
-          <p:cNvSpPr txBox="1"/>
+          <p:cNvSpPr txBox="1">
+            <a:spLocks noGrp="1"/>
+          </p:cNvSpPr>
           <p:nvPr>
-            <p:ph idx="1" type="body"/>
+            <p:ph type="body" idx="1"/>
           </p:nvPr>
         </p:nvSpPr>
         <p:spPr>
@@ -8533,12 +8754,12 @@
           </a:prstGeom>
         </p:spPr>
         <p:txBody>
-          <a:bodyPr anchorCtr="0" anchor="t" bIns="91425" lIns="91425" spcFirstLastPara="1" rIns="91425" wrap="square" tIns="91425">
+          <a:bodyPr spcFirstLastPara="1" wrap="square" lIns="91425" tIns="91425" rIns="91425" bIns="91425" anchor="t" anchorCtr="0">
             <a:normAutofit/>
           </a:bodyPr>
           <a:lstStyle/>
           <a:p>
-            <a:pPr indent="0" lvl="0" marL="0" rtl="0" algn="l">
+            <a:pPr marL="0" lvl="0" indent="0" algn="l" rtl="0">
               <a:spcBef>
                 <a:spcPts val="0"/>
               </a:spcBef>
@@ -8548,13 +8769,13 @@
               <a:buNone/>
             </a:pPr>
             <a:r>
-              <a:rPr lang="en"/>
+              <a:rPr lang="en" dirty="0"/>
               <a:t>Just to reiterate: you must include the following in your projects.</a:t>
             </a:r>
-            <a:endParaRPr/>
-          </a:p>
-          <a:p>
-            <a:pPr indent="-342900" lvl="0" marL="457200" rtl="0" algn="l">
+            <a:endParaRPr dirty="0"/>
+          </a:p>
+          <a:p>
+            <a:pPr marL="457200" lvl="0" indent="-342900" algn="l" rtl="0">
               <a:spcBef>
                 <a:spcPts val="1200"/>
               </a:spcBef>
@@ -8565,13 +8786,13 @@
               <a:buChar char="●"/>
             </a:pPr>
             <a:r>
-              <a:rPr b="1" lang="en"/>
+              <a:rPr lang="en" b="1" dirty="0"/>
               <a:t>Tests</a:t>
             </a:r>
-            <a:endParaRPr/>
-          </a:p>
-          <a:p>
-            <a:pPr indent="-330200" lvl="1" marL="914400" rtl="0" algn="l">
+            <a:endParaRPr dirty="0"/>
+          </a:p>
+          <a:p>
+            <a:pPr marL="914400" lvl="1" indent="-330200" algn="l" rtl="0">
               <a:spcBef>
                 <a:spcPts val="0"/>
               </a:spcBef>
@@ -8582,13 +8803,13 @@
               <a:buChar char="○"/>
             </a:pPr>
             <a:r>
-              <a:rPr lang="en" sz="1600"/>
+              <a:rPr lang="en" sz="1600" dirty="0"/>
               <a:t>High test coverage</a:t>
             </a:r>
-            <a:endParaRPr sz="1600"/>
-          </a:p>
-          <a:p>
-            <a:pPr indent="-330200" lvl="1" marL="914400" rtl="0" algn="l">
+            <a:endParaRPr sz="1600" dirty="0"/>
+          </a:p>
+          <a:p>
+            <a:pPr marL="914400" lvl="1" indent="-330200" algn="l" rtl="0">
               <a:spcBef>
                 <a:spcPts val="0"/>
               </a:spcBef>
@@ -8599,21 +8820,21 @@
               <a:buChar char="○"/>
             </a:pPr>
             <a:r>
-              <a:rPr lang="en" sz="1600"/>
+              <a:rPr lang="en" sz="1600" dirty="0"/>
               <a:t>High coverage is not </a:t>
             </a:r>
             <a:r>
-              <a:rPr i="1" lang="en" sz="1600"/>
+              <a:rPr lang="en" sz="1600" i="1" dirty="0"/>
               <a:t>sufficient</a:t>
             </a:r>
             <a:r>
-              <a:rPr lang="en" sz="1600"/>
+              <a:rPr lang="en" sz="1600" dirty="0"/>
               <a:t> - make sure you write good tests</a:t>
             </a:r>
-            <a:endParaRPr sz="1600"/>
-          </a:p>
-          <a:p>
-            <a:pPr indent="-342900" lvl="0" marL="457200" rtl="0" algn="l">
+            <a:endParaRPr sz="1600" dirty="0"/>
+          </a:p>
+          <a:p>
+            <a:pPr marL="457200" lvl="0" indent="-342900" algn="l" rtl="0">
               <a:spcBef>
                 <a:spcPts val="0"/>
               </a:spcBef>
@@ -8624,13 +8845,13 @@
               <a:buChar char="●"/>
             </a:pPr>
             <a:r>
-              <a:rPr b="1" lang="en"/>
+              <a:rPr lang="en" b="1" dirty="0"/>
               <a:t>README</a:t>
             </a:r>
-            <a:endParaRPr b="1"/>
-          </a:p>
-          <a:p>
-            <a:pPr indent="-330200" lvl="1" marL="914400" rtl="0" algn="l">
+            <a:endParaRPr b="1" dirty="0"/>
+          </a:p>
+          <a:p>
+            <a:pPr marL="914400" lvl="1" indent="-330200" algn="l" rtl="0">
               <a:spcBef>
                 <a:spcPts val="0"/>
               </a:spcBef>
@@ -8641,13 +8862,13 @@
               <a:buChar char="○"/>
             </a:pPr>
             <a:r>
-              <a:rPr lang="en" sz="1600"/>
+              <a:rPr lang="en" sz="1600" dirty="0"/>
               <a:t>Updated!</a:t>
             </a:r>
-            <a:endParaRPr sz="1600"/>
-          </a:p>
-          <a:p>
-            <a:pPr indent="-342900" lvl="0" marL="457200" rtl="0" algn="l">
+            <a:endParaRPr sz="1600" dirty="0"/>
+          </a:p>
+          <a:p>
+            <a:pPr marL="457200" lvl="0" indent="-342900" algn="l" rtl="0">
               <a:spcBef>
                 <a:spcPts val="0"/>
               </a:spcBef>
@@ -8658,13 +8879,13 @@
               <a:buChar char="●"/>
             </a:pPr>
             <a:r>
-              <a:rPr b="1" lang="en"/>
+              <a:rPr lang="en" b="1" dirty="0"/>
               <a:t>Inline documentation (docstrings)</a:t>
             </a:r>
-            <a:endParaRPr b="1"/>
-          </a:p>
-          <a:p>
-            <a:pPr indent="-330200" lvl="1" marL="914400" rtl="0" algn="l">
+            <a:endParaRPr b="1" dirty="0"/>
+          </a:p>
+          <a:p>
+            <a:pPr marL="914400" lvl="1" indent="-330200" algn="l" rtl="0">
               <a:spcBef>
                 <a:spcPts val="0"/>
               </a:spcBef>
@@ -8675,19 +8896,21 @@
               <a:buChar char="○"/>
             </a:pPr>
             <a:r>
-              <a:rPr lang="en" sz="1600"/>
+              <a:rPr lang="en" sz="1600" dirty="0"/>
               <a:t>For functions/modules</a:t>
             </a:r>
-            <a:endParaRPr sz="1600"/>
+            <a:endParaRPr sz="1600" dirty="0"/>
           </a:p>
         </p:txBody>
       </p:sp>
       <p:sp>
         <p:nvSpPr>
           <p:cNvPr id="77" name="Google Shape;77;p15"/>
-          <p:cNvSpPr txBox="1"/>
+          <p:cNvSpPr txBox="1">
+            <a:spLocks noGrp="1"/>
+          </p:cNvSpPr>
           <p:nvPr>
-            <p:ph idx="1" type="body"/>
+            <p:ph type="body" idx="1"/>
           </p:nvPr>
         </p:nvSpPr>
         <p:spPr>
@@ -8700,27 +8923,24 @@
           </a:prstGeom>
         </p:spPr>
         <p:txBody>
-          <a:bodyPr anchorCtr="0" anchor="t" bIns="91425" lIns="91425" spcFirstLastPara="1" rIns="91425" wrap="square" tIns="91425">
+          <a:bodyPr spcFirstLastPara="1" wrap="square" lIns="91425" tIns="91425" rIns="91425" bIns="91425" anchor="t" anchorCtr="0">
             <a:normAutofit/>
           </a:bodyPr>
           <a:lstStyle/>
           <a:p>
-            <a:pPr indent="0" lvl="0" marL="0" rtl="0" algn="l">
-              <a:spcBef>
-                <a:spcPts val="0"/>
-              </a:spcBef>
-              <a:spcAft>
-                <a:spcPts val="0"/>
-              </a:spcAft>
-              <a:buNone/>
-            </a:pPr>
-            <a:r>
-              <a:t/>
-            </a:r>
-            <a:endParaRPr/>
-          </a:p>
-          <a:p>
-            <a:pPr indent="-342900" lvl="0" marL="457200" rtl="0" algn="l">
+            <a:pPr marL="0" lvl="0" indent="0" algn="l" rtl="0">
+              <a:spcBef>
+                <a:spcPts val="0"/>
+              </a:spcBef>
+              <a:spcAft>
+                <a:spcPts val="0"/>
+              </a:spcAft>
+              <a:buNone/>
+            </a:pPr>
+            <a:endParaRPr dirty="0"/>
+          </a:p>
+          <a:p>
+            <a:pPr marL="457200" lvl="0" indent="-342900" algn="l" rtl="0">
               <a:spcBef>
                 <a:spcPts val="1200"/>
               </a:spcBef>
@@ -8731,17 +8951,17 @@
               <a:buChar char="●"/>
             </a:pPr>
             <a:r>
-              <a:rPr b="1" lang="en"/>
+              <a:rPr lang="en" b="1" dirty="0"/>
               <a:t>examples</a:t>
             </a:r>
             <a:r>
-              <a:rPr lang="en"/>
+              <a:rPr lang="en" dirty="0"/>
               <a:t> folder</a:t>
             </a:r>
-            <a:endParaRPr/>
-          </a:p>
-          <a:p>
-            <a:pPr indent="-330200" lvl="1" marL="914400" rtl="0" algn="l">
+            <a:endParaRPr dirty="0"/>
+          </a:p>
+          <a:p>
+            <a:pPr marL="914400" lvl="1" indent="-330200" algn="l" rtl="0">
               <a:spcBef>
                 <a:spcPts val="0"/>
               </a:spcBef>
@@ -8752,13 +8972,13 @@
               <a:buChar char="○"/>
             </a:pPr>
             <a:r>
-              <a:rPr lang="en" sz="1600"/>
+              <a:rPr lang="en" sz="1600" dirty="0"/>
               <a:t>How do various users interact with your system?</a:t>
             </a:r>
-            <a:endParaRPr sz="1600"/>
-          </a:p>
-          <a:p>
-            <a:pPr indent="-330200" lvl="1" marL="914400" rtl="0" algn="l">
+            <a:endParaRPr sz="1600" dirty="0"/>
+          </a:p>
+          <a:p>
+            <a:pPr marL="914400" lvl="1" indent="-330200" algn="l" rtl="0">
               <a:spcBef>
                 <a:spcPts val="0"/>
               </a:spcBef>
@@ -8769,13 +8989,13 @@
               <a:buChar char="○"/>
             </a:pPr>
             <a:r>
-              <a:rPr lang="en" sz="1600"/>
+              <a:rPr lang="en" sz="1600" dirty="0"/>
               <a:t>How do we (the instructors) run the code and tests?</a:t>
             </a:r>
-            <a:endParaRPr sz="1600"/>
-          </a:p>
-          <a:p>
-            <a:pPr indent="-342900" lvl="0" marL="457200" rtl="0" algn="l">
+            <a:endParaRPr sz="1600" dirty="0"/>
+          </a:p>
+          <a:p>
+            <a:pPr marL="457200" lvl="0" indent="-342900" algn="l" rtl="0">
               <a:spcBef>
                 <a:spcPts val="0"/>
               </a:spcBef>
@@ -8786,17 +9006,17 @@
               <a:buChar char="●"/>
             </a:pPr>
             <a:r>
-              <a:rPr b="1" lang="en"/>
+              <a:rPr lang="en" b="1" dirty="0"/>
               <a:t>Style</a:t>
             </a:r>
             <a:r>
-              <a:rPr lang="en"/>
+              <a:rPr lang="en" dirty="0"/>
               <a:t>: pylint 100%</a:t>
             </a:r>
-            <a:endParaRPr/>
-          </a:p>
-          <a:p>
-            <a:pPr indent="-342900" lvl="0" marL="457200" rtl="0" algn="l">
+            <a:endParaRPr dirty="0"/>
+          </a:p>
+          <a:p>
+            <a:pPr marL="457200" lvl="0" indent="-342900" algn="l" rtl="0">
               <a:spcBef>
                 <a:spcPts val="0"/>
               </a:spcBef>
@@ -8807,13 +9027,13 @@
               <a:buChar char="●"/>
             </a:pPr>
             <a:r>
-              <a:rPr b="1" lang="en"/>
+              <a:rPr lang="en" b="1" dirty="0"/>
               <a:t>Continuous Integration</a:t>
             </a:r>
-            <a:endParaRPr b="1"/>
-          </a:p>
-          <a:p>
-            <a:pPr indent="-342900" lvl="0" marL="457200" rtl="0" algn="l">
+            <a:endParaRPr b="1" dirty="0"/>
+          </a:p>
+          <a:p>
+            <a:pPr marL="457200" lvl="0" indent="-342900" algn="l" rtl="0">
               <a:spcBef>
                 <a:spcPts val="0"/>
               </a:spcBef>
@@ -8824,13 +9044,12 @@
               <a:buChar char="●"/>
             </a:pPr>
             <a:r>
-              <a:rPr b="1" lang="en"/>
+              <a:rPr lang="en" b="1" dirty="0"/>
               <a:t>Pull requests &amp; reviews</a:t>
             </a:r>
-            <a:endParaRPr b="1"/>
-          </a:p>
-          <a:p>
-            <a:pPr indent="-342900" lvl="0" marL="457200" rtl="0" algn="l">
+          </a:p>
+          <a:p>
+            <a:pPr marL="457200" lvl="0" indent="-342900" algn="l" rtl="0">
               <a:spcBef>
                 <a:spcPts val="0"/>
               </a:spcBef>
@@ -8841,18 +9060,14 @@
               <a:buChar char="●"/>
             </a:pPr>
             <a:r>
-              <a:rPr b="1" lang="en"/>
-              <a:t>Package distribution</a:t>
+              <a:rPr lang="en" b="1" dirty="0"/>
+              <a:t>Packaging </a:t>
             </a:r>
             <a:r>
-              <a:rPr lang="en"/>
-              <a:t> </a:t>
-            </a:r>
-            <a:r>
-              <a:rPr i="1" lang="en"/>
+              <a:rPr lang="en" i="1" dirty="0"/>
               <a:t>(today!)</a:t>
             </a:r>
-            <a:endParaRPr i="1"/>
+            <a:endParaRPr i="1" dirty="0"/>
           </a:p>
         </p:txBody>
       </p:sp>
@@ -8864,32 +9079,32 @@
   <p:timing>
     <p:tnLst>
       <p:par>
-        <p:cTn dur="indefinite" nodeType="tmRoot" restart="never">
+        <p:cTn id="1" dur="indefinite" restart="never" nodeType="tmRoot">
           <p:childTnLst>
             <p:seq concurrent="1" nextAc="seek">
-              <p:cTn dur="indefinite" id="2" nodeType="mainSeq">
+              <p:cTn id="2" dur="indefinite" nodeType="mainSeq">
                 <p:childTnLst>
                   <p:par>
-                    <p:cTn fill="hold">
+                    <p:cTn id="3" fill="hold">
                       <p:stCondLst>
                         <p:cond delay="indefinite"/>
                       </p:stCondLst>
                       <p:childTnLst>
                         <p:par>
-                          <p:cTn fill="hold">
+                          <p:cTn id="4" fill="hold">
                             <p:stCondLst>
                               <p:cond delay="0"/>
                             </p:stCondLst>
                             <p:childTnLst>
                               <p:par>
-                                <p:cTn fill="hold" nodeType="clickEffect" presetClass="entr" presetID="1" presetSubtype="0">
+                                <p:cTn id="5" presetID="1" presetClass="entr" presetSubtype="0" fill="hold" nodeType="clickEffect">
                                   <p:stCondLst>
                                     <p:cond delay="0"/>
                                   </p:stCondLst>
                                   <p:childTnLst>
                                     <p:set>
                                       <p:cBhvr>
-                                        <p:cTn dur="1" fill="hold">
+                                        <p:cTn id="6" dur="1" fill="hold">
                                           <p:stCondLst>
                                             <p:cond delay="0"/>
                                           </p:stCondLst>
@@ -8897,7 +9112,69 @@
                                         <p:tgtEl>
                                           <p:spTgt spid="76">
                                             <p:txEl>
-                                              <p:pRg end="0" st="0"/>
+                                              <p:pRg st="1" end="1"/>
+                                            </p:txEl>
+                                          </p:spTgt>
+                                        </p:tgtEl>
+                                        <p:attrNameLst>
+                                          <p:attrName>style.visibility</p:attrName>
+                                        </p:attrNameLst>
+                                      </p:cBhvr>
+                                      <p:to>
+                                        <p:strVal val="visible"/>
+                                      </p:to>
+                                    </p:set>
+                                  </p:childTnLst>
+                                </p:cTn>
+                              </p:par>
+                              <p:par>
+                                <p:cTn id="7" presetID="1" presetClass="entr" presetSubtype="0" fill="hold" nodeType="withEffect">
+                                  <p:stCondLst>
+                                    <p:cond delay="0"/>
+                                  </p:stCondLst>
+                                  <p:childTnLst>
+                                    <p:set>
+                                      <p:cBhvr>
+                                        <p:cTn id="8" dur="1" fill="hold">
+                                          <p:stCondLst>
+                                            <p:cond delay="0"/>
+                                          </p:stCondLst>
+                                        </p:cTn>
+                                        <p:tgtEl>
+                                          <p:spTgt spid="76">
+                                            <p:txEl>
+                                              <p:pRg st="2" end="2"/>
+                                            </p:txEl>
+                                          </p:spTgt>
+                                        </p:tgtEl>
+                                        <p:attrNameLst>
+                                          <p:attrName>style.visibility</p:attrName>
+                                        </p:attrNameLst>
+                                      </p:cBhvr>
+                                      <p:to>
+                                        <p:strVal val="visible"/>
+                                      </p:to>
+                                    </p:set>
+                                  </p:childTnLst>
+                                </p:cTn>
+                              </p:par>
+                              <p:par>
+                                <p:cTn id="9" presetID="1" presetClass="entr" presetSubtype="0" fill="hold" nodeType="withEffect">
+                                  <p:stCondLst>
+                                    <p:cond delay="0"/>
+                                  </p:stCondLst>
+                                  <p:childTnLst>
+                                    <p:set>
+                                      <p:cBhvr>
+                                        <p:cTn id="10" dur="1" fill="hold">
+                                          <p:stCondLst>
+                                            <p:cond delay="0"/>
+                                          </p:stCondLst>
+                                        </p:cTn>
+                                        <p:tgtEl>
+                                          <p:spTgt spid="76">
+                                            <p:txEl>
+                                              <p:pRg st="3" end="3"/>
                                             </p:txEl>
                                           </p:spTgt>
                                         </p:tgtEl>
@@ -8919,26 +9196,26 @@
                     </p:cTn>
                   </p:par>
                   <p:par>
-                    <p:cTn fill="hold">
+                    <p:cTn id="11" fill="hold">
                       <p:stCondLst>
                         <p:cond delay="indefinite"/>
                       </p:stCondLst>
                       <p:childTnLst>
                         <p:par>
-                          <p:cTn fill="hold">
+                          <p:cTn id="12" fill="hold">
                             <p:stCondLst>
                               <p:cond delay="0"/>
                             </p:stCondLst>
                             <p:childTnLst>
                               <p:par>
-                                <p:cTn fill="hold" nodeType="clickEffect" presetClass="entr" presetID="1" presetSubtype="0">
+                                <p:cTn id="13" presetID="1" presetClass="entr" presetSubtype="0" fill="hold" nodeType="clickEffect">
                                   <p:stCondLst>
                                     <p:cond delay="0"/>
                                   </p:stCondLst>
                                   <p:childTnLst>
                                     <p:set>
                                       <p:cBhvr>
-                                        <p:cTn dur="1" fill="hold">
+                                        <p:cTn id="14" dur="1" fill="hold">
                                           <p:stCondLst>
                                             <p:cond delay="0"/>
                                           </p:stCondLst>
@@ -8946,7 +9223,38 @@
                                         <p:tgtEl>
                                           <p:spTgt spid="76">
                                             <p:txEl>
-                                              <p:pRg end="1" st="1"/>
+                                              <p:pRg st="4" end="4"/>
+                                            </p:txEl>
+                                          </p:spTgt>
+                                        </p:tgtEl>
+                                        <p:attrNameLst>
+                                          <p:attrName>style.visibility</p:attrName>
+                                        </p:attrNameLst>
+                                      </p:cBhvr>
+                                      <p:to>
+                                        <p:strVal val="visible"/>
+                                      </p:to>
+                                    </p:set>
+                                  </p:childTnLst>
+                                </p:cTn>
+                              </p:par>
+                              <p:par>
+                                <p:cTn id="15" presetID="1" presetClass="entr" presetSubtype="0" fill="hold" nodeType="withEffect">
+                                  <p:stCondLst>
+                                    <p:cond delay="0"/>
+                                  </p:stCondLst>
+                                  <p:childTnLst>
+                                    <p:set>
+                                      <p:cBhvr>
+                                        <p:cTn id="16" dur="1" fill="hold">
+                                          <p:stCondLst>
+                                            <p:cond delay="0"/>
+                                          </p:stCondLst>
+                                        </p:cTn>
+                                        <p:tgtEl>
+                                          <p:spTgt spid="76">
+                                            <p:txEl>
+                                              <p:pRg st="5" end="5"/>
                                             </p:txEl>
                                           </p:spTgt>
                                         </p:tgtEl>
@@ -8968,26 +9276,26 @@
                     </p:cTn>
                   </p:par>
                   <p:par>
-                    <p:cTn fill="hold">
+                    <p:cTn id="17" fill="hold">
                       <p:stCondLst>
                         <p:cond delay="indefinite"/>
                       </p:stCondLst>
                       <p:childTnLst>
                         <p:par>
-                          <p:cTn fill="hold">
+                          <p:cTn id="18" fill="hold">
                             <p:stCondLst>
                               <p:cond delay="0"/>
                             </p:stCondLst>
                             <p:childTnLst>
                               <p:par>
-                                <p:cTn fill="hold" nodeType="clickEffect" presetClass="entr" presetID="1" presetSubtype="0">
+                                <p:cTn id="19" presetID="1" presetClass="entr" presetSubtype="0" fill="hold" nodeType="clickEffect">
                                   <p:stCondLst>
                                     <p:cond delay="0"/>
                                   </p:stCondLst>
                                   <p:childTnLst>
                                     <p:set>
                                       <p:cBhvr>
-                                        <p:cTn dur="1" fill="hold">
+                                        <p:cTn id="20" dur="1" fill="hold">
                                           <p:stCondLst>
                                             <p:cond delay="0"/>
                                           </p:stCondLst>
@@ -8995,7 +9303,38 @@
                                         <p:tgtEl>
                                           <p:spTgt spid="76">
                                             <p:txEl>
-                                              <p:pRg end="2" st="2"/>
+                                              <p:pRg st="6" end="6"/>
+                                            </p:txEl>
+                                          </p:spTgt>
+                                        </p:tgtEl>
+                                        <p:attrNameLst>
+                                          <p:attrName>style.visibility</p:attrName>
+                                        </p:attrNameLst>
+                                      </p:cBhvr>
+                                      <p:to>
+                                        <p:strVal val="visible"/>
+                                      </p:to>
+                                    </p:set>
+                                  </p:childTnLst>
+                                </p:cTn>
+                              </p:par>
+                              <p:par>
+                                <p:cTn id="21" presetID="1" presetClass="entr" presetSubtype="0" fill="hold" nodeType="withEffect">
+                                  <p:stCondLst>
+                                    <p:cond delay="0"/>
+                                  </p:stCondLst>
+                                  <p:childTnLst>
+                                    <p:set>
+                                      <p:cBhvr>
+                                        <p:cTn id="22" dur="1" fill="hold">
+                                          <p:stCondLst>
+                                            <p:cond delay="0"/>
+                                          </p:stCondLst>
+                                        </p:cTn>
+                                        <p:tgtEl>
+                                          <p:spTgt spid="76">
+                                            <p:txEl>
+                                              <p:pRg st="7" end="7"/>
                                             </p:txEl>
                                           </p:spTgt>
                                         </p:tgtEl>
@@ -9017,34 +9356,96 @@
                     </p:cTn>
                   </p:par>
                   <p:par>
-                    <p:cTn fill="hold">
+                    <p:cTn id="23" fill="hold">
                       <p:stCondLst>
                         <p:cond delay="indefinite"/>
                       </p:stCondLst>
                       <p:childTnLst>
                         <p:par>
-                          <p:cTn fill="hold">
+                          <p:cTn id="24" fill="hold">
                             <p:stCondLst>
                               <p:cond delay="0"/>
                             </p:stCondLst>
                             <p:childTnLst>
                               <p:par>
-                                <p:cTn fill="hold" nodeType="clickEffect" presetClass="entr" presetID="1" presetSubtype="0">
+                                <p:cTn id="25" presetID="1" presetClass="entr" presetSubtype="0" fill="hold" nodeType="clickEffect">
                                   <p:stCondLst>
                                     <p:cond delay="0"/>
                                   </p:stCondLst>
                                   <p:childTnLst>
                                     <p:set>
                                       <p:cBhvr>
-                                        <p:cTn dur="1" fill="hold">
+                                        <p:cTn id="26" dur="1" fill="hold">
                                           <p:stCondLst>
                                             <p:cond delay="0"/>
                                           </p:stCondLst>
                                         </p:cTn>
                                         <p:tgtEl>
-                                          <p:spTgt spid="76">
+                                          <p:spTgt spid="77">
                                             <p:txEl>
-                                              <p:pRg end="3" st="3"/>
+                                              <p:pRg st="1" end="1"/>
+                                            </p:txEl>
+                                          </p:spTgt>
+                                        </p:tgtEl>
+                                        <p:attrNameLst>
+                                          <p:attrName>style.visibility</p:attrName>
+                                        </p:attrNameLst>
+                                      </p:cBhvr>
+                                      <p:to>
+                                        <p:strVal val="visible"/>
+                                      </p:to>
+                                    </p:set>
+                                  </p:childTnLst>
+                                </p:cTn>
+                              </p:par>
+                              <p:par>
+                                <p:cTn id="27" presetID="1" presetClass="entr" presetSubtype="0" fill="hold" nodeType="withEffect">
+                                  <p:stCondLst>
+                                    <p:cond delay="0"/>
+                                  </p:stCondLst>
+                                  <p:childTnLst>
+                                    <p:set>
+                                      <p:cBhvr>
+                                        <p:cTn id="28" dur="1" fill="hold">
+                                          <p:stCondLst>
+                                            <p:cond delay="0"/>
+                                          </p:stCondLst>
+                                        </p:cTn>
+                                        <p:tgtEl>
+                                          <p:spTgt spid="77">
+                                            <p:txEl>
+                                              <p:pRg st="2" end="2"/>
+                                            </p:txEl>
+                                          </p:spTgt>
+                                        </p:tgtEl>
+                                        <p:attrNameLst>
+                                          <p:attrName>style.visibility</p:attrName>
+                                        </p:attrNameLst>
+                                      </p:cBhvr>
+                                      <p:to>
+                                        <p:strVal val="visible"/>
+                                      </p:to>
+                                    </p:set>
+                                  </p:childTnLst>
+                                </p:cTn>
+                              </p:par>
+                              <p:par>
+                                <p:cTn id="29" presetID="1" presetClass="entr" presetSubtype="0" fill="hold" nodeType="withEffect">
+                                  <p:stCondLst>
+                                    <p:cond delay="0"/>
+                                  </p:stCondLst>
+                                  <p:childTnLst>
+                                    <p:set>
+                                      <p:cBhvr>
+                                        <p:cTn id="30" dur="1" fill="hold">
+                                          <p:stCondLst>
+                                            <p:cond delay="0"/>
+                                          </p:stCondLst>
+                                        </p:cTn>
+                                        <p:tgtEl>
+                                          <p:spTgt spid="77">
+                                            <p:txEl>
+                                              <p:pRg st="3" end="3"/>
                                             </p:txEl>
                                           </p:spTgt>
                                         </p:tgtEl>
@@ -9066,34 +9467,34 @@
                     </p:cTn>
                   </p:par>
                   <p:par>
-                    <p:cTn fill="hold">
+                    <p:cTn id="31" fill="hold">
                       <p:stCondLst>
                         <p:cond delay="indefinite"/>
                       </p:stCondLst>
                       <p:childTnLst>
                         <p:par>
-                          <p:cTn fill="hold">
+                          <p:cTn id="32" fill="hold">
                             <p:stCondLst>
                               <p:cond delay="0"/>
                             </p:stCondLst>
                             <p:childTnLst>
                               <p:par>
-                                <p:cTn fill="hold" nodeType="clickEffect" presetClass="entr" presetID="1" presetSubtype="0">
+                                <p:cTn id="33" presetID="1" presetClass="entr" presetSubtype="0" fill="hold" nodeType="clickEffect">
                                   <p:stCondLst>
                                     <p:cond delay="0"/>
                                   </p:stCondLst>
                                   <p:childTnLst>
                                     <p:set>
                                       <p:cBhvr>
-                                        <p:cTn dur="1" fill="hold">
+                                        <p:cTn id="34" dur="1" fill="hold">
                                           <p:stCondLst>
                                             <p:cond delay="0"/>
                                           </p:stCondLst>
                                         </p:cTn>
                                         <p:tgtEl>
-                                          <p:spTgt spid="76">
+                                          <p:spTgt spid="77">
                                             <p:txEl>
-                                              <p:pRg end="4" st="4"/>
+                                              <p:pRg st="4" end="4"/>
                                             </p:txEl>
                                           </p:spTgt>
                                         </p:tgtEl>
@@ -9115,34 +9516,34 @@
                     </p:cTn>
                   </p:par>
                   <p:par>
-                    <p:cTn fill="hold">
+                    <p:cTn id="35" fill="hold">
                       <p:stCondLst>
                         <p:cond delay="indefinite"/>
                       </p:stCondLst>
                       <p:childTnLst>
                         <p:par>
-                          <p:cTn fill="hold">
+                          <p:cTn id="36" fill="hold">
                             <p:stCondLst>
                               <p:cond delay="0"/>
                             </p:stCondLst>
                             <p:childTnLst>
                               <p:par>
-                                <p:cTn fill="hold" nodeType="clickEffect" presetClass="entr" presetID="1" presetSubtype="0">
+                                <p:cTn id="37" presetID="1" presetClass="entr" presetSubtype="0" fill="hold" nodeType="clickEffect">
                                   <p:stCondLst>
                                     <p:cond delay="0"/>
                                   </p:stCondLst>
                                   <p:childTnLst>
                                     <p:set>
                                       <p:cBhvr>
-                                        <p:cTn dur="1" fill="hold">
+                                        <p:cTn id="38" dur="1" fill="hold">
                                           <p:stCondLst>
                                             <p:cond delay="0"/>
                                           </p:stCondLst>
                                         </p:cTn>
                                         <p:tgtEl>
-                                          <p:spTgt spid="76">
+                                          <p:spTgt spid="77">
                                             <p:txEl>
-                                              <p:pRg end="5" st="5"/>
+                                              <p:pRg st="5" end="5"/>
                                             </p:txEl>
                                           </p:spTgt>
                                         </p:tgtEl>
@@ -9164,34 +9565,34 @@
                     </p:cTn>
                   </p:par>
                   <p:par>
-                    <p:cTn fill="hold">
+                    <p:cTn id="39" fill="hold">
                       <p:stCondLst>
                         <p:cond delay="indefinite"/>
                       </p:stCondLst>
                       <p:childTnLst>
                         <p:par>
-                          <p:cTn fill="hold">
+                          <p:cTn id="40" fill="hold">
                             <p:stCondLst>
                               <p:cond delay="0"/>
                             </p:stCondLst>
                             <p:childTnLst>
                               <p:par>
-                                <p:cTn fill="hold" nodeType="clickEffect" presetClass="entr" presetID="1" presetSubtype="0">
+                                <p:cTn id="41" presetID="1" presetClass="entr" presetSubtype="0" fill="hold" nodeType="clickEffect">
                                   <p:stCondLst>
                                     <p:cond delay="0"/>
                                   </p:stCondLst>
                                   <p:childTnLst>
                                     <p:set>
                                       <p:cBhvr>
-                                        <p:cTn dur="1" fill="hold">
+                                        <p:cTn id="42" dur="1" fill="hold">
                                           <p:stCondLst>
                                             <p:cond delay="0"/>
                                           </p:stCondLst>
                                         </p:cTn>
                                         <p:tgtEl>
-                                          <p:spTgt spid="76">
+                                          <p:spTgt spid="77">
                                             <p:txEl>
-                                              <p:pRg end="6" st="6"/>
+                                              <p:pRg st="6" end="6"/>
                                             </p:txEl>
                                           </p:spTgt>
                                         </p:tgtEl>
@@ -9213,75 +9614,26 @@
                     </p:cTn>
                   </p:par>
                   <p:par>
-                    <p:cTn fill="hold">
+                    <p:cTn id="43" fill="hold">
                       <p:stCondLst>
                         <p:cond delay="indefinite"/>
                       </p:stCondLst>
                       <p:childTnLst>
                         <p:par>
-                          <p:cTn fill="hold">
+                          <p:cTn id="44" fill="hold">
                             <p:stCondLst>
                               <p:cond delay="0"/>
                             </p:stCondLst>
                             <p:childTnLst>
                               <p:par>
-                                <p:cTn fill="hold" nodeType="clickEffect" presetClass="entr" presetID="1" presetSubtype="0">
+                                <p:cTn id="45" presetID="1" presetClass="entr" presetSubtype="0" fill="hold" nodeType="clickEffect">
                                   <p:stCondLst>
                                     <p:cond delay="0"/>
                                   </p:stCondLst>
                                   <p:childTnLst>
                                     <p:set>
                                       <p:cBhvr>
-                                        <p:cTn dur="1" fill="hold">
-                                          <p:stCondLst>
-                                            <p:cond delay="0"/>
-                                          </p:stCondLst>
-                                        </p:cTn>
-                                        <p:tgtEl>
-                                          <p:spTgt spid="76">
-                                            <p:txEl>
-                                              <p:pRg end="7" st="7"/>
-                                            </p:txEl>
-                                          </p:spTgt>
-                                        </p:tgtEl>
-                                        <p:attrNameLst>
-                                          <p:attrName>style.visibility</p:attrName>
-                                        </p:attrNameLst>
-                                      </p:cBhvr>
-                                      <p:to>
-                                        <p:strVal val="visible"/>
-                                      </p:to>
-                                    </p:set>
-                                  </p:childTnLst>
-                                </p:cTn>
-                              </p:par>
-                            </p:childTnLst>
-                          </p:cTn>
-                        </p:par>
-                      </p:childTnLst>
-                    </p:cTn>
-                  </p:par>
-                  <p:par>
-                    <p:cTn fill="hold">
-                      <p:stCondLst>
-                        <p:cond delay="indefinite"/>
-                      </p:stCondLst>
-                      <p:childTnLst>
-                        <p:par>
-                          <p:cTn fill="hold">
-                            <p:stCondLst>
-                              <p:cond delay="0"/>
-                            </p:stCondLst>
-                            <p:childTnLst>
-                              <p:par>
-                                <p:cTn fill="hold" nodeType="clickEffect" presetClass="entr" presetID="1" presetSubtype="0">
-                                  <p:stCondLst>
-                                    <p:cond delay="0"/>
-                                  </p:stCondLst>
-                                  <p:childTnLst>
-                                    <p:set>
-                                      <p:cBhvr>
-                                        <p:cTn dur="1" fill="hold">
+                                        <p:cTn id="46" dur="1" fill="hold">
                                           <p:stCondLst>
                                             <p:cond delay="0"/>
                                           </p:stCondLst>
@@ -9289,350 +9641,7 @@
                                         <p:tgtEl>
                                           <p:spTgt spid="77">
                                             <p:txEl>
-                                              <p:pRg end="0" st="0"/>
-                                            </p:txEl>
-                                          </p:spTgt>
-                                        </p:tgtEl>
-                                        <p:attrNameLst>
-                                          <p:attrName>style.visibility</p:attrName>
-                                        </p:attrNameLst>
-                                      </p:cBhvr>
-                                      <p:to>
-                                        <p:strVal val="visible"/>
-                                      </p:to>
-                                    </p:set>
-                                  </p:childTnLst>
-                                </p:cTn>
-                              </p:par>
-                            </p:childTnLst>
-                          </p:cTn>
-                        </p:par>
-                      </p:childTnLst>
-                    </p:cTn>
-                  </p:par>
-                  <p:par>
-                    <p:cTn fill="hold">
-                      <p:stCondLst>
-                        <p:cond delay="indefinite"/>
-                      </p:stCondLst>
-                      <p:childTnLst>
-                        <p:par>
-                          <p:cTn fill="hold">
-                            <p:stCondLst>
-                              <p:cond delay="0"/>
-                            </p:stCondLst>
-                            <p:childTnLst>
-                              <p:par>
-                                <p:cTn fill="hold" nodeType="clickEffect" presetClass="entr" presetID="1" presetSubtype="0">
-                                  <p:stCondLst>
-                                    <p:cond delay="0"/>
-                                  </p:stCondLst>
-                                  <p:childTnLst>
-                                    <p:set>
-                                      <p:cBhvr>
-                                        <p:cTn dur="1" fill="hold">
-                                          <p:stCondLst>
-                                            <p:cond delay="0"/>
-                                          </p:stCondLst>
-                                        </p:cTn>
-                                        <p:tgtEl>
-                                          <p:spTgt spid="77">
-                                            <p:txEl>
-                                              <p:pRg end="1" st="1"/>
-                                            </p:txEl>
-                                          </p:spTgt>
-                                        </p:tgtEl>
-                                        <p:attrNameLst>
-                                          <p:attrName>style.visibility</p:attrName>
-                                        </p:attrNameLst>
-                                      </p:cBhvr>
-                                      <p:to>
-                                        <p:strVal val="visible"/>
-                                      </p:to>
-                                    </p:set>
-                                  </p:childTnLst>
-                                </p:cTn>
-                              </p:par>
-                            </p:childTnLst>
-                          </p:cTn>
-                        </p:par>
-                      </p:childTnLst>
-                    </p:cTn>
-                  </p:par>
-                  <p:par>
-                    <p:cTn fill="hold">
-                      <p:stCondLst>
-                        <p:cond delay="indefinite"/>
-                      </p:stCondLst>
-                      <p:childTnLst>
-                        <p:par>
-                          <p:cTn fill="hold">
-                            <p:stCondLst>
-                              <p:cond delay="0"/>
-                            </p:stCondLst>
-                            <p:childTnLst>
-                              <p:par>
-                                <p:cTn fill="hold" nodeType="clickEffect" presetClass="entr" presetID="1" presetSubtype="0">
-                                  <p:stCondLst>
-                                    <p:cond delay="0"/>
-                                  </p:stCondLst>
-                                  <p:childTnLst>
-                                    <p:set>
-                                      <p:cBhvr>
-                                        <p:cTn dur="1" fill="hold">
-                                          <p:stCondLst>
-                                            <p:cond delay="0"/>
-                                          </p:stCondLst>
-                                        </p:cTn>
-                                        <p:tgtEl>
-                                          <p:spTgt spid="77">
-                                            <p:txEl>
-                                              <p:pRg end="2" st="2"/>
-                                            </p:txEl>
-                                          </p:spTgt>
-                                        </p:tgtEl>
-                                        <p:attrNameLst>
-                                          <p:attrName>style.visibility</p:attrName>
-                                        </p:attrNameLst>
-                                      </p:cBhvr>
-                                      <p:to>
-                                        <p:strVal val="visible"/>
-                                      </p:to>
-                                    </p:set>
-                                  </p:childTnLst>
-                                </p:cTn>
-                              </p:par>
-                            </p:childTnLst>
-                          </p:cTn>
-                        </p:par>
-                      </p:childTnLst>
-                    </p:cTn>
-                  </p:par>
-                  <p:par>
-                    <p:cTn fill="hold">
-                      <p:stCondLst>
-                        <p:cond delay="indefinite"/>
-                      </p:stCondLst>
-                      <p:childTnLst>
-                        <p:par>
-                          <p:cTn fill="hold">
-                            <p:stCondLst>
-                              <p:cond delay="0"/>
-                            </p:stCondLst>
-                            <p:childTnLst>
-                              <p:par>
-                                <p:cTn fill="hold" nodeType="clickEffect" presetClass="entr" presetID="1" presetSubtype="0">
-                                  <p:stCondLst>
-                                    <p:cond delay="0"/>
-                                  </p:stCondLst>
-                                  <p:childTnLst>
-                                    <p:set>
-                                      <p:cBhvr>
-                                        <p:cTn dur="1" fill="hold">
-                                          <p:stCondLst>
-                                            <p:cond delay="0"/>
-                                          </p:stCondLst>
-                                        </p:cTn>
-                                        <p:tgtEl>
-                                          <p:spTgt spid="77">
-                                            <p:txEl>
-                                              <p:pRg end="3" st="3"/>
-                                            </p:txEl>
-                                          </p:spTgt>
-                                        </p:tgtEl>
-                                        <p:attrNameLst>
-                                          <p:attrName>style.visibility</p:attrName>
-                                        </p:attrNameLst>
-                                      </p:cBhvr>
-                                      <p:to>
-                                        <p:strVal val="visible"/>
-                                      </p:to>
-                                    </p:set>
-                                  </p:childTnLst>
-                                </p:cTn>
-                              </p:par>
-                            </p:childTnLst>
-                          </p:cTn>
-                        </p:par>
-                      </p:childTnLst>
-                    </p:cTn>
-                  </p:par>
-                  <p:par>
-                    <p:cTn fill="hold">
-                      <p:stCondLst>
-                        <p:cond delay="indefinite"/>
-                      </p:stCondLst>
-                      <p:childTnLst>
-                        <p:par>
-                          <p:cTn fill="hold">
-                            <p:stCondLst>
-                              <p:cond delay="0"/>
-                            </p:stCondLst>
-                            <p:childTnLst>
-                              <p:par>
-                                <p:cTn fill="hold" nodeType="clickEffect" presetClass="entr" presetID="1" presetSubtype="0">
-                                  <p:stCondLst>
-                                    <p:cond delay="0"/>
-                                  </p:stCondLst>
-                                  <p:childTnLst>
-                                    <p:set>
-                                      <p:cBhvr>
-                                        <p:cTn dur="1" fill="hold">
-                                          <p:stCondLst>
-                                            <p:cond delay="0"/>
-                                          </p:stCondLst>
-                                        </p:cTn>
-                                        <p:tgtEl>
-                                          <p:spTgt spid="77">
-                                            <p:txEl>
-                                              <p:pRg end="4" st="4"/>
-                                            </p:txEl>
-                                          </p:spTgt>
-                                        </p:tgtEl>
-                                        <p:attrNameLst>
-                                          <p:attrName>style.visibility</p:attrName>
-                                        </p:attrNameLst>
-                                      </p:cBhvr>
-                                      <p:to>
-                                        <p:strVal val="visible"/>
-                                      </p:to>
-                                    </p:set>
-                                  </p:childTnLst>
-                                </p:cTn>
-                              </p:par>
-                            </p:childTnLst>
-                          </p:cTn>
-                        </p:par>
-                      </p:childTnLst>
-                    </p:cTn>
-                  </p:par>
-                  <p:par>
-                    <p:cTn fill="hold">
-                      <p:stCondLst>
-                        <p:cond delay="indefinite"/>
-                      </p:stCondLst>
-                      <p:childTnLst>
-                        <p:par>
-                          <p:cTn fill="hold">
-                            <p:stCondLst>
-                              <p:cond delay="0"/>
-                            </p:stCondLst>
-                            <p:childTnLst>
-                              <p:par>
-                                <p:cTn fill="hold" nodeType="clickEffect" presetClass="entr" presetID="1" presetSubtype="0">
-                                  <p:stCondLst>
-                                    <p:cond delay="0"/>
-                                  </p:stCondLst>
-                                  <p:childTnLst>
-                                    <p:set>
-                                      <p:cBhvr>
-                                        <p:cTn dur="1" fill="hold">
-                                          <p:stCondLst>
-                                            <p:cond delay="0"/>
-                                          </p:stCondLst>
-                                        </p:cTn>
-                                        <p:tgtEl>
-                                          <p:spTgt spid="77">
-                                            <p:txEl>
-                                              <p:pRg end="5" st="5"/>
-                                            </p:txEl>
-                                          </p:spTgt>
-                                        </p:tgtEl>
-                                        <p:attrNameLst>
-                                          <p:attrName>style.visibility</p:attrName>
-                                        </p:attrNameLst>
-                                      </p:cBhvr>
-                                      <p:to>
-                                        <p:strVal val="visible"/>
-                                      </p:to>
-                                    </p:set>
-                                  </p:childTnLst>
-                                </p:cTn>
-                              </p:par>
-                            </p:childTnLst>
-                          </p:cTn>
-                        </p:par>
-                      </p:childTnLst>
-                    </p:cTn>
-                  </p:par>
-                  <p:par>
-                    <p:cTn fill="hold">
-                      <p:stCondLst>
-                        <p:cond delay="indefinite"/>
-                      </p:stCondLst>
-                      <p:childTnLst>
-                        <p:par>
-                          <p:cTn fill="hold">
-                            <p:stCondLst>
-                              <p:cond delay="0"/>
-                            </p:stCondLst>
-                            <p:childTnLst>
-                              <p:par>
-                                <p:cTn fill="hold" nodeType="clickEffect" presetClass="entr" presetID="1" presetSubtype="0">
-                                  <p:stCondLst>
-                                    <p:cond delay="0"/>
-                                  </p:stCondLst>
-                                  <p:childTnLst>
-                                    <p:set>
-                                      <p:cBhvr>
-                                        <p:cTn dur="1" fill="hold">
-                                          <p:stCondLst>
-                                            <p:cond delay="0"/>
-                                          </p:stCondLst>
-                                        </p:cTn>
-                                        <p:tgtEl>
-                                          <p:spTgt spid="77">
-                                            <p:txEl>
-                                              <p:pRg end="6" st="6"/>
-                                            </p:txEl>
-                                          </p:spTgt>
-                                        </p:tgtEl>
-                                        <p:attrNameLst>
-                                          <p:attrName>style.visibility</p:attrName>
-                                        </p:attrNameLst>
-                                      </p:cBhvr>
-                                      <p:to>
-                                        <p:strVal val="visible"/>
-                                      </p:to>
-                                    </p:set>
-                                  </p:childTnLst>
-                                </p:cTn>
-                              </p:par>
-                            </p:childTnLst>
-                          </p:cTn>
-                        </p:par>
-                      </p:childTnLst>
-                    </p:cTn>
-                  </p:par>
-                  <p:par>
-                    <p:cTn fill="hold">
-                      <p:stCondLst>
-                        <p:cond delay="indefinite"/>
-                      </p:stCondLst>
-                      <p:childTnLst>
-                        <p:par>
-                          <p:cTn fill="hold">
-                            <p:stCondLst>
-                              <p:cond delay="0"/>
-                            </p:stCondLst>
-                            <p:childTnLst>
-                              <p:par>
-                                <p:cTn fill="hold" nodeType="clickEffect" presetClass="entr" presetID="1" presetSubtype="0">
-                                  <p:stCondLst>
-                                    <p:cond delay="0"/>
-                                  </p:stCondLst>
-                                  <p:childTnLst>
-                                    <p:set>
-                                      <p:cBhvr>
-                                        <p:cTn dur="1" fill="hold">
-                                          <p:stCondLst>
-                                            <p:cond delay="0"/>
-                                          </p:stCondLst>
-                                        </p:cTn>
-                                        <p:tgtEl>
-                                          <p:spTgt spid="77">
-                                            <p:txEl>
-                                              <p:pRg end="7" st="7"/>
+                                              <p:pRg st="7" end="7"/>
                                             </p:txEl>
                                           </p:spTgt>
                                         </p:tgtEl>
@@ -9656,14 +9665,14 @@
                 </p:childTnLst>
               </p:cTn>
               <p:prevCondLst>
-                <p:cond evt="onPrev">
+                <p:cond evt="onPrev" delay="0">
                   <p:tgtEl>
                     <p:sldTgt/>
                   </p:tgtEl>
                 </p:cond>
               </p:prevCondLst>
               <p:nextCondLst>
-                <p:cond evt="onNext">
+                <p:cond evt="onNext" delay="0">
                   <p:tgtEl>
                     <p:sldTgt/>
                   </p:tgtEl>
@@ -9679,11 +9688,11 @@
 </file>
 
 <file path=ppt/slides/slide4.xml><?xml version="1.0" encoding="utf-8"?>
-<p:sld xmlns:a="http://schemas.openxmlformats.org/drawingml/2006/main" xmlns:r="http://schemas.openxmlformats.org/officeDocument/2006/relationships" xmlns:mc="http://schemas.openxmlformats.org/markup-compatibility/2006" xmlns:mv="urn:schemas-microsoft-com:mac:vml" xmlns:p="http://schemas.openxmlformats.org/presentationml/2006/main" xmlns:c="http://schemas.openxmlformats.org/drawingml/2006/chart" xmlns:dgm="http://schemas.openxmlformats.org/drawingml/2006/diagram" xmlns:o="urn:schemas-microsoft-com:office:office" xmlns:v="urn:schemas-microsoft-com:vml" xmlns:pvml="urn:schemas-microsoft-com:office:powerpoint" xmlns:com="http://schemas.openxmlformats.org/drawingml/2006/compatibility" xmlns:p14="http://schemas.microsoft.com/office/powerpoint/2010/main" xmlns:p15="http://schemas.microsoft.com/office/powerpoint/2012/main" xmlns:ahyp="http://schemas.microsoft.com/office/drawing/2018/hyperlinkcolor">
+<p:sld xmlns:a="http://schemas.openxmlformats.org/drawingml/2006/main" xmlns:r="http://schemas.openxmlformats.org/officeDocument/2006/relationships" xmlns:p="http://schemas.openxmlformats.org/presentationml/2006/main">
   <p:cSld>
     <p:spTree>
       <p:nvGrpSpPr>
-        <p:cNvPr id="81" name="Shape 81"/>
+        <p:cNvPr id="1" name="Shape 81"/>
         <p:cNvGrpSpPr/>
         <p:nvPr/>
       </p:nvGrpSpPr>
@@ -9698,7 +9707,9 @@
       <p:sp>
         <p:nvSpPr>
           <p:cNvPr id="82" name="Google Shape;82;p16"/>
-          <p:cNvSpPr txBox="1"/>
+          <p:cNvSpPr txBox="1">
+            <a:spLocks noGrp="1"/>
+          </p:cNvSpPr>
           <p:nvPr>
             <p:ph type="title"/>
           </p:nvPr>
@@ -9713,12 +9724,12 @@
           </a:prstGeom>
         </p:spPr>
         <p:txBody>
-          <a:bodyPr anchorCtr="0" anchor="t" bIns="91425" lIns="91425" spcFirstLastPara="1" rIns="91425" wrap="square" tIns="91425">
+          <a:bodyPr spcFirstLastPara="1" wrap="square" lIns="91425" tIns="91425" rIns="91425" bIns="91425" anchor="t" anchorCtr="0">
             <a:normAutofit fontScale="90000"/>
           </a:bodyPr>
           <a:lstStyle/>
           <a:p>
-            <a:pPr indent="0" lvl="0" marL="0" rtl="0" algn="ctr">
+            <a:pPr marL="0" lvl="0" indent="0" algn="ctr" rtl="0">
               <a:spcBef>
                 <a:spcPts val="0"/>
               </a:spcBef>
@@ -9728,25 +9739,22 @@
               <a:buNone/>
             </a:pPr>
             <a:r>
-              <a:rPr lang="en"/>
-              <a:t>Distributing a Python package</a:t>
+              <a:rPr lang="en" dirty="0"/>
+              <a:t>Distributing a Python application</a:t>
             </a:r>
-            <a:endParaRPr/>
-          </a:p>
-          <a:p>
-            <a:pPr indent="0" lvl="0" marL="0" rtl="0" algn="l">
-              <a:spcBef>
-                <a:spcPts val="0"/>
-              </a:spcBef>
-              <a:spcAft>
-                <a:spcPts val="0"/>
-              </a:spcAft>
-              <a:buNone/>
-            </a:pPr>
-            <a:r>
-              <a:t/>
-            </a:r>
-            <a:endParaRPr/>
+            <a:endParaRPr dirty="0"/>
+          </a:p>
+          <a:p>
+            <a:pPr marL="0" lvl="0" indent="0" algn="l" rtl="0">
+              <a:spcBef>
+                <a:spcPts val="0"/>
+              </a:spcBef>
+              <a:spcAft>
+                <a:spcPts val="0"/>
+              </a:spcAft>
+              <a:buNone/>
+            </a:pPr>
+            <a:endParaRPr dirty="0"/>
           </a:p>
         </p:txBody>
       </p:sp>
@@ -9759,11 +9767,11 @@
 </file>
 
 <file path=ppt/slides/slide5.xml><?xml version="1.0" encoding="utf-8"?>
-<p:sld xmlns:a="http://schemas.openxmlformats.org/drawingml/2006/main" xmlns:r="http://schemas.openxmlformats.org/officeDocument/2006/relationships" xmlns:mc="http://schemas.openxmlformats.org/markup-compatibility/2006" xmlns:mv="urn:schemas-microsoft-com:mac:vml" xmlns:p="http://schemas.openxmlformats.org/presentationml/2006/main" xmlns:c="http://schemas.openxmlformats.org/drawingml/2006/chart" xmlns:dgm="http://schemas.openxmlformats.org/drawingml/2006/diagram" xmlns:o="urn:schemas-microsoft-com:office:office" xmlns:v="urn:schemas-microsoft-com:vml" xmlns:pvml="urn:schemas-microsoft-com:office:powerpoint" xmlns:com="http://schemas.openxmlformats.org/drawingml/2006/compatibility" xmlns:p14="http://schemas.microsoft.com/office/powerpoint/2010/main" xmlns:p15="http://schemas.microsoft.com/office/powerpoint/2012/main" xmlns:ahyp="http://schemas.microsoft.com/office/drawing/2018/hyperlinkcolor">
+<p:sld xmlns:a="http://schemas.openxmlformats.org/drawingml/2006/main" xmlns:r="http://schemas.openxmlformats.org/officeDocument/2006/relationships" xmlns:p="http://schemas.openxmlformats.org/presentationml/2006/main">
   <p:cSld>
     <p:spTree>
       <p:nvGrpSpPr>
-        <p:cNvPr id="86" name="Shape 86"/>
+        <p:cNvPr id="1" name="Shape 86"/>
         <p:cNvGrpSpPr/>
         <p:nvPr/>
       </p:nvGrpSpPr>
@@ -9778,7 +9786,9 @@
       <p:sp>
         <p:nvSpPr>
           <p:cNvPr id="87" name="Google Shape;87;p17"/>
-          <p:cNvSpPr txBox="1"/>
+          <p:cNvSpPr txBox="1">
+            <a:spLocks noGrp="1"/>
+          </p:cNvSpPr>
           <p:nvPr>
             <p:ph type="title"/>
           </p:nvPr>
@@ -9793,23 +9803,20 @@
           </a:prstGeom>
         </p:spPr>
         <p:txBody>
-          <a:bodyPr anchorCtr="0" anchor="t" bIns="91425" lIns="91425" spcFirstLastPara="1" rIns="91425" wrap="square" tIns="91425">
+          <a:bodyPr spcFirstLastPara="1" wrap="square" lIns="91425" tIns="91425" rIns="91425" bIns="91425" anchor="t" anchorCtr="0">
             <a:normAutofit fontScale="90000"/>
           </a:bodyPr>
           <a:lstStyle/>
           <a:p>
-            <a:pPr indent="0" lvl="0" marL="0" rtl="0" algn="l">
-              <a:spcBef>
-                <a:spcPts val="0"/>
-              </a:spcBef>
-              <a:spcAft>
-                <a:spcPts val="0"/>
-              </a:spcAft>
-              <a:buNone/>
-            </a:pPr>
-            <a:r>
-              <a:t/>
-            </a:r>
+            <a:pPr marL="0" lvl="0" indent="0" algn="l" rtl="0">
+              <a:spcBef>
+                <a:spcPts val="0"/>
+              </a:spcBef>
+              <a:spcAft>
+                <a:spcPts val="0"/>
+              </a:spcAft>
+              <a:buNone/>
+            </a:pPr>
             <a:endParaRPr/>
           </a:p>
         </p:txBody>
@@ -9817,9 +9824,11 @@
       <p:sp>
         <p:nvSpPr>
           <p:cNvPr id="88" name="Google Shape;88;p17"/>
-          <p:cNvSpPr txBox="1"/>
+          <p:cNvSpPr txBox="1">
+            <a:spLocks noGrp="1"/>
+          </p:cNvSpPr>
           <p:nvPr>
-            <p:ph idx="1" type="body"/>
+            <p:ph type="body" idx="1"/>
           </p:nvPr>
         </p:nvSpPr>
         <p:spPr>
@@ -9832,12 +9841,12 @@
           </a:prstGeom>
         </p:spPr>
         <p:txBody>
-          <a:bodyPr anchorCtr="0" anchor="t" bIns="91425" lIns="91425" spcFirstLastPara="1" rIns="91425" wrap="square" tIns="91425">
+          <a:bodyPr spcFirstLastPara="1" wrap="square" lIns="91425" tIns="91425" rIns="91425" bIns="91425" anchor="t" anchorCtr="0">
             <a:normAutofit/>
           </a:bodyPr>
           <a:lstStyle/>
           <a:p>
-            <a:pPr indent="0" lvl="0" marL="0" rtl="0" algn="l">
+            <a:pPr marL="0" lvl="0" indent="0" algn="l" rtl="0">
               <a:spcBef>
                 <a:spcPts val="0"/>
               </a:spcBef>
@@ -9846,9 +9855,6 @@
               </a:spcAft>
               <a:buNone/>
             </a:pPr>
-            <a:r>
-              <a:t/>
-            </a:r>
             <a:endParaRPr/>
           </a:p>
         </p:txBody>
@@ -9890,11 +9896,11 @@
 </file>
 
 <file path=ppt/slides/slide6.xml><?xml version="1.0" encoding="utf-8"?>
-<p:sld xmlns:a="http://schemas.openxmlformats.org/drawingml/2006/main" xmlns:r="http://schemas.openxmlformats.org/officeDocument/2006/relationships" xmlns:mc="http://schemas.openxmlformats.org/markup-compatibility/2006" xmlns:mv="urn:schemas-microsoft-com:mac:vml" xmlns:p="http://schemas.openxmlformats.org/presentationml/2006/main" xmlns:c="http://schemas.openxmlformats.org/drawingml/2006/chart" xmlns:dgm="http://schemas.openxmlformats.org/drawingml/2006/diagram" xmlns:o="urn:schemas-microsoft-com:office:office" xmlns:v="urn:schemas-microsoft-com:vml" xmlns:pvml="urn:schemas-microsoft-com:office:powerpoint" xmlns:com="http://schemas.openxmlformats.org/drawingml/2006/compatibility" xmlns:p14="http://schemas.microsoft.com/office/powerpoint/2010/main" xmlns:p15="http://schemas.microsoft.com/office/powerpoint/2012/main" xmlns:ahyp="http://schemas.microsoft.com/office/drawing/2018/hyperlinkcolor">
+<p:sld xmlns:a="http://schemas.openxmlformats.org/drawingml/2006/main" xmlns:r="http://schemas.openxmlformats.org/officeDocument/2006/relationships" xmlns:p="http://schemas.openxmlformats.org/presentationml/2006/main">
   <p:cSld>
     <p:spTree>
       <p:nvGrpSpPr>
-        <p:cNvPr id="93" name="Shape 93"/>
+        <p:cNvPr id="1" name="Shape 93"/>
         <p:cNvGrpSpPr/>
         <p:nvPr/>
       </p:nvGrpSpPr>
@@ -9909,7 +9915,9 @@
       <p:sp>
         <p:nvSpPr>
           <p:cNvPr id="94" name="Google Shape;94;p18"/>
-          <p:cNvSpPr txBox="1"/>
+          <p:cNvSpPr txBox="1">
+            <a:spLocks noGrp="1"/>
+          </p:cNvSpPr>
           <p:nvPr>
             <p:ph type="title"/>
           </p:nvPr>
@@ -9924,12 +9932,12 @@
           </a:prstGeom>
         </p:spPr>
         <p:txBody>
-          <a:bodyPr anchorCtr="0" anchor="t" bIns="91425" lIns="91425" spcFirstLastPara="1" rIns="91425" wrap="square" tIns="91425">
+          <a:bodyPr spcFirstLastPara="1" wrap="square" lIns="91425" tIns="91425" rIns="91425" bIns="91425" anchor="t" anchorCtr="0">
             <a:normAutofit fontScale="90000"/>
           </a:bodyPr>
           <a:lstStyle/>
           <a:p>
-            <a:pPr indent="0" lvl="0" marL="0" rtl="0" algn="l">
+            <a:pPr marL="0" lvl="0" indent="0" algn="l" rtl="0">
               <a:spcBef>
                 <a:spcPts val="0"/>
               </a:spcBef>
@@ -9949,9 +9957,11 @@
       <p:sp>
         <p:nvSpPr>
           <p:cNvPr id="95" name="Google Shape;95;p18"/>
-          <p:cNvSpPr txBox="1"/>
+          <p:cNvSpPr txBox="1">
+            <a:spLocks noGrp="1"/>
+          </p:cNvSpPr>
           <p:nvPr>
-            <p:ph idx="1" type="body"/>
+            <p:ph type="body" idx="1"/>
           </p:nvPr>
         </p:nvSpPr>
         <p:spPr>
@@ -9964,12 +9974,12 @@
           </a:prstGeom>
         </p:spPr>
         <p:txBody>
-          <a:bodyPr anchorCtr="0" anchor="t" bIns="91425" lIns="91425" spcFirstLastPara="1" rIns="91425" wrap="square" tIns="91425">
+          <a:bodyPr spcFirstLastPara="1" wrap="square" lIns="91425" tIns="91425" rIns="91425" bIns="91425" anchor="t" anchorCtr="0">
             <a:normAutofit/>
           </a:bodyPr>
           <a:lstStyle/>
           <a:p>
-            <a:pPr indent="0" lvl="0" marL="0" rtl="0" algn="l">
+            <a:pPr marL="0" lvl="0" indent="0" algn="l" rtl="0">
               <a:spcBef>
                 <a:spcPts val="0"/>
               </a:spcBef>
@@ -9978,9 +9988,6 @@
               </a:spcAft>
               <a:buNone/>
             </a:pPr>
-            <a:r>
-              <a:t/>
-            </a:r>
             <a:endParaRPr/>
           </a:p>
         </p:txBody>
@@ -10022,11 +10029,11 @@
 </file>
 
 <file path=ppt/slides/slide7.xml><?xml version="1.0" encoding="utf-8"?>
-<p:sld xmlns:a="http://schemas.openxmlformats.org/drawingml/2006/main" xmlns:r="http://schemas.openxmlformats.org/officeDocument/2006/relationships" xmlns:mc="http://schemas.openxmlformats.org/markup-compatibility/2006" xmlns:mv="urn:schemas-microsoft-com:mac:vml" xmlns:p="http://schemas.openxmlformats.org/presentationml/2006/main" xmlns:c="http://schemas.openxmlformats.org/drawingml/2006/chart" xmlns:dgm="http://schemas.openxmlformats.org/drawingml/2006/diagram" xmlns:o="urn:schemas-microsoft-com:office:office" xmlns:v="urn:schemas-microsoft-com:vml" xmlns:pvml="urn:schemas-microsoft-com:office:powerpoint" xmlns:com="http://schemas.openxmlformats.org/drawingml/2006/compatibility" xmlns:p14="http://schemas.microsoft.com/office/powerpoint/2010/main" xmlns:p15="http://schemas.microsoft.com/office/powerpoint/2012/main" xmlns:ahyp="http://schemas.microsoft.com/office/drawing/2018/hyperlinkcolor">
+<p:sld xmlns:a="http://schemas.openxmlformats.org/drawingml/2006/main" xmlns:r="http://schemas.openxmlformats.org/officeDocument/2006/relationships" xmlns:p="http://schemas.openxmlformats.org/presentationml/2006/main">
   <p:cSld>
     <p:spTree>
       <p:nvGrpSpPr>
-        <p:cNvPr id="100" name="Shape 100"/>
+        <p:cNvPr id="1" name="Shape 100"/>
         <p:cNvGrpSpPr/>
         <p:nvPr/>
       </p:nvGrpSpPr>
@@ -10041,7 +10048,9 @@
       <p:sp>
         <p:nvSpPr>
           <p:cNvPr id="101" name="Google Shape;101;p19"/>
-          <p:cNvSpPr txBox="1"/>
+          <p:cNvSpPr txBox="1">
+            <a:spLocks noGrp="1"/>
+          </p:cNvSpPr>
           <p:nvPr>
             <p:ph type="title"/>
           </p:nvPr>
@@ -10056,12 +10065,12 @@
           </a:prstGeom>
         </p:spPr>
         <p:txBody>
-          <a:bodyPr anchorCtr="0" anchor="t" bIns="91425" lIns="91425" spcFirstLastPara="1" rIns="91425" wrap="square" tIns="91425">
+          <a:bodyPr spcFirstLastPara="1" wrap="square" lIns="91425" tIns="91425" rIns="91425" bIns="91425" anchor="t" anchorCtr="0">
             <a:normAutofit fontScale="90000"/>
           </a:bodyPr>
           <a:lstStyle/>
           <a:p>
-            <a:pPr indent="0" lvl="0" marL="0" rtl="0" algn="l">
+            <a:pPr marL="0" lvl="0" indent="0" algn="l" rtl="0">
               <a:spcBef>
                 <a:spcPts val="0"/>
               </a:spcBef>
@@ -10081,9 +10090,11 @@
       <p:sp>
         <p:nvSpPr>
           <p:cNvPr id="102" name="Google Shape;102;p19"/>
-          <p:cNvSpPr txBox="1"/>
+          <p:cNvSpPr txBox="1">
+            <a:spLocks noGrp="1"/>
+          </p:cNvSpPr>
           <p:nvPr>
-            <p:ph idx="1" type="body"/>
+            <p:ph type="body" idx="1"/>
           </p:nvPr>
         </p:nvSpPr>
         <p:spPr>
@@ -10096,12 +10107,12 @@
           </a:prstGeom>
         </p:spPr>
         <p:txBody>
-          <a:bodyPr anchorCtr="0" anchor="t" bIns="91425" lIns="91425" spcFirstLastPara="1" rIns="91425" wrap="square" tIns="91425">
+          <a:bodyPr spcFirstLastPara="1" wrap="square" lIns="91425" tIns="91425" rIns="91425" bIns="91425" anchor="t" anchorCtr="0">
             <a:normAutofit/>
           </a:bodyPr>
           <a:lstStyle/>
           <a:p>
-            <a:pPr indent="0" lvl="0" marL="0" rtl="0" algn="l">
+            <a:pPr marL="0" lvl="0" indent="0" algn="l" rtl="0">
               <a:lnSpc>
                 <a:spcPct val="100000"/>
               </a:lnSpc>
@@ -10136,7 +10147,7 @@
             </a:endParaRPr>
           </a:p>
           <a:p>
-            <a:pPr indent="457200" lvl="0" marL="0" rtl="0" algn="l">
+            <a:pPr marL="0" lvl="0" indent="457200" algn="l" rtl="0">
               <a:lnSpc>
                 <a:spcPct val="100000"/>
               </a:lnSpc>
@@ -10171,7 +10182,7 @@
             </a:endParaRPr>
           </a:p>
           <a:p>
-            <a:pPr indent="457200" lvl="0" marL="0" rtl="0" algn="l">
+            <a:pPr marL="0" lvl="0" indent="457200" algn="l" rtl="0">
               <a:lnSpc>
                 <a:spcPct val="100000"/>
               </a:lnSpc>
@@ -10206,7 +10217,7 @@
             </a:endParaRPr>
           </a:p>
           <a:p>
-            <a:pPr indent="457200" lvl="0" marL="0" rtl="0" algn="l">
+            <a:pPr marL="0" lvl="0" indent="457200" algn="l" rtl="0">
               <a:lnSpc>
                 <a:spcPct val="100000"/>
               </a:lnSpc>
@@ -10224,7 +10235,7 @@
               <a:buNone/>
             </a:pPr>
             <a:r>
-              <a:rPr b="1" lang="en" sz="1900">
+              <a:rPr lang="en" sz="1900" b="1">
                 <a:solidFill>
                   <a:srgbClr val="980000"/>
                 </a:solidFill>
@@ -10246,7 +10257,7 @@
             </a:endParaRPr>
           </a:p>
           <a:p>
-            <a:pPr indent="457200" lvl="0" marL="0" rtl="0" algn="l">
+            <a:pPr marL="0" lvl="0" indent="457200" algn="l" rtl="0">
               <a:lnSpc>
                 <a:spcPct val="100000"/>
               </a:lnSpc>
@@ -10281,7 +10292,7 @@
             </a:endParaRPr>
           </a:p>
           <a:p>
-            <a:pPr indent="457200" lvl="0" marL="0" rtl="0" algn="l">
+            <a:pPr marL="0" lvl="0" indent="457200" algn="l" rtl="0">
               <a:lnSpc>
                 <a:spcPct val="100000"/>
               </a:lnSpc>
@@ -10305,7 +10316,7 @@
               </a:rPr>
               <a:t>	__init__.py</a:t>
             </a:r>
-            <a:endParaRPr b="1" sz="1900">
+            <a:endParaRPr sz="1900" b="1">
               <a:solidFill>
                 <a:srgbClr val="980000"/>
               </a:solidFill>
@@ -10316,7 +10327,7 @@
             </a:endParaRPr>
           </a:p>
           <a:p>
-            <a:pPr indent="457200" lvl="0" marL="0" rtl="0" algn="l">
+            <a:pPr marL="0" lvl="0" indent="457200" algn="l" rtl="0">
               <a:lnSpc>
                 <a:spcPct val="100000"/>
               </a:lnSpc>
@@ -10351,7 +10362,7 @@
             </a:endParaRPr>
           </a:p>
           <a:p>
-            <a:pPr indent="457200" lvl="0" marL="0" rtl="0" algn="l">
+            <a:pPr marL="0" lvl="0" indent="457200" algn="l" rtl="0">
               <a:lnSpc>
                 <a:spcPct val="100000"/>
               </a:lnSpc>
@@ -10386,7 +10397,7 @@
             </a:endParaRPr>
           </a:p>
           <a:p>
-            <a:pPr indent="457200" lvl="0" marL="0" rtl="0" algn="l">
+            <a:pPr marL="0" lvl="0" indent="457200" algn="l" rtl="0">
               <a:lnSpc>
                 <a:spcPct val="100000"/>
               </a:lnSpc>
@@ -10421,7 +10432,7 @@
             </a:endParaRPr>
           </a:p>
           <a:p>
-            <a:pPr indent="457200" lvl="0" marL="0" rtl="0" algn="l">
+            <a:pPr marL="0" lvl="0" indent="457200" algn="l" rtl="0">
               <a:lnSpc>
                 <a:spcPct val="100000"/>
               </a:lnSpc>
@@ -10434,7 +10445,7 @@
               <a:buNone/>
             </a:pPr>
             <a:r>
-              <a:rPr b="1" lang="en" sz="1900">
+              <a:rPr lang="en" sz="1900" b="1">
                 <a:solidFill>
                   <a:srgbClr val="980000"/>
                 </a:solidFill>
@@ -10503,12 +10514,12 @@
             </a:ln>
           </p:spPr>
           <p:txBody>
-            <a:bodyPr anchorCtr="0" anchor="t" bIns="91425" lIns="91425" spcFirstLastPara="1" rIns="91425" wrap="square" tIns="91425">
+            <a:bodyPr spcFirstLastPara="1" wrap="square" lIns="91425" tIns="91425" rIns="91425" bIns="91425" anchor="t" anchorCtr="0">
               <a:spAutoFit/>
             </a:bodyPr>
             <a:lstStyle/>
             <a:p>
-              <a:pPr indent="0" lvl="0" marL="0" rtl="0" algn="l">
+              <a:pPr marL="0" lvl="0" indent="0" algn="l" rtl="0">
                 <a:spcBef>
                   <a:spcPts val="0"/>
                 </a:spcBef>
@@ -10567,14 +10578,14 @@
               <a:avLst/>
             </a:prstGeom>
             <a:noFill/>
-            <a:ln cap="flat" cmpd="sng" w="28575">
+            <a:ln w="28575" cap="flat" cmpd="sng">
               <a:solidFill>
                 <a:schemeClr val="dk2"/>
               </a:solidFill>
               <a:prstDash val="solid"/>
               <a:round/>
-              <a:headEnd len="med" w="med" type="none"/>
-              <a:tailEnd len="med" w="med" type="triangle"/>
+              <a:headEnd type="none" w="med" len="med"/>
+              <a:tailEnd type="triangle" w="med" len="med"/>
             </a:ln>
           </p:spPr>
         </p:cxnSp>
@@ -10599,12 +10610,12 @@
           </a:ln>
         </p:spPr>
         <p:txBody>
-          <a:bodyPr anchorCtr="0" anchor="t" bIns="91425" lIns="91425" spcFirstLastPara="1" rIns="91425" wrap="square" tIns="91425">
+          <a:bodyPr spcFirstLastPara="1" wrap="square" lIns="91425" tIns="91425" rIns="91425" bIns="91425" anchor="t" anchorCtr="0">
             <a:noAutofit/>
           </a:bodyPr>
           <a:lstStyle/>
           <a:p>
-            <a:pPr indent="0" lvl="0" marL="0" rtl="0" algn="l">
+            <a:pPr marL="0" lvl="0" indent="0" algn="l" rtl="0">
               <a:spcBef>
                 <a:spcPts val="0"/>
               </a:spcBef>
@@ -10629,18 +10640,15 @@
             </a:endParaRPr>
           </a:p>
           <a:p>
-            <a:pPr indent="0" lvl="0" marL="0" rtl="0" algn="l">
-              <a:spcBef>
-                <a:spcPts val="0"/>
-              </a:spcBef>
-              <a:spcAft>
-                <a:spcPts val="0"/>
-              </a:spcAft>
-              <a:buNone/>
-            </a:pPr>
-            <a:r>
-              <a:t/>
-            </a:r>
+            <a:pPr marL="0" lvl="0" indent="0" algn="l" rtl="0">
+              <a:spcBef>
+                <a:spcPts val="0"/>
+              </a:spcBef>
+              <a:spcAft>
+                <a:spcPts val="0"/>
+              </a:spcAft>
+              <a:buNone/>
+            </a:pPr>
             <a:endParaRPr sz="1800">
               <a:solidFill>
                 <a:schemeClr val="dk2"/>
@@ -10658,11 +10666,11 @@
 </file>
 
 <file path=ppt/slides/slide8.xml><?xml version="1.0" encoding="utf-8"?>
-<p:sld xmlns:a="http://schemas.openxmlformats.org/drawingml/2006/main" xmlns:r="http://schemas.openxmlformats.org/officeDocument/2006/relationships" xmlns:mc="http://schemas.openxmlformats.org/markup-compatibility/2006" xmlns:mv="urn:schemas-microsoft-com:mac:vml" xmlns:p="http://schemas.openxmlformats.org/presentationml/2006/main" xmlns:c="http://schemas.openxmlformats.org/drawingml/2006/chart" xmlns:dgm="http://schemas.openxmlformats.org/drawingml/2006/diagram" xmlns:o="urn:schemas-microsoft-com:office:office" xmlns:v="urn:schemas-microsoft-com:vml" xmlns:pvml="urn:schemas-microsoft-com:office:powerpoint" xmlns:com="http://schemas.openxmlformats.org/drawingml/2006/compatibility" xmlns:p14="http://schemas.microsoft.com/office/powerpoint/2010/main" xmlns:p15="http://schemas.microsoft.com/office/powerpoint/2012/main" xmlns:ahyp="http://schemas.microsoft.com/office/drawing/2018/hyperlinkcolor">
+<p:sld xmlns:a="http://schemas.openxmlformats.org/drawingml/2006/main" xmlns:r="http://schemas.openxmlformats.org/officeDocument/2006/relationships" xmlns:p="http://schemas.openxmlformats.org/presentationml/2006/main">
   <p:cSld>
     <p:spTree>
       <p:nvGrpSpPr>
-        <p:cNvPr id="110" name="Shape 110"/>
+        <p:cNvPr id="1" name="Shape 110"/>
         <p:cNvGrpSpPr/>
         <p:nvPr/>
       </p:nvGrpSpPr>
@@ -10677,7 +10685,9 @@
       <p:sp>
         <p:nvSpPr>
           <p:cNvPr id="111" name="Google Shape;111;p20"/>
-          <p:cNvSpPr txBox="1"/>
+          <p:cNvSpPr txBox="1">
+            <a:spLocks noGrp="1"/>
+          </p:cNvSpPr>
           <p:nvPr>
             <p:ph type="title"/>
           </p:nvPr>
@@ -10692,12 +10702,12 @@
           </a:prstGeom>
         </p:spPr>
         <p:txBody>
-          <a:bodyPr anchorCtr="0" anchor="t" bIns="91425" lIns="91425" spcFirstLastPara="1" rIns="91425" wrap="square" tIns="91425">
+          <a:bodyPr spcFirstLastPara="1" wrap="square" lIns="91425" tIns="91425" rIns="91425" bIns="91425" anchor="t" anchorCtr="0">
             <a:normAutofit fontScale="90000"/>
           </a:bodyPr>
           <a:lstStyle/>
           <a:p>
-            <a:pPr indent="0" lvl="0" marL="0" rtl="0" algn="l">
+            <a:pPr marL="0" lvl="0" indent="0" algn="l" rtl="0">
               <a:spcBef>
                 <a:spcPts val="0"/>
               </a:spcBef>
@@ -10717,9 +10727,11 @@
       <p:sp>
         <p:nvSpPr>
           <p:cNvPr id="112" name="Google Shape;112;p20"/>
-          <p:cNvSpPr txBox="1"/>
+          <p:cNvSpPr txBox="1">
+            <a:spLocks noGrp="1"/>
+          </p:cNvSpPr>
           <p:nvPr>
-            <p:ph idx="1" type="body"/>
+            <p:ph type="body" idx="1"/>
           </p:nvPr>
         </p:nvSpPr>
         <p:spPr>
@@ -10732,12 +10744,12 @@
           </a:prstGeom>
         </p:spPr>
         <p:txBody>
-          <a:bodyPr anchorCtr="0" anchor="t" bIns="91425" lIns="91425" spcFirstLastPara="1" rIns="91425" wrap="square" tIns="91425">
+          <a:bodyPr spcFirstLastPara="1" wrap="square" lIns="91425" tIns="91425" rIns="91425" bIns="91425" anchor="t" anchorCtr="0">
             <a:normAutofit/>
           </a:bodyPr>
           <a:lstStyle/>
           <a:p>
-            <a:pPr indent="0" lvl="0" marL="0" rtl="0" algn="l">
+            <a:pPr marL="0" lvl="0" indent="0" algn="l" rtl="0">
               <a:lnSpc>
                 <a:spcPct val="100000"/>
               </a:lnSpc>
@@ -10772,7 +10784,7 @@
             </a:endParaRPr>
           </a:p>
           <a:p>
-            <a:pPr indent="457200" lvl="0" marL="0" rtl="0" algn="l">
+            <a:pPr marL="0" lvl="0" indent="457200" algn="l" rtl="0">
               <a:lnSpc>
                 <a:spcPct val="100000"/>
               </a:lnSpc>
@@ -10807,7 +10819,7 @@
             </a:endParaRPr>
           </a:p>
           <a:p>
-            <a:pPr indent="457200" lvl="0" marL="0" rtl="0" algn="l">
+            <a:pPr marL="0" lvl="0" indent="457200" algn="l" rtl="0">
               <a:lnSpc>
                 <a:spcPct val="100000"/>
               </a:lnSpc>
@@ -10842,7 +10854,7 @@
             </a:endParaRPr>
           </a:p>
           <a:p>
-            <a:pPr indent="457200" lvl="0" marL="0" rtl="0" algn="l">
+            <a:pPr marL="0" lvl="0" indent="457200" algn="l" rtl="0">
               <a:lnSpc>
                 <a:spcPct val="100000"/>
               </a:lnSpc>
@@ -10869,19 +10881,7 @@
                 <a:cs typeface="Courier New"/>
                 <a:sym typeface="Courier New"/>
               </a:rPr>
-              <a:t>pyproject</a:t>
-            </a:r>
-            <a:r>
-              <a:rPr lang="en" sz="1900">
-                <a:solidFill>
-                  <a:schemeClr val="dk1"/>
-                </a:solidFill>
-                <a:latin typeface="Courier New"/>
-                <a:ea typeface="Courier New"/>
-                <a:cs typeface="Courier New"/>
-                <a:sym typeface="Courier New"/>
-              </a:rPr>
-              <a:t>.toml</a:t>
+              <a:t>pyproject.toml</a:t>
             </a:r>
             <a:endParaRPr sz="1900">
               <a:solidFill>
@@ -10894,7 +10894,7 @@
             </a:endParaRPr>
           </a:p>
           <a:p>
-            <a:pPr indent="457200" lvl="0" marL="0" rtl="0" algn="l">
+            <a:pPr marL="0" lvl="0" indent="457200" algn="l" rtl="0">
               <a:lnSpc>
                 <a:spcPct val="100000"/>
               </a:lnSpc>
@@ -10912,7 +10912,7 @@
               <a:buNone/>
             </a:pPr>
             <a:r>
-              <a:rPr b="1" lang="en" sz="1900">
+              <a:rPr lang="en" sz="1900" b="1">
                 <a:solidFill>
                   <a:srgbClr val="980000"/>
                 </a:solidFill>
@@ -10934,7 +10934,7 @@
             </a:endParaRPr>
           </a:p>
           <a:p>
-            <a:pPr indent="457200" lvl="0" marL="0" rtl="0" algn="l">
+            <a:pPr marL="0" lvl="0" indent="457200" algn="l" rtl="0">
               <a:lnSpc>
                 <a:spcPct val="100000"/>
               </a:lnSpc>
@@ -10969,7 +10969,7 @@
             </a:endParaRPr>
           </a:p>
           <a:p>
-            <a:pPr indent="457200" lvl="0" marL="0" rtl="0" algn="l">
+            <a:pPr marL="0" lvl="0" indent="457200" algn="l" rtl="0">
               <a:lnSpc>
                 <a:spcPct val="100000"/>
               </a:lnSpc>
@@ -10993,7 +10993,7 @@
               </a:rPr>
               <a:t>	__init__.py</a:t>
             </a:r>
-            <a:endParaRPr b="1" sz="1900">
+            <a:endParaRPr sz="1900" b="1">
               <a:solidFill>
                 <a:srgbClr val="980000"/>
               </a:solidFill>
@@ -11004,7 +11004,7 @@
             </a:endParaRPr>
           </a:p>
           <a:p>
-            <a:pPr indent="457200" lvl="0" marL="0" rtl="0" algn="l">
+            <a:pPr marL="0" lvl="0" indent="457200" algn="l" rtl="0">
               <a:lnSpc>
                 <a:spcPct val="100000"/>
               </a:lnSpc>
@@ -11039,7 +11039,7 @@
             </a:endParaRPr>
           </a:p>
           <a:p>
-            <a:pPr indent="457200" lvl="0" marL="0" rtl="0" algn="l">
+            <a:pPr marL="0" lvl="0" indent="457200" algn="l" rtl="0">
               <a:lnSpc>
                 <a:spcPct val="100000"/>
               </a:lnSpc>
@@ -11074,7 +11074,7 @@
             </a:endParaRPr>
           </a:p>
           <a:p>
-            <a:pPr indent="457200" lvl="0" marL="0" rtl="0" algn="l">
+            <a:pPr marL="0" lvl="0" indent="457200" algn="l" rtl="0">
               <a:lnSpc>
                 <a:spcPct val="100000"/>
               </a:lnSpc>
@@ -11109,7 +11109,7 @@
             </a:endParaRPr>
           </a:p>
           <a:p>
-            <a:pPr indent="457200" lvl="0" marL="0" rtl="0" algn="l">
+            <a:pPr marL="0" lvl="0" indent="457200" algn="l" rtl="0">
               <a:lnSpc>
                 <a:spcPct val="100000"/>
               </a:lnSpc>
@@ -11122,7 +11122,7 @@
               <a:buNone/>
             </a:pPr>
             <a:r>
-              <a:rPr b="1" lang="en" sz="1900">
+              <a:rPr lang="en" sz="1900" b="1">
                 <a:solidFill>
                   <a:srgbClr val="980000"/>
                 </a:solidFill>
@@ -11191,12 +11191,12 @@
             </a:ln>
           </p:spPr>
           <p:txBody>
-            <a:bodyPr anchorCtr="0" anchor="t" bIns="91425" lIns="91425" spcFirstLastPara="1" rIns="91425" wrap="square" tIns="91425">
+            <a:bodyPr spcFirstLastPara="1" wrap="square" lIns="91425" tIns="91425" rIns="91425" bIns="91425" anchor="t" anchorCtr="0">
               <a:spAutoFit/>
             </a:bodyPr>
             <a:lstStyle/>
             <a:p>
-              <a:pPr indent="0" lvl="0" marL="0" rtl="0" algn="l">
+              <a:pPr marL="0" lvl="0" indent="0" algn="l" rtl="0">
                 <a:spcBef>
                   <a:spcPts val="0"/>
                 </a:spcBef>
@@ -11207,16 +11207,12 @@
               </a:pPr>
               <a:r>
                 <a:rPr lang="en" sz="1600"/>
-                <a:t>Contains</a:t>
-              </a:r>
-              <a:r>
-                <a:rPr lang="en" sz="1600"/>
-                <a:t> absolute dependencies, especially useful if you’re publishing an application.</a:t>
+                <a:t>Contains absolute dependencies, especially useful if you’re publishing an application.</a:t>
               </a:r>
               <a:endParaRPr sz="1600"/>
             </a:p>
             <a:p>
-              <a:pPr indent="0" lvl="0" marL="0" rtl="0" algn="l">
+              <a:pPr marL="0" lvl="0" indent="0" algn="l" rtl="0">
                 <a:spcBef>
                   <a:spcPts val="0"/>
                 </a:spcBef>
@@ -11232,7 +11228,7 @@
               <a:endParaRPr sz="1600"/>
             </a:p>
             <a:p>
-              <a:pPr indent="0" lvl="0" marL="0" rtl="0" algn="l">
+              <a:pPr marL="0" lvl="0" indent="0" algn="l" rtl="0">
                 <a:spcBef>
                   <a:spcPts val="0"/>
                 </a:spcBef>
@@ -11270,7 +11266,7 @@
               </a:endParaRPr>
             </a:p>
             <a:p>
-              <a:pPr indent="0" lvl="0" marL="0" rtl="0" algn="l">
+              <a:pPr marL="0" lvl="0" indent="0" algn="l" rtl="0">
                 <a:spcBef>
                   <a:spcPts val="0"/>
                 </a:spcBef>
@@ -11286,7 +11282,7 @@
               <a:endParaRPr sz="1600"/>
             </a:p>
             <a:p>
-              <a:pPr indent="0" lvl="0" marL="0" rtl="0" algn="l">
+              <a:pPr marL="0" lvl="0" indent="0" algn="l" rtl="0">
                 <a:spcBef>
                   <a:spcPts val="0"/>
                 </a:spcBef>
@@ -11308,22 +11304,7 @@
                   <a:cs typeface="Courier New"/>
                   <a:sym typeface="Courier New"/>
                 </a:rPr>
-                <a:t>p</a:t>
-              </a:r>
-              <a:r>
-                <a:rPr lang="en" sz="1600">
-                  <a:solidFill>
-                    <a:schemeClr val="lt1"/>
-                  </a:solidFill>
-                  <a:highlight>
-                    <a:schemeClr val="dk1"/>
-                  </a:highlight>
-                  <a:latin typeface="Courier New"/>
-                  <a:ea typeface="Courier New"/>
-                  <a:cs typeface="Courier New"/>
-                  <a:sym typeface="Courier New"/>
-                </a:rPr>
-                <a:t>ip freeze &gt; requirements.txt</a:t>
+                <a:t>pip freeze &gt; requirements.txt</a:t>
               </a:r>
               <a:endParaRPr sz="1600">
                 <a:solidFill>
@@ -11357,14 +11338,14 @@
               <a:avLst/>
             </a:prstGeom>
             <a:noFill/>
-            <a:ln cap="flat" cmpd="sng" w="28575">
+            <a:ln w="28575" cap="flat" cmpd="sng">
               <a:solidFill>
                 <a:schemeClr val="dk2"/>
               </a:solidFill>
               <a:prstDash val="solid"/>
               <a:round/>
-              <a:headEnd len="med" w="med" type="none"/>
-              <a:tailEnd len="med" w="med" type="triangle"/>
+              <a:headEnd type="none" w="med" len="med"/>
+              <a:tailEnd type="triangle" w="med" len="med"/>
             </a:ln>
           </p:spPr>
         </p:cxnSp>
@@ -11378,11 +11359,11 @@
 </file>
 
 <file path=ppt/slides/slide9.xml><?xml version="1.0" encoding="utf-8"?>
-<p:sld xmlns:a="http://schemas.openxmlformats.org/drawingml/2006/main" xmlns:r="http://schemas.openxmlformats.org/officeDocument/2006/relationships" xmlns:mc="http://schemas.openxmlformats.org/markup-compatibility/2006" xmlns:mv="urn:schemas-microsoft-com:mac:vml" xmlns:p="http://schemas.openxmlformats.org/presentationml/2006/main" xmlns:c="http://schemas.openxmlformats.org/drawingml/2006/chart" xmlns:dgm="http://schemas.openxmlformats.org/drawingml/2006/diagram" xmlns:o="urn:schemas-microsoft-com:office:office" xmlns:v="urn:schemas-microsoft-com:vml" xmlns:pvml="urn:schemas-microsoft-com:office:powerpoint" xmlns:com="http://schemas.openxmlformats.org/drawingml/2006/compatibility" xmlns:p14="http://schemas.microsoft.com/office/powerpoint/2010/main" xmlns:p15="http://schemas.microsoft.com/office/powerpoint/2012/main" xmlns:ahyp="http://schemas.microsoft.com/office/drawing/2018/hyperlinkcolor">
+<p:sld xmlns:a="http://schemas.openxmlformats.org/drawingml/2006/main" xmlns:r="http://schemas.openxmlformats.org/officeDocument/2006/relationships" xmlns:p="http://schemas.openxmlformats.org/presentationml/2006/main">
   <p:cSld>
     <p:spTree>
       <p:nvGrpSpPr>
-        <p:cNvPr id="119" name="Shape 119"/>
+        <p:cNvPr id="1" name="Shape 119"/>
         <p:cNvGrpSpPr/>
         <p:nvPr/>
       </p:nvGrpSpPr>
@@ -11397,7 +11378,9 @@
       <p:sp>
         <p:nvSpPr>
           <p:cNvPr id="120" name="Google Shape;120;p21"/>
-          <p:cNvSpPr txBox="1"/>
+          <p:cNvSpPr txBox="1">
+            <a:spLocks noGrp="1"/>
+          </p:cNvSpPr>
           <p:nvPr>
             <p:ph type="title"/>
           </p:nvPr>
@@ -11412,12 +11395,12 @@
           </a:prstGeom>
         </p:spPr>
         <p:txBody>
-          <a:bodyPr anchorCtr="0" anchor="t" bIns="91425" lIns="91425" spcFirstLastPara="1" rIns="91425" wrap="square" tIns="91425">
+          <a:bodyPr spcFirstLastPara="1" wrap="square" lIns="91425" tIns="91425" rIns="91425" bIns="91425" anchor="t" anchorCtr="0">
             <a:normAutofit fontScale="90000"/>
           </a:bodyPr>
           <a:lstStyle/>
           <a:p>
-            <a:pPr indent="0" lvl="0" marL="0" rtl="0" algn="l">
+            <a:pPr marL="0" lvl="0" indent="0" algn="l" rtl="0">
               <a:spcBef>
                 <a:spcPts val="0"/>
               </a:spcBef>
@@ -11437,9 +11420,11 @@
       <p:sp>
         <p:nvSpPr>
           <p:cNvPr id="121" name="Google Shape;121;p21"/>
-          <p:cNvSpPr txBox="1"/>
+          <p:cNvSpPr txBox="1">
+            <a:spLocks noGrp="1"/>
+          </p:cNvSpPr>
           <p:nvPr>
-            <p:ph idx="1" type="body"/>
+            <p:ph type="body" idx="1"/>
           </p:nvPr>
         </p:nvSpPr>
         <p:spPr>
@@ -11452,12 +11437,12 @@
           </a:prstGeom>
         </p:spPr>
         <p:txBody>
-          <a:bodyPr anchorCtr="0" anchor="t" bIns="91425" lIns="91425" spcFirstLastPara="1" rIns="91425" wrap="square" tIns="91425">
+          <a:bodyPr spcFirstLastPara="1" wrap="square" lIns="91425" tIns="91425" rIns="91425" bIns="91425" anchor="t" anchorCtr="0">
             <a:normAutofit/>
           </a:bodyPr>
           <a:lstStyle/>
           <a:p>
-            <a:pPr indent="0" lvl="0" marL="0" rtl="0" algn="l">
+            <a:pPr marL="0" lvl="0" indent="0" algn="l" rtl="0">
               <a:lnSpc>
                 <a:spcPct val="100000"/>
               </a:lnSpc>
@@ -11492,7 +11477,7 @@
             </a:endParaRPr>
           </a:p>
           <a:p>
-            <a:pPr indent="457200" lvl="0" marL="0" rtl="0" algn="l">
+            <a:pPr marL="0" lvl="0" indent="457200" algn="l" rtl="0">
               <a:lnSpc>
                 <a:spcPct val="100000"/>
               </a:lnSpc>
@@ -11527,7 +11512,7 @@
             </a:endParaRPr>
           </a:p>
           <a:p>
-            <a:pPr indent="457200" lvl="0" marL="0" rtl="0" algn="l">
+            <a:pPr marL="0" lvl="0" indent="457200" algn="l" rtl="0">
               <a:lnSpc>
                 <a:spcPct val="100000"/>
               </a:lnSpc>
@@ -11562,7 +11547,7 @@
             </a:endParaRPr>
           </a:p>
           <a:p>
-            <a:pPr indent="457200" lvl="0" marL="0" rtl="0" algn="l">
+            <a:pPr marL="0" lvl="0" indent="457200" algn="l" rtl="0">
               <a:lnSpc>
                 <a:spcPct val="100000"/>
               </a:lnSpc>
@@ -11597,7 +11582,7 @@
             </a:endParaRPr>
           </a:p>
           <a:p>
-            <a:pPr indent="457200" lvl="0" marL="0" rtl="0" algn="l">
+            <a:pPr marL="0" lvl="0" indent="457200" algn="l" rtl="0">
               <a:lnSpc>
                 <a:spcPct val="100000"/>
               </a:lnSpc>
@@ -11637,7 +11622,7 @@
             </a:endParaRPr>
           </a:p>
           <a:p>
-            <a:pPr indent="457200" lvl="0" marL="0" rtl="0" algn="l">
+            <a:pPr marL="0" lvl="0" indent="457200" algn="l" rtl="0">
               <a:lnSpc>
                 <a:spcPct val="100000"/>
               </a:lnSpc>
@@ -11655,7 +11640,7 @@
               <a:buNone/>
             </a:pPr>
             <a:r>
-              <a:rPr b="1" lang="en" sz="1900">
+              <a:rPr lang="en" sz="1900" b="1">
                 <a:solidFill>
                   <a:srgbClr val="980000"/>
                 </a:solidFill>
@@ -11666,7 +11651,7 @@
               </a:rPr>
               <a:t>MANIFEST.in</a:t>
             </a:r>
-            <a:endParaRPr b="1" sz="1900">
+            <a:endParaRPr sz="1900" b="1">
               <a:solidFill>
                 <a:srgbClr val="980000"/>
               </a:solidFill>
@@ -11677,7 +11662,7 @@
             </a:endParaRPr>
           </a:p>
           <a:p>
-            <a:pPr indent="457200" lvl="0" marL="0" rtl="0" algn="l">
+            <a:pPr marL="0" lvl="0" indent="457200" algn="l" rtl="0">
               <a:lnSpc>
                 <a:spcPct val="100000"/>
               </a:lnSpc>
@@ -11712,7 +11697,7 @@
             </a:endParaRPr>
           </a:p>
           <a:p>
-            <a:pPr indent="457200" lvl="0" marL="0" rtl="0" algn="l">
+            <a:pPr marL="0" lvl="0" indent="457200" algn="l" rtl="0">
               <a:lnSpc>
                 <a:spcPct val="100000"/>
               </a:lnSpc>
@@ -11747,7 +11732,7 @@
             </a:endParaRPr>
           </a:p>
           <a:p>
-            <a:pPr indent="457200" lvl="0" marL="0" rtl="0" algn="l">
+            <a:pPr marL="0" lvl="0" indent="457200" algn="l" rtl="0">
               <a:lnSpc>
                 <a:spcPct val="100000"/>
               </a:lnSpc>
@@ -11782,7 +11767,7 @@
             </a:endParaRPr>
           </a:p>
           <a:p>
-            <a:pPr indent="457200" lvl="0" marL="0" rtl="0" algn="l">
+            <a:pPr marL="0" lvl="0" indent="457200" algn="l" rtl="0">
               <a:lnSpc>
                 <a:spcPct val="100000"/>
               </a:lnSpc>
@@ -11817,7 +11802,7 @@
             </a:endParaRPr>
           </a:p>
           <a:p>
-            <a:pPr indent="457200" lvl="0" marL="0" rtl="0" algn="l">
+            <a:pPr marL="0" lvl="0" indent="457200" algn="l" rtl="0">
               <a:lnSpc>
                 <a:spcPct val="100000"/>
               </a:lnSpc>
@@ -11852,7 +11837,7 @@
             </a:endParaRPr>
           </a:p>
           <a:p>
-            <a:pPr indent="457200" lvl="0" marL="0" rtl="0" algn="l">
+            <a:pPr marL="0" lvl="0" indent="457200" algn="l" rtl="0">
               <a:lnSpc>
                 <a:spcPct val="100000"/>
               </a:lnSpc>
@@ -11865,7 +11850,7 @@
               <a:buNone/>
             </a:pPr>
             <a:r>
-              <a:rPr b="1" lang="en" sz="1900">
+              <a:rPr lang="en" sz="1900" b="1">
                 <a:solidFill>
                   <a:srgbClr val="980000"/>
                 </a:solidFill>
@@ -11934,12 +11919,12 @@
             </a:ln>
           </p:spPr>
           <p:txBody>
-            <a:bodyPr anchorCtr="0" anchor="t" bIns="91425" lIns="91425" spcFirstLastPara="1" rIns="91425" wrap="square" tIns="91425">
+            <a:bodyPr spcFirstLastPara="1" wrap="square" lIns="91425" tIns="91425" rIns="91425" bIns="91425" anchor="t" anchorCtr="0">
               <a:spAutoFit/>
             </a:bodyPr>
             <a:lstStyle/>
             <a:p>
-              <a:pPr indent="0" lvl="0" marL="0" rtl="0" algn="l">
+              <a:pPr marL="0" lvl="0" indent="0" algn="l" rtl="0">
                 <a:spcBef>
                   <a:spcPts val="0"/>
                 </a:spcBef>
@@ -11984,14 +11969,14 @@
               <a:avLst/>
             </a:prstGeom>
             <a:noFill/>
-            <a:ln cap="flat" cmpd="sng" w="28575">
+            <a:ln w="28575" cap="flat" cmpd="sng">
               <a:solidFill>
                 <a:schemeClr val="dk2"/>
               </a:solidFill>
               <a:prstDash val="solid"/>
               <a:round/>
-              <a:headEnd len="med" w="med" type="none"/>
-              <a:tailEnd len="med" w="med" type="triangle"/>
+              <a:headEnd type="none" w="med" len="med"/>
+              <a:tailEnd type="triangle" w="med" len="med"/>
             </a:ln>
           </p:spPr>
         </p:cxnSp>
@@ -12005,7 +11990,288 @@
 </file>
 
 <file path=ppt/theme/theme1.xml><?xml version="1.0" encoding="utf-8"?>
-<a:theme xmlns:a="http://schemas.openxmlformats.org/drawingml/2006/main" xmlns:r="http://schemas.openxmlformats.org/officeDocument/2006/relationships">
+<a:theme xmlns:a="http://schemas.openxmlformats.org/drawingml/2006/main" name="Simple Light">
+  <a:themeElements>
+    <a:clrScheme name="Simple Light">
+      <a:dk1>
+        <a:srgbClr val="000000"/>
+      </a:dk1>
+      <a:lt1>
+        <a:srgbClr val="FFFFFF"/>
+      </a:lt1>
+      <a:dk2>
+        <a:srgbClr val="595959"/>
+      </a:dk2>
+      <a:lt2>
+        <a:srgbClr val="EEEEEE"/>
+      </a:lt2>
+      <a:accent1>
+        <a:srgbClr val="4285F4"/>
+      </a:accent1>
+      <a:accent2>
+        <a:srgbClr val="212121"/>
+      </a:accent2>
+      <a:accent3>
+        <a:srgbClr val="78909C"/>
+      </a:accent3>
+      <a:accent4>
+        <a:srgbClr val="FFAB40"/>
+      </a:accent4>
+      <a:accent5>
+        <a:srgbClr val="0097A7"/>
+      </a:accent5>
+      <a:accent6>
+        <a:srgbClr val="EEFF41"/>
+      </a:accent6>
+      <a:hlink>
+        <a:srgbClr val="0097A7"/>
+      </a:hlink>
+      <a:folHlink>
+        <a:srgbClr val="0097A7"/>
+      </a:folHlink>
+    </a:clrScheme>
+    <a:fontScheme name="Office">
+      <a:majorFont>
+        <a:latin typeface="Arial"/>
+        <a:ea typeface=""/>
+        <a:cs typeface=""/>
+        <a:font script="Jpan" typeface="ＭＳ Ｐゴシック"/>
+        <a:font script="Hang" typeface="맑은 고딕"/>
+        <a:font script="Hans" typeface="宋体"/>
+        <a:font script="Hant" typeface="新細明體"/>
+        <a:font script="Arab" typeface="Times New Roman"/>
+        <a:font script="Hebr" typeface="Times New Roman"/>
+        <a:font script="Thai" typeface="Angsana New"/>
+        <a:font script="Ethi" typeface="Nyala"/>
+        <a:font script="Beng" typeface="Vrinda"/>
+        <a:font script="Gujr" typeface="Shruti"/>
+        <a:font script="Khmr" typeface="MoolBoran"/>
+        <a:font script="Knda" typeface="Tunga"/>
+        <a:font script="Guru" typeface="Raavi"/>
+        <a:font script="Cans" typeface="Euphemia"/>
+        <a:font script="Cher" typeface="Plantagenet Cherokee"/>
+        <a:font script="Yiii" typeface="Microsoft Yi Baiti"/>
+        <a:font script="Tibt" typeface="Microsoft Himalaya"/>
+        <a:font script="Thaa" typeface="MV Boli"/>
+        <a:font script="Deva" typeface="Mangal"/>
+        <a:font script="Telu" typeface="Gautami"/>
+        <a:font script="Taml" typeface="Latha"/>
+        <a:font script="Syrc" typeface="Estrangelo Edessa"/>
+        <a:font script="Orya" typeface="Kalinga"/>
+        <a:font script="Mlym" typeface="Kartika"/>
+        <a:font script="Laoo" typeface="DokChampa"/>
+        <a:font script="Sinh" typeface="Iskoola Pota"/>
+        <a:font script="Mong" typeface="Mongolian Baiti"/>
+        <a:font script="Viet" typeface="Times New Roman"/>
+        <a:font script="Uigh" typeface="Microsoft Uighur"/>
+        <a:font script="Geor" typeface="Sylfaen"/>
+      </a:majorFont>
+      <a:minorFont>
+        <a:latin typeface="Arial"/>
+        <a:ea typeface=""/>
+        <a:cs typeface=""/>
+        <a:font script="Jpan" typeface="ＭＳ Ｐゴシック"/>
+        <a:font script="Hang" typeface="맑은 고딕"/>
+        <a:font script="Hans" typeface="宋体"/>
+        <a:font script="Hant" typeface="新細明體"/>
+        <a:font script="Arab" typeface="Arial"/>
+        <a:font script="Hebr" typeface="Arial"/>
+        <a:font script="Thai" typeface="Cordia New"/>
+        <a:font script="Ethi" typeface="Nyala"/>
+        <a:font script="Beng" typeface="Vrinda"/>
+        <a:font script="Gujr" typeface="Shruti"/>
+        <a:font script="Khmr" typeface="DaunPenh"/>
+        <a:font script="Knda" typeface="Tunga"/>
+        <a:font script="Guru" typeface="Raavi"/>
+        <a:font script="Cans" typeface="Euphemia"/>
+        <a:font script="Cher" typeface="Plantagenet Cherokee"/>
+        <a:font script="Yiii" typeface="Microsoft Yi Baiti"/>
+        <a:font script="Tibt" typeface="Microsoft Himalaya"/>
+        <a:font script="Thaa" typeface="MV Boli"/>
+        <a:font script="Deva" typeface="Mangal"/>
+        <a:font script="Telu" typeface="Gautami"/>
+        <a:font script="Taml" typeface="Latha"/>
+        <a:font script="Syrc" typeface="Estrangelo Edessa"/>
+        <a:font script="Orya" typeface="Kalinga"/>
+        <a:font script="Mlym" typeface="Kartika"/>
+        <a:font script="Laoo" typeface="DokChampa"/>
+        <a:font script="Sinh" typeface="Iskoola Pota"/>
+        <a:font script="Mong" typeface="Mongolian Baiti"/>
+        <a:font script="Viet" typeface="Arial"/>
+        <a:font script="Uigh" typeface="Microsoft Uighur"/>
+        <a:font script="Geor" typeface="Sylfaen"/>
+      </a:minorFont>
+    </a:fontScheme>
+    <a:fmtScheme name="Office">
+      <a:fillStyleLst>
+        <a:solidFill>
+          <a:schemeClr val="phClr"/>
+        </a:solidFill>
+        <a:gradFill rotWithShape="1">
+          <a:gsLst>
+            <a:gs pos="0">
+              <a:schemeClr val="phClr">
+                <a:tint val="50000"/>
+                <a:satMod val="300000"/>
+              </a:schemeClr>
+            </a:gs>
+            <a:gs pos="35000">
+              <a:schemeClr val="phClr">
+                <a:tint val="37000"/>
+                <a:satMod val="300000"/>
+              </a:schemeClr>
+            </a:gs>
+            <a:gs pos="100000">
+              <a:schemeClr val="phClr">
+                <a:tint val="15000"/>
+                <a:satMod val="350000"/>
+              </a:schemeClr>
+            </a:gs>
+          </a:gsLst>
+          <a:lin ang="16200000" scaled="1"/>
+        </a:gradFill>
+        <a:gradFill rotWithShape="1">
+          <a:gsLst>
+            <a:gs pos="0">
+              <a:schemeClr val="phClr">
+                <a:tint val="100000"/>
+                <a:shade val="100000"/>
+                <a:satMod val="130000"/>
+              </a:schemeClr>
+            </a:gs>
+            <a:gs pos="100000">
+              <a:schemeClr val="phClr">
+                <a:tint val="50000"/>
+                <a:shade val="100000"/>
+                <a:satMod val="350000"/>
+              </a:schemeClr>
+            </a:gs>
+          </a:gsLst>
+          <a:lin ang="16200000" scaled="0"/>
+        </a:gradFill>
+      </a:fillStyleLst>
+      <a:lnStyleLst>
+        <a:ln w="9525" cap="flat" cmpd="sng" algn="ctr">
+          <a:solidFill>
+            <a:schemeClr val="phClr">
+              <a:shade val="95000"/>
+              <a:satMod val="105000"/>
+            </a:schemeClr>
+          </a:solidFill>
+          <a:prstDash val="solid"/>
+        </a:ln>
+        <a:ln w="25400" cap="flat" cmpd="sng" algn="ctr">
+          <a:solidFill>
+            <a:schemeClr val="phClr"/>
+          </a:solidFill>
+          <a:prstDash val="solid"/>
+        </a:ln>
+        <a:ln w="38100" cap="flat" cmpd="sng" algn="ctr">
+          <a:solidFill>
+            <a:schemeClr val="phClr"/>
+          </a:solidFill>
+          <a:prstDash val="solid"/>
+        </a:ln>
+      </a:lnStyleLst>
+      <a:effectStyleLst>
+        <a:effectStyle>
+          <a:effectLst>
+            <a:outerShdw blurRad="40000" dist="20000" dir="5400000" rotWithShape="0">
+              <a:srgbClr val="000000">
+                <a:alpha val="38000"/>
+              </a:srgbClr>
+            </a:outerShdw>
+          </a:effectLst>
+        </a:effectStyle>
+        <a:effectStyle>
+          <a:effectLst>
+            <a:outerShdw blurRad="40000" dist="23000" dir="5400000" rotWithShape="0">
+              <a:srgbClr val="000000">
+                <a:alpha val="35000"/>
+              </a:srgbClr>
+            </a:outerShdw>
+          </a:effectLst>
+        </a:effectStyle>
+        <a:effectStyle>
+          <a:effectLst>
+            <a:outerShdw blurRad="40000" dist="23000" dir="5400000" rotWithShape="0">
+              <a:srgbClr val="000000">
+                <a:alpha val="35000"/>
+              </a:srgbClr>
+            </a:outerShdw>
+          </a:effectLst>
+          <a:scene3d>
+            <a:camera prst="orthographicFront">
+              <a:rot lat="0" lon="0" rev="0"/>
+            </a:camera>
+            <a:lightRig rig="threePt" dir="t">
+              <a:rot lat="0" lon="0" rev="1200000"/>
+            </a:lightRig>
+          </a:scene3d>
+          <a:sp3d>
+            <a:bevelT w="63500" h="25400"/>
+          </a:sp3d>
+        </a:effectStyle>
+      </a:effectStyleLst>
+      <a:bgFillStyleLst>
+        <a:solidFill>
+          <a:schemeClr val="phClr"/>
+        </a:solidFill>
+        <a:gradFill rotWithShape="1">
+          <a:gsLst>
+            <a:gs pos="0">
+              <a:schemeClr val="phClr">
+                <a:tint val="40000"/>
+                <a:satMod val="350000"/>
+              </a:schemeClr>
+            </a:gs>
+            <a:gs pos="40000">
+              <a:schemeClr val="phClr">
+                <a:tint val="45000"/>
+                <a:shade val="99000"/>
+                <a:satMod val="350000"/>
+              </a:schemeClr>
+            </a:gs>
+            <a:gs pos="100000">
+              <a:schemeClr val="phClr">
+                <a:shade val="20000"/>
+                <a:satMod val="255000"/>
+              </a:schemeClr>
+            </a:gs>
+          </a:gsLst>
+          <a:path path="circle">
+            <a:fillToRect l="50000" t="-80000" r="50000" b="180000"/>
+          </a:path>
+        </a:gradFill>
+        <a:gradFill rotWithShape="1">
+          <a:gsLst>
+            <a:gs pos="0">
+              <a:schemeClr val="phClr">
+                <a:tint val="80000"/>
+                <a:satMod val="300000"/>
+              </a:schemeClr>
+            </a:gs>
+            <a:gs pos="100000">
+              <a:schemeClr val="phClr">
+                <a:shade val="30000"/>
+                <a:satMod val="200000"/>
+              </a:schemeClr>
+            </a:gs>
+          </a:gsLst>
+          <a:path path="circle">
+            <a:fillToRect l="50000" t="50000" r="50000" b="50000"/>
+          </a:path>
+        </a:gradFill>
+      </a:bgFillStyleLst>
+    </a:fmtScheme>
+  </a:themeElements>
+  <a:objectDefaults/>
+  <a:extraClrSchemeLst/>
+</a:theme>
+</file>
+
+<file path=ppt/theme/theme2.xml><?xml version="1.0" encoding="utf-8"?>
+<a:theme xmlns:a="http://schemas.openxmlformats.org/drawingml/2006/main">
   <a:themeElements>
     <a:clrScheme name="Default">
       <a:dk1>
@@ -12280,284 +12546,7 @@
       </a:bgFillStyleLst>
     </a:fmtScheme>
   </a:themeElements>
-</a:theme>
-</file>
-
-<file path=ppt/theme/theme2.xml><?xml version="1.0" encoding="utf-8"?>
-<a:theme xmlns:a="http://schemas.openxmlformats.org/drawingml/2006/main" xmlns:r="http://schemas.openxmlformats.org/officeDocument/2006/relationships" name="Simple Light">
-  <a:themeElements>
-    <a:clrScheme name="Simple Light">
-      <a:dk1>
-        <a:srgbClr val="000000"/>
-      </a:dk1>
-      <a:lt1>
-        <a:srgbClr val="FFFFFF"/>
-      </a:lt1>
-      <a:dk2>
-        <a:srgbClr val="595959"/>
-      </a:dk2>
-      <a:lt2>
-        <a:srgbClr val="EEEEEE"/>
-      </a:lt2>
-      <a:accent1>
-        <a:srgbClr val="4285F4"/>
-      </a:accent1>
-      <a:accent2>
-        <a:srgbClr val="212121"/>
-      </a:accent2>
-      <a:accent3>
-        <a:srgbClr val="78909C"/>
-      </a:accent3>
-      <a:accent4>
-        <a:srgbClr val="FFAB40"/>
-      </a:accent4>
-      <a:accent5>
-        <a:srgbClr val="0097A7"/>
-      </a:accent5>
-      <a:accent6>
-        <a:srgbClr val="EEFF41"/>
-      </a:accent6>
-      <a:hlink>
-        <a:srgbClr val="0097A7"/>
-      </a:hlink>
-      <a:folHlink>
-        <a:srgbClr val="0097A7"/>
-      </a:folHlink>
-    </a:clrScheme>
-    <a:fontScheme name="Office">
-      <a:majorFont>
-        <a:latin typeface="Arial"/>
-        <a:ea typeface=""/>
-        <a:cs typeface=""/>
-        <a:font script="Jpan" typeface="ＭＳ Ｐゴシック"/>
-        <a:font script="Hang" typeface="맑은 고딕"/>
-        <a:font script="Hans" typeface="宋体"/>
-        <a:font script="Hant" typeface="新細明體"/>
-        <a:font script="Arab" typeface="Times New Roman"/>
-        <a:font script="Hebr" typeface="Times New Roman"/>
-        <a:font script="Thai" typeface="Angsana New"/>
-        <a:font script="Ethi" typeface="Nyala"/>
-        <a:font script="Beng" typeface="Vrinda"/>
-        <a:font script="Gujr" typeface="Shruti"/>
-        <a:font script="Khmr" typeface="MoolBoran"/>
-        <a:font script="Knda" typeface="Tunga"/>
-        <a:font script="Guru" typeface="Raavi"/>
-        <a:font script="Cans" typeface="Euphemia"/>
-        <a:font script="Cher" typeface="Plantagenet Cherokee"/>
-        <a:font script="Yiii" typeface="Microsoft Yi Baiti"/>
-        <a:font script="Tibt" typeface="Microsoft Himalaya"/>
-        <a:font script="Thaa" typeface="MV Boli"/>
-        <a:font script="Deva" typeface="Mangal"/>
-        <a:font script="Telu" typeface="Gautami"/>
-        <a:font script="Taml" typeface="Latha"/>
-        <a:font script="Syrc" typeface="Estrangelo Edessa"/>
-        <a:font script="Orya" typeface="Kalinga"/>
-        <a:font script="Mlym" typeface="Kartika"/>
-        <a:font script="Laoo" typeface="DokChampa"/>
-        <a:font script="Sinh" typeface="Iskoola Pota"/>
-        <a:font script="Mong" typeface="Mongolian Baiti"/>
-        <a:font script="Viet" typeface="Times New Roman"/>
-        <a:font script="Uigh" typeface="Microsoft Uighur"/>
-        <a:font script="Geor" typeface="Sylfaen"/>
-      </a:majorFont>
-      <a:minorFont>
-        <a:latin typeface="Arial"/>
-        <a:ea typeface=""/>
-        <a:cs typeface=""/>
-        <a:font script="Jpan" typeface="ＭＳ Ｐゴシック"/>
-        <a:font script="Hang" typeface="맑은 고딕"/>
-        <a:font script="Hans" typeface="宋体"/>
-        <a:font script="Hant" typeface="新細明體"/>
-        <a:font script="Arab" typeface="Arial"/>
-        <a:font script="Hebr" typeface="Arial"/>
-        <a:font script="Thai" typeface="Cordia New"/>
-        <a:font script="Ethi" typeface="Nyala"/>
-        <a:font script="Beng" typeface="Vrinda"/>
-        <a:font script="Gujr" typeface="Shruti"/>
-        <a:font script="Khmr" typeface="DaunPenh"/>
-        <a:font script="Knda" typeface="Tunga"/>
-        <a:font script="Guru" typeface="Raavi"/>
-        <a:font script="Cans" typeface="Euphemia"/>
-        <a:font script="Cher" typeface="Plantagenet Cherokee"/>
-        <a:font script="Yiii" typeface="Microsoft Yi Baiti"/>
-        <a:font script="Tibt" typeface="Microsoft Himalaya"/>
-        <a:font script="Thaa" typeface="MV Boli"/>
-        <a:font script="Deva" typeface="Mangal"/>
-        <a:font script="Telu" typeface="Gautami"/>
-        <a:font script="Taml" typeface="Latha"/>
-        <a:font script="Syrc" typeface="Estrangelo Edessa"/>
-        <a:font script="Orya" typeface="Kalinga"/>
-        <a:font script="Mlym" typeface="Kartika"/>
-        <a:font script="Laoo" typeface="DokChampa"/>
-        <a:font script="Sinh" typeface="Iskoola Pota"/>
-        <a:font script="Mong" typeface="Mongolian Baiti"/>
-        <a:font script="Viet" typeface="Arial"/>
-        <a:font script="Uigh" typeface="Microsoft Uighur"/>
-        <a:font script="Geor" typeface="Sylfaen"/>
-      </a:minorFont>
-    </a:fontScheme>
-    <a:fmtScheme name="Office">
-      <a:fillStyleLst>
-        <a:solidFill>
-          <a:schemeClr val="phClr"/>
-        </a:solidFill>
-        <a:gradFill rotWithShape="1">
-          <a:gsLst>
-            <a:gs pos="0">
-              <a:schemeClr val="phClr">
-                <a:tint val="50000"/>
-                <a:satMod val="300000"/>
-              </a:schemeClr>
-            </a:gs>
-            <a:gs pos="35000">
-              <a:schemeClr val="phClr">
-                <a:tint val="37000"/>
-                <a:satMod val="300000"/>
-              </a:schemeClr>
-            </a:gs>
-            <a:gs pos="100000">
-              <a:schemeClr val="phClr">
-                <a:tint val="15000"/>
-                <a:satMod val="350000"/>
-              </a:schemeClr>
-            </a:gs>
-          </a:gsLst>
-          <a:lin ang="16200000" scaled="1"/>
-        </a:gradFill>
-        <a:gradFill rotWithShape="1">
-          <a:gsLst>
-            <a:gs pos="0">
-              <a:schemeClr val="phClr">
-                <a:tint val="100000"/>
-                <a:shade val="100000"/>
-                <a:satMod val="130000"/>
-              </a:schemeClr>
-            </a:gs>
-            <a:gs pos="100000">
-              <a:schemeClr val="phClr">
-                <a:tint val="50000"/>
-                <a:shade val="100000"/>
-                <a:satMod val="350000"/>
-              </a:schemeClr>
-            </a:gs>
-          </a:gsLst>
-          <a:lin ang="16200000" scaled="0"/>
-        </a:gradFill>
-      </a:fillStyleLst>
-      <a:lnStyleLst>
-        <a:ln w="9525" cap="flat" cmpd="sng" algn="ctr">
-          <a:solidFill>
-            <a:schemeClr val="phClr">
-              <a:shade val="95000"/>
-              <a:satMod val="105000"/>
-            </a:schemeClr>
-          </a:solidFill>
-          <a:prstDash val="solid"/>
-        </a:ln>
-        <a:ln w="25400" cap="flat" cmpd="sng" algn="ctr">
-          <a:solidFill>
-            <a:schemeClr val="phClr"/>
-          </a:solidFill>
-          <a:prstDash val="solid"/>
-        </a:ln>
-        <a:ln w="38100" cap="flat" cmpd="sng" algn="ctr">
-          <a:solidFill>
-            <a:schemeClr val="phClr"/>
-          </a:solidFill>
-          <a:prstDash val="solid"/>
-        </a:ln>
-      </a:lnStyleLst>
-      <a:effectStyleLst>
-        <a:effectStyle>
-          <a:effectLst>
-            <a:outerShdw blurRad="40000" dist="20000" dir="5400000" rotWithShape="0">
-              <a:srgbClr val="000000">
-                <a:alpha val="38000"/>
-              </a:srgbClr>
-            </a:outerShdw>
-          </a:effectLst>
-        </a:effectStyle>
-        <a:effectStyle>
-          <a:effectLst>
-            <a:outerShdw blurRad="40000" dist="23000" dir="5400000" rotWithShape="0">
-              <a:srgbClr val="000000">
-                <a:alpha val="35000"/>
-              </a:srgbClr>
-            </a:outerShdw>
-          </a:effectLst>
-        </a:effectStyle>
-        <a:effectStyle>
-          <a:effectLst>
-            <a:outerShdw blurRad="40000" dist="23000" dir="5400000" rotWithShape="0">
-              <a:srgbClr val="000000">
-                <a:alpha val="35000"/>
-              </a:srgbClr>
-            </a:outerShdw>
-          </a:effectLst>
-          <a:scene3d>
-            <a:camera prst="orthographicFront">
-              <a:rot lat="0" lon="0" rev="0"/>
-            </a:camera>
-            <a:lightRig rig="threePt" dir="t">
-              <a:rot lat="0" lon="0" rev="1200000"/>
-            </a:lightRig>
-          </a:scene3d>
-          <a:sp3d>
-            <a:bevelT w="63500" h="25400"/>
-          </a:sp3d>
-        </a:effectStyle>
-      </a:effectStyleLst>
-      <a:bgFillStyleLst>
-        <a:solidFill>
-          <a:schemeClr val="phClr"/>
-        </a:solidFill>
-        <a:gradFill rotWithShape="1">
-          <a:gsLst>
-            <a:gs pos="0">
-              <a:schemeClr val="phClr">
-                <a:tint val="40000"/>
-                <a:satMod val="350000"/>
-              </a:schemeClr>
-            </a:gs>
-            <a:gs pos="40000">
-              <a:schemeClr val="phClr">
-                <a:tint val="45000"/>
-                <a:shade val="99000"/>
-                <a:satMod val="350000"/>
-              </a:schemeClr>
-            </a:gs>
-            <a:gs pos="100000">
-              <a:schemeClr val="phClr">
-                <a:shade val="20000"/>
-                <a:satMod val="255000"/>
-              </a:schemeClr>
-            </a:gs>
-          </a:gsLst>
-          <a:path path="circle">
-            <a:fillToRect l="50000" t="-80000" r="50000" b="180000"/>
-          </a:path>
-        </a:gradFill>
-        <a:gradFill rotWithShape="1">
-          <a:gsLst>
-            <a:gs pos="0">
-              <a:schemeClr val="phClr">
-                <a:tint val="80000"/>
-                <a:satMod val="300000"/>
-              </a:schemeClr>
-            </a:gs>
-            <a:gs pos="100000">
-              <a:schemeClr val="phClr">
-                <a:shade val="30000"/>
-                <a:satMod val="200000"/>
-              </a:schemeClr>
-            </a:gs>
-          </a:gsLst>
-          <a:path path="circle">
-            <a:fillToRect l="50000" t="50000" r="50000" b="50000"/>
-          </a:path>
-        </a:gradFill>
-      </a:bgFillStyleLst>
-    </a:fmtScheme>
-  </a:themeElements>
+  <a:objectDefaults/>
+  <a:extraClrSchemeLst/>
 </a:theme>
 </file>